--- a/presentations/17-cartridge-store/17-cartridge-store-lecture.pptx
+++ b/presentations/17-cartridge-store/17-cartridge-store-lecture.pptx
@@ -39,9 +39,11 @@
     <p:sldId id="287" r:id="rId33"/>
     <p:sldId id="288" r:id="rId34"/>
     <p:sldId id="289" r:id="rId35"/>
+    <p:sldId id="290" r:id="rId36"/>
+    <p:sldId id="291" r:id="rId37"/>
   </p:sldIdLst>
   <p:notesMasterIdLst>
-    <p:notesMasterId r:id="rId36"/>
+    <p:notesMasterId r:id="rId38"/>
   </p:notesMasterIdLst>
   <p:sldSz cx="12192000" cy="6858000"/>
   <p:notesSz cx="6858000" cy="12192000"/>
@@ -140,7 +142,7 @@
   <p:extLst>
     <p:ext uri="{521415D9-36F7-43E2-AB2F-B90AF26B5E84}">
       <p14:sectionLst xmlns:p14="http://schemas.microsoft.com/office/powerpoint/2010/main">
-        <p14:section name="Opening" id="{7b795ab2-c4c3-176d-5307-0316ad0df707}">
+        <p14:section name="Opening" id="{d97ac382-26c2-f78e-982f-51d9aa0fa146}">
           <p14:sldIdLst>
             <p14:sldId id="256"/>
             <p14:sldId id="257"/>
@@ -151,7 +153,7 @@
             <p14:sldId id="262"/>
           </p14:sldIdLst>
         </p14:section>
-        <p14:section name="What exactly gets published" id="{20891314-bed5-c663-20ef-c52ee10d7757}">
+        <p14:section name="What exactly gets published" id="{d3daf64d-aee9-f010-08d0-708e1d628c4b}">
           <p14:sldIdLst>
             <p14:sldId id="263"/>
             <p14:sldId id="264"/>
@@ -161,7 +163,7 @@
             <p14:sldId id="268"/>
           </p14:sldIdLst>
         </p14:section>
-        <p14:section name="The visitor" id="{88828325-c49b-20af-a3b8-9ae6317d37a3}">
+        <p14:section name="The visitor" id="{40625194-ace4-d507-620b-9a8d40a204bb}">
           <p14:sldIdLst>
             <p14:sldId id="269"/>
             <p14:sldId id="270"/>
@@ -169,7 +171,7 @@
             <p14:sldId id="272"/>
           </p14:sldIdLst>
         </p14:section>
-        <p14:section name="The registered user" id="{5329fe86-4c24-b963-70d6-aecc6ab861ae}">
+        <p14:section name="The registered user" id="{7c4f051e-4944-75c4-a397-80f40ae65e52}">
           <p14:sldIdLst>
             <p14:sldId id="273"/>
             <p14:sldId id="274"/>
@@ -177,29 +179,31 @@
             <p14:sldId id="276"/>
             <p14:sldId id="277"/>
             <p14:sldId id="278"/>
+            <p14:sldId id="279"/>
+            <p14:sldId id="280"/>
           </p14:sldIdLst>
         </p14:section>
-        <p14:section name="The editor" id="{fbbd4f69-d7d1-2894-e8d5-78e4b2b48181}">
+        <p14:section name="The editor" id="{b1d8e619-5d38-d011-c08e-5679531c58b5}">
           <p14:sldIdLst>
-            <p14:sldId id="279"/>
-            <p14:sldId id="280"/>
             <p14:sldId id="281"/>
             <p14:sldId id="282"/>
+            <p14:sldId id="283"/>
+            <p14:sldId id="284"/>
           </p14:sldIdLst>
         </p14:section>
-        <p14:section name="The administrator" id="{c4595d04-6137-e4ec-67b9-c3b95be3a169}">
+        <p14:section name="The administrator" id="{9e010d3f-380c-af6f-c948-2d8adac9a7d6}">
           <p14:sldIdLst>
-            <p14:sldId id="283"/>
-            <p14:sldId id="284"/>
             <p14:sldId id="285"/>
             <p14:sldId id="286"/>
             <p14:sldId id="287"/>
             <p14:sldId id="288"/>
+            <p14:sldId id="289"/>
+            <p14:sldId id="290"/>
           </p14:sldIdLst>
         </p14:section>
-        <p14:section name="Closing" id="{5fcff959-e242-2cbc-6bd5-a96676904b91}">
+        <p14:section name="Closing" id="{b25f887f-11bc-dadd-86fe-b928d531d5f4}">
           <p14:sldIdLst>
-            <p14:sldId id="289"/>
+            <p14:sldId id="291"/>
           </p14:sldIdLst>
         </p14:section>
       </p14:sectionLst>
@@ -1838,7 +1842,8 @@
           <a:p>
             <a:r>
               <a:rPr lang="en-US" dirty="0"/>
-              <a:t/>
+              <a:t>Condensed from a real session against a local Store.
+</a:t>
             </a:r>
             <a:endParaRPr lang="en-US" dirty="0"/>
           </a:p>
@@ -2454,7 +2459,7 @@
           <a:p>
             <a:r>
               <a:rPr lang="en-US" dirty="0"/>
-              <a:t>Source: scripts/store/admin_deploy.sh</a:t>
+              <a:t/>
             </a:r>
             <a:endParaRPr lang="en-US" dirty="0"/>
           </a:p>
@@ -2718,7 +2723,7 @@
           <a:p>
             <a:r>
               <a:rPr lang="en-US" dirty="0"/>
-              <a:t/>
+              <a:t>Source: scripts/store/admin_deploy.sh</a:t>
             </a:r>
             <a:endParaRPr lang="en-US" dirty="0"/>
           </a:p>
@@ -3006,6 +3011,182 @@
             <a:fld id="{F7021451-1387-4CA6-816F-3879F97B5CBC}" type="slidenum">
               <a:rPr lang="en-US"/>
               <a:t>34</a:t>
+            </a:fld>
+            <a:endParaRPr lang="en-US"/>
+          </a:p>
+        </p:txBody>
+      </p:sp>
+    </p:spTree>
+    <p:extLst>
+      <p:ext uri="{BB962C8B-B14F-4D97-AF65-F5344CB8AC3E}">
+        <p14:creationId xmlns:p14="http://schemas.microsoft.com/office/powerpoint/2010/main" val="1024086991"/>
+      </p:ext>
+    </p:extLst>
+  </p:cSld>
+  <p:clrMapOvr>
+    <a:masterClrMapping/>
+  </p:clrMapOvr>
+</p:notes>
+</file>
+
+<file path=ppt/notesSlides/notesSlide35.xml><?xml version="1.0" encoding="utf-8"?>
+<p:notes xmlns:a="http://schemas.openxmlformats.org/drawingml/2006/main" xmlns:r="http://schemas.openxmlformats.org/officeDocument/2006/relationships" xmlns:p="http://schemas.openxmlformats.org/presentationml/2006/main">
+  <p:cSld>
+    <p:spTree>
+      <p:nvGrpSpPr>
+        <p:cNvPr id="1" name=""/>
+        <p:cNvGrpSpPr/>
+        <p:nvPr/>
+      </p:nvGrpSpPr>
+      <p:grpSpPr>
+        <a:xfrm>
+          <a:off x="0" y="0"/>
+          <a:ext cx="0" cy="0"/>
+          <a:chOff x="0" y="0"/>
+          <a:chExt cx="0" cy="0"/>
+        </a:xfrm>
+      </p:grpSpPr>
+      <p:sp>
+        <p:nvSpPr>
+          <p:cNvPr id="2" name="Slide Image Placeholder 1"/>
+          <p:cNvSpPr>
+            <a:spLocks noGrp="1" noRot="1" noChangeAspect="1"/>
+          </p:cNvSpPr>
+          <p:nvPr>
+            <p:ph type="sldImg"/>
+          </p:nvPr>
+        </p:nvSpPr>
+        <p:spPr/>
+      </p:sp>
+      <p:sp>
+        <p:nvSpPr>
+          <p:cNvPr id="3" name="Notes Placeholder 2"/>
+          <p:cNvSpPr>
+            <a:spLocks noGrp="1"/>
+          </p:cNvSpPr>
+          <p:nvPr>
+            <p:ph type="body" idx="1"/>
+          </p:nvPr>
+        </p:nvSpPr>
+        <p:spPr/>
+        <p:txBody>
+          <a:bodyPr/>
+          <a:lstStyle/>
+          <a:p>
+            <a:r>
+              <a:rPr lang="en-US" dirty="0"/>
+              <a:t/>
+            </a:r>
+            <a:endParaRPr lang="en-US" dirty="0"/>
+          </a:p>
+        </p:txBody>
+      </p:sp>
+      <p:sp>
+        <p:nvSpPr>
+          <p:cNvPr id="4" name="Slide Number Placeholder 3"/>
+          <p:cNvSpPr>
+            <a:spLocks noGrp="1"/>
+          </p:cNvSpPr>
+          <p:nvPr>
+            <p:ph type="sldNum" sz="quarter" idx="10"/>
+          </p:nvPr>
+        </p:nvSpPr>
+        <p:spPr/>
+        <p:txBody>
+          <a:bodyPr/>
+          <a:lstStyle/>
+          <a:p>
+            <a:fld id="{F7021451-1387-4CA6-816F-3879F97B5CBC}" type="slidenum">
+              <a:rPr lang="en-US"/>
+              <a:t>35</a:t>
+            </a:fld>
+            <a:endParaRPr lang="en-US"/>
+          </a:p>
+        </p:txBody>
+      </p:sp>
+    </p:spTree>
+    <p:extLst>
+      <p:ext uri="{BB962C8B-B14F-4D97-AF65-F5344CB8AC3E}">
+        <p14:creationId xmlns:p14="http://schemas.microsoft.com/office/powerpoint/2010/main" val="1024086991"/>
+      </p:ext>
+    </p:extLst>
+  </p:cSld>
+  <p:clrMapOvr>
+    <a:masterClrMapping/>
+  </p:clrMapOvr>
+</p:notes>
+</file>
+
+<file path=ppt/notesSlides/notesSlide36.xml><?xml version="1.0" encoding="utf-8"?>
+<p:notes xmlns:a="http://schemas.openxmlformats.org/drawingml/2006/main" xmlns:r="http://schemas.openxmlformats.org/officeDocument/2006/relationships" xmlns:p="http://schemas.openxmlformats.org/presentationml/2006/main">
+  <p:cSld>
+    <p:spTree>
+      <p:nvGrpSpPr>
+        <p:cNvPr id="1" name=""/>
+        <p:cNvGrpSpPr/>
+        <p:nvPr/>
+      </p:nvGrpSpPr>
+      <p:grpSpPr>
+        <a:xfrm>
+          <a:off x="0" y="0"/>
+          <a:ext cx="0" cy="0"/>
+          <a:chOff x="0" y="0"/>
+          <a:chExt cx="0" cy="0"/>
+        </a:xfrm>
+      </p:grpSpPr>
+      <p:sp>
+        <p:nvSpPr>
+          <p:cNvPr id="2" name="Slide Image Placeholder 1"/>
+          <p:cNvSpPr>
+            <a:spLocks noGrp="1" noRot="1" noChangeAspect="1"/>
+          </p:cNvSpPr>
+          <p:nvPr>
+            <p:ph type="sldImg"/>
+          </p:nvPr>
+        </p:nvSpPr>
+        <p:spPr/>
+      </p:sp>
+      <p:sp>
+        <p:nvSpPr>
+          <p:cNvPr id="3" name="Notes Placeholder 2"/>
+          <p:cNvSpPr>
+            <a:spLocks noGrp="1"/>
+          </p:cNvSpPr>
+          <p:nvPr>
+            <p:ph type="body" idx="1"/>
+          </p:nvPr>
+        </p:nvSpPr>
+        <p:spPr/>
+        <p:txBody>
+          <a:bodyPr/>
+          <a:lstStyle/>
+          <a:p>
+            <a:r>
+              <a:rPr lang="en-US" dirty="0"/>
+              <a:t/>
+            </a:r>
+            <a:endParaRPr lang="en-US" dirty="0"/>
+          </a:p>
+        </p:txBody>
+      </p:sp>
+      <p:sp>
+        <p:nvSpPr>
+          <p:cNvPr id="4" name="Slide Number Placeholder 3"/>
+          <p:cNvSpPr>
+            <a:spLocks noGrp="1"/>
+          </p:cNvSpPr>
+          <p:nvPr>
+            <p:ph type="sldNum" sz="quarter" idx="10"/>
+          </p:nvPr>
+        </p:nvSpPr>
+        <p:spPr/>
+        <p:txBody>
+          <a:bodyPr/>
+          <a:lstStyle/>
+          <a:p>
+            <a:fld id="{F7021451-1387-4CA6-816F-3879F97B5CBC}" type="slidenum">
+              <a:rPr lang="en-US"/>
+              <a:t>36</a:t>
             </a:fld>
             <a:endParaRPr lang="en-US"/>
           </a:p>
@@ -4653,7 +4834,7 @@
               <a:buNone/>
             </a:pPr>
             <a:r>
-              <a:rPr lang="en-US" sz="1050" dirty="0">
+              <a:rPr lang="en-US" sz="1000" dirty="0">
                 <a:solidFill>
                   <a:srgbClr val="E6EDF2"/>
                 </a:solidFill>
@@ -4663,14 +4844,14 @@
               </a:rPr>
               <a:t>{</a:t>
             </a:r>
-            <a:endParaRPr lang="en-US" sz="1050" dirty="0"/>
+            <a:endParaRPr lang="en-US" sz="1000" dirty="0"/>
           </a:p>
           <a:p>
             <a:pPr indent="0" marL="0">
               <a:buNone/>
             </a:pPr>
             <a:r>
-              <a:rPr lang="en-US" sz="1050" dirty="0">
+              <a:rPr lang="en-US" sz="1000" dirty="0">
                 <a:solidFill>
                   <a:srgbClr val="E6EDF2"/>
                 </a:solidFill>
@@ -4680,14 +4861,14 @@
               </a:rPr>
               <a:t>  "abi": "prg32-metadata-1.0",</a:t>
             </a:r>
-            <a:endParaRPr lang="en-US" sz="1050" dirty="0"/>
+            <a:endParaRPr lang="en-US" sz="1000" dirty="0"/>
           </a:p>
           <a:p>
             <a:pPr indent="0" marL="0">
               <a:buNone/>
             </a:pPr>
             <a:r>
-              <a:rPr lang="en-US" sz="1050" dirty="0">
+              <a:rPr lang="en-US" sz="1000" dirty="0">
                 <a:solidFill>
                   <a:srgbClr val="E6EDF2"/>
                 </a:solidFill>
@@ -4697,14 +4878,14 @@
               </a:rPr>
               <a:t>  "id": "org.example.lemon-catcher",</a:t>
             </a:r>
-            <a:endParaRPr lang="en-US" sz="1050" dirty="0"/>
+            <a:endParaRPr lang="en-US" sz="1000" dirty="0"/>
           </a:p>
           <a:p>
             <a:pPr indent="0" marL="0">
               <a:buNone/>
             </a:pPr>
             <a:r>
-              <a:rPr lang="en-US" sz="1050" dirty="0">
+              <a:rPr lang="en-US" sz="1000" dirty="0">
                 <a:solidFill>
                   <a:srgbClr val="E6EDF2"/>
                 </a:solidFill>
@@ -4714,14 +4895,14 @@
               </a:rPr>
               <a:t>  "title": "Lemon Catcher",</a:t>
             </a:r>
-            <a:endParaRPr lang="en-US" sz="1050" dirty="0"/>
+            <a:endParaRPr lang="en-US" sz="1000" dirty="0"/>
           </a:p>
           <a:p>
             <a:pPr indent="0" marL="0">
               <a:buNone/>
             </a:pPr>
             <a:r>
-              <a:rPr lang="en-US" sz="1050" dirty="0">
+              <a:rPr lang="en-US" sz="1000" dirty="0">
                 <a:solidFill>
                   <a:srgbClr val="E6EDF2"/>
                 </a:solidFill>
@@ -4731,14 +4912,14 @@
               </a:rPr>
               <a:t>  "version": "1.0.0",</a:t>
             </a:r>
-            <a:endParaRPr lang="en-US" sz="1050" dirty="0"/>
+            <a:endParaRPr lang="en-US" sz="1000" dirty="0"/>
           </a:p>
           <a:p>
             <a:pPr indent="0" marL="0">
               <a:buNone/>
             </a:pPr>
             <a:r>
-              <a:rPr lang="en-US" sz="1050" dirty="0">
+              <a:rPr lang="en-US" sz="1000" dirty="0">
                 <a:solidFill>
                   <a:srgbClr val="E6EDF2"/>
                 </a:solidFill>
@@ -4748,14 +4929,14 @@
               </a:rPr>
               <a:t>  "summary": "Catch the falling lemons with your basket.",</a:t>
             </a:r>
-            <a:endParaRPr lang="en-US" sz="1050" dirty="0"/>
+            <a:endParaRPr lang="en-US" sz="1000" dirty="0"/>
           </a:p>
           <a:p>
             <a:pPr indent="0" marL="0">
               <a:buNone/>
             </a:pPr>
             <a:r>
-              <a:rPr lang="en-US" sz="1050" dirty="0">
+              <a:rPr lang="en-US" sz="1000" dirty="0">
                 <a:solidFill>
                   <a:srgbClr val="E6EDF2"/>
                 </a:solidFill>
@@ -4765,14 +4946,14 @@
               </a:rPr>
               <a:t>  "description": "A first cartridge from the Playing with RISC-V textbook. Move the</a:t>
             </a:r>
-            <a:endParaRPr lang="en-US" sz="1050" dirty="0"/>
+            <a:endParaRPr lang="en-US" sz="1000" dirty="0"/>
           </a:p>
           <a:p>
             <a:pPr indent="0" marL="0">
               <a:buNone/>
             </a:pPr>
             <a:r>
-              <a:rPr lang="en-US" sz="1050" dirty="0">
+              <a:rPr lang="en-US" sz="1000" dirty="0">
                 <a:solidFill>
                   <a:srgbClr val="E6EDF2"/>
                 </a:solidFill>
@@ -4782,14 +4963,14 @@
               </a:rPr>
               <a:t>      basket with LEFT and RIGHT; five misses end the round.",</a:t>
             </a:r>
-            <a:endParaRPr lang="en-US" sz="1050" dirty="0"/>
+            <a:endParaRPr lang="en-US" sz="1000" dirty="0"/>
           </a:p>
           <a:p>
             <a:pPr indent="0" marL="0">
               <a:buNone/>
             </a:pPr>
             <a:r>
-              <a:rPr lang="en-US" sz="1050" dirty="0">
+              <a:rPr lang="en-US" sz="1000" dirty="0">
                 <a:solidFill>
                   <a:srgbClr val="E6EDF2"/>
                 </a:solidFill>
@@ -4799,14 +4980,14 @@
               </a:rPr>
               <a:t>  "authors": [{"name": "Your Name"}],</a:t>
             </a:r>
-            <a:endParaRPr lang="en-US" sz="1050" dirty="0"/>
+            <a:endParaRPr lang="en-US" sz="1000" dirty="0"/>
           </a:p>
           <a:p>
             <a:pPr indent="0" marL="0">
               <a:buNone/>
             </a:pPr>
             <a:r>
-              <a:rPr lang="en-US" sz="1050" dirty="0">
+              <a:rPr lang="en-US" sz="1000" dirty="0">
                 <a:solidFill>
                   <a:srgbClr val="E6EDF2"/>
                 </a:solidFill>
@@ -4816,14 +4997,14 @@
               </a:rPr>
               <a:t>  "license": "MIT",</a:t>
             </a:r>
-            <a:endParaRPr lang="en-US" sz="1050" dirty="0"/>
+            <a:endParaRPr lang="en-US" sz="1000" dirty="0"/>
           </a:p>
           <a:p>
             <a:pPr indent="0" marL="0">
               <a:buNone/>
             </a:pPr>
             <a:r>
-              <a:rPr lang="en-US" sz="1050" dirty="0">
+              <a:rPr lang="en-US" sz="1000" dirty="0">
                 <a:solidFill>
                   <a:srgbClr val="E6EDF2"/>
                 </a:solidFill>
@@ -4833,14 +5014,14 @@
               </a:rPr>
               <a:t>  "tags": ["arcade", "education", "textbook"],</a:t>
             </a:r>
-            <a:endParaRPr lang="en-US" sz="1050" dirty="0"/>
+            <a:endParaRPr lang="en-US" sz="1000" dirty="0"/>
           </a:p>
           <a:p>
             <a:pPr indent="0" marL="0">
               <a:buNone/>
             </a:pPr>
             <a:r>
-              <a:rPr lang="en-US" sz="1050" dirty="0">
+              <a:rPr lang="en-US" sz="1000" dirty="0">
                 <a:solidFill>
                   <a:srgbClr val="E6EDF2"/>
                 </a:solidFill>
@@ -4850,14 +5031,14 @@
               </a:rPr>
               <a:t>  "assets": {"icon": "icon.png"},</a:t>
             </a:r>
-            <a:endParaRPr lang="en-US" sz="1050" dirty="0"/>
+            <a:endParaRPr lang="en-US" sz="1000" dirty="0"/>
           </a:p>
           <a:p>
             <a:pPr indent="0" marL="0">
               <a:buNone/>
             </a:pPr>
             <a:r>
-              <a:rPr lang="en-US" sz="1050" dirty="0">
+              <a:rPr lang="en-US" sz="1000" dirty="0">
                 <a:solidFill>
                   <a:srgbClr val="E6EDF2"/>
                 </a:solidFill>
@@ -4867,14 +5048,14 @@
               </a:rPr>
               <a:t>  "architectures": [</a:t>
             </a:r>
-            <a:endParaRPr lang="en-US" sz="1050" dirty="0"/>
+            <a:endParaRPr lang="en-US" sz="1000" dirty="0"/>
           </a:p>
           <a:p>
             <a:pPr indent="0" marL="0">
               <a:buNone/>
             </a:pPr>
             <a:r>
-              <a:rPr lang="en-US" sz="1050" dirty="0">
+              <a:rPr lang="en-US" sz="1000" dirty="0">
                 <a:solidFill>
                   <a:srgbClr val="E6EDF2"/>
                 </a:solidFill>
@@ -4884,14 +5065,14 @@
               </a:rPr>
               <a:t>    {"id": "esp32c6", "file": "lemon-catcher-esp32c6.prg32"},</a:t>
             </a:r>
-            <a:endParaRPr lang="en-US" sz="1050" dirty="0"/>
+            <a:endParaRPr lang="en-US" sz="1000" dirty="0"/>
           </a:p>
           <a:p>
             <a:pPr indent="0" marL="0">
               <a:buNone/>
             </a:pPr>
             <a:r>
-              <a:rPr lang="en-US" sz="1050" dirty="0">
+              <a:rPr lang="en-US" sz="1000" dirty="0">
                 <a:solidFill>
                   <a:srgbClr val="E6EDF2"/>
                 </a:solidFill>
@@ -4901,14 +5082,14 @@
               </a:rPr>
               <a:t>    {"id": "qemu", "file": "lemon-catcher-qemu.prg32"}</a:t>
             </a:r>
-            <a:endParaRPr lang="en-US" sz="1050" dirty="0"/>
+            <a:endParaRPr lang="en-US" sz="1000" dirty="0"/>
           </a:p>
           <a:p>
             <a:pPr indent="0" marL="0">
               <a:buNone/>
             </a:pPr>
             <a:r>
-              <a:rPr lang="en-US" sz="1050" dirty="0">
+              <a:rPr lang="en-US" sz="1000" dirty="0">
                 <a:solidFill>
                   <a:srgbClr val="E6EDF2"/>
                 </a:solidFill>
@@ -4918,14 +5099,14 @@
               </a:rPr>
               <a:t>  ]</a:t>
             </a:r>
-            <a:endParaRPr lang="en-US" sz="1050" dirty="0"/>
+            <a:endParaRPr lang="en-US" sz="1000" dirty="0"/>
           </a:p>
           <a:p>
             <a:pPr indent="0" marL="0">
               <a:buNone/>
             </a:pPr>
             <a:r>
-              <a:rPr lang="en-US" sz="1050" dirty="0">
+              <a:rPr lang="en-US" sz="1000" dirty="0">
                 <a:solidFill>
                   <a:srgbClr val="E6EDF2"/>
                 </a:solidFill>
@@ -4935,7 +5116,7 @@
               </a:rPr>
               <a:t>}</a:t>
             </a:r>
-            <a:endParaRPr lang="en-US" sz="1050" dirty="0"/>
+            <a:endParaRPr lang="en-US" sz="1000" dirty="0"/>
           </a:p>
         </p:txBody>
       </p:sp>
@@ -8223,7 +8404,7 @@
               <a:buNone/>
             </a:pPr>
             <a:r>
-              <a:rPr lang="en-US" sz="1500" dirty="0">
+              <a:rPr lang="en-US" sz="1450" dirty="0">
                 <a:solidFill>
                   <a:srgbClr val="8FB3A0"/>
                 </a:solidFill>
@@ -8233,14 +8414,14 @@
               </a:rPr>
               <a:t>#!/usr/bin/env bash</a:t>
             </a:r>
-            <a:endParaRPr lang="en-US" sz="1500" dirty="0"/>
+            <a:endParaRPr lang="en-US" sz="1450" dirty="0"/>
           </a:p>
           <a:p>
             <a:pPr indent="0" marL="0">
               <a:buNone/>
             </a:pPr>
             <a:r>
-              <a:rPr lang="en-US" sz="1500" dirty="0">
+              <a:rPr lang="en-US" sz="1450" dirty="0">
                 <a:solidFill>
                   <a:srgbClr val="8FB3A0"/>
                 </a:solidFill>
@@ -8250,14 +8431,14 @@
               </a:rPr>
               <a:t># No account is needed to discover, list, or download.</a:t>
             </a:r>
-            <a:endParaRPr lang="en-US" sz="1500" dirty="0"/>
+            <a:endParaRPr lang="en-US" sz="1450" dirty="0"/>
           </a:p>
           <a:p>
             <a:pPr indent="0" marL="0">
               <a:buNone/>
             </a:pPr>
             <a:r>
-              <a:rPr lang="en-US" sz="1500" dirty="0">
+              <a:rPr lang="en-US" sz="1450" dirty="0">
                 <a:solidFill>
                   <a:srgbClr val="E6EDF2"/>
                 </a:solidFill>
@@ -8267,14 +8448,14 @@
               </a:rPr>
               <a:t>python3 -m prg32 store discover</a:t>
             </a:r>
-            <a:endParaRPr lang="en-US" sz="1500" dirty="0"/>
+            <a:endParaRPr lang="en-US" sz="1450" dirty="0"/>
           </a:p>
           <a:p>
             <a:pPr indent="0" marL="0">
               <a:buNone/>
             </a:pPr>
             <a:r>
-              <a:rPr lang="en-US" sz="1500" dirty="0">
+              <a:rPr lang="en-US" sz="1450" dirty="0">
                 <a:solidFill>
                   <a:srgbClr val="E6EDF2"/>
                 </a:solidFill>
@@ -8284,14 +8465,14 @@
               </a:rPr>
               <a:t>python3 -m prg32 store list --store-url "$PRG32_STORE_URL"</a:t>
             </a:r>
-            <a:endParaRPr lang="en-US" sz="1500" dirty="0"/>
+            <a:endParaRPr lang="en-US" sz="1450" dirty="0"/>
           </a:p>
           <a:p>
             <a:pPr indent="0" marL="0">
               <a:buNone/>
             </a:pPr>
             <a:r>
-              <a:rPr lang="en-US" sz="1500" dirty="0">
+              <a:rPr lang="en-US" sz="1450" dirty="0">
                 <a:solidFill>
                   <a:srgbClr val="E6EDF2"/>
                 </a:solidFill>
@@ -8301,14 +8482,14 @@
               </a:rPr>
               <a:t>curl "$PRG32_STORE_URL/api/games?q=lemon&amp;per_page=10"</a:t>
             </a:r>
-            <a:endParaRPr lang="en-US" sz="1500" dirty="0"/>
+            <a:endParaRPr lang="en-US" sz="1450" dirty="0"/>
           </a:p>
           <a:p>
             <a:pPr indent="0" marL="0">
               <a:buNone/>
             </a:pPr>
             <a:r>
-              <a:rPr lang="en-US" sz="1500" dirty="0">
+              <a:rPr lang="en-US" sz="1450" dirty="0">
                 <a:solidFill>
                   <a:srgbClr val="E6EDF2"/>
                 </a:solidFill>
@@ -8318,14 +8499,14 @@
               </a:rPr>
               <a:t>GAME="$PRG32_STORE_URL/api/games/org.example.lemon-catcher"</a:t>
             </a:r>
-            <a:endParaRPr lang="en-US" sz="1500" dirty="0"/>
+            <a:endParaRPr lang="en-US" sz="1450" dirty="0"/>
           </a:p>
           <a:p>
             <a:pPr indent="0" marL="0">
               <a:buNone/>
             </a:pPr>
             <a:r>
-              <a:rPr lang="en-US" sz="1500" dirty="0">
+              <a:rPr lang="en-US" sz="1450" dirty="0">
                 <a:solidFill>
                   <a:srgbClr val="E6EDF2"/>
                 </a:solidFill>
@@ -8335,14 +8516,14 @@
               </a:rPr>
               <a:t>curl -o lemon-catcher.prg32 \</a:t>
             </a:r>
-            <a:endParaRPr lang="en-US" sz="1500" dirty="0"/>
+            <a:endParaRPr lang="en-US" sz="1450" dirty="0"/>
           </a:p>
           <a:p>
             <a:pPr indent="0" marL="0">
               <a:buNone/>
             </a:pPr>
             <a:r>
-              <a:rPr lang="en-US" sz="1500" dirty="0">
+              <a:rPr lang="en-US" sz="1450" dirty="0">
                 <a:solidFill>
                   <a:srgbClr val="E6EDF2"/>
                 </a:solidFill>
@@ -8352,7 +8533,7 @@
               </a:rPr>
               <a:t>  "$GAME/download?version=1.0.0&amp;architecture=qemu"</a:t>
             </a:r>
-            <a:endParaRPr lang="en-US" sz="1500" dirty="0"/>
+            <a:endParaRPr lang="en-US" sz="1450" dirty="0"/>
           </a:p>
         </p:txBody>
       </p:sp>
@@ -11226,7 +11407,7 @@
               <a:buNone/>
             </a:pPr>
             <a:r>
-              <a:rPr lang="en-US" sz="1100" dirty="0">
+              <a:rPr lang="en-US" sz="1050" dirty="0">
                 <a:solidFill>
                   <a:srgbClr val="8FB3A0"/>
                 </a:solidFill>
@@ -11236,14 +11417,14 @@
               </a:rPr>
               <a:t>#!/usr/bin/env bash</a:t>
             </a:r>
-            <a:endParaRPr lang="en-US" sz="1100" dirty="0"/>
+            <a:endParaRPr lang="en-US" sz="1050" dirty="0"/>
           </a:p>
           <a:p>
             <a:pPr indent="0" marL="0">
               <a:buNone/>
             </a:pPr>
             <a:r>
-              <a:rPr lang="en-US" sz="1100" dirty="0">
+              <a:rPr lang="en-US" sz="1050" dirty="0">
                 <a:solidFill>
                   <a:srgbClr val="8FB3A0"/>
                 </a:solidFill>
@@ -11253,14 +11434,14 @@
               </a:rPr>
               <a:t># Run from the PRG32 repository root after sourcing ESP-IDF.</a:t>
             </a:r>
-            <a:endParaRPr lang="en-US" sz="1100" dirty="0"/>
+            <a:endParaRPr lang="en-US" sz="1050" dirty="0"/>
           </a:p>
           <a:p>
             <a:pPr indent="0" marL="0">
               <a:buNone/>
             </a:pPr>
             <a:r>
-              <a:rPr lang="en-US" sz="1100" dirty="0">
+              <a:rPr lang="en-US" sz="1050" dirty="0">
                 <a:solidFill>
                   <a:srgbClr val="8FB3A0"/>
                 </a:solidFill>
@@ -11270,14 +11451,14 @@
               </a:rPr>
               <a:t># Builds one portable cartridge per Store architecture.</a:t>
             </a:r>
-            <a:endParaRPr lang="en-US" sz="1100" dirty="0"/>
+            <a:endParaRPr lang="en-US" sz="1050" dirty="0"/>
           </a:p>
           <a:p>
             <a:pPr indent="0" marL="0">
               <a:buNone/>
             </a:pPr>
             <a:r>
-              <a:rPr lang="en-US" sz="1100" dirty="0">
+              <a:rPr lang="en-US" sz="1050" dirty="0">
                 <a:solidFill>
                   <a:srgbClr val="E6EDF2"/>
                 </a:solidFill>
@@ -11287,14 +11468,14 @@
               </a:rPr>
               <a:t>mkdir -p build/store-lemon</a:t>
             </a:r>
-            <a:endParaRPr lang="en-US" sz="1100" dirty="0"/>
+            <a:endParaRPr lang="en-US" sz="1050" dirty="0"/>
           </a:p>
           <a:p>
             <a:pPr indent="0" marL="0">
               <a:buNone/>
             </a:pPr>
             <a:r>
-              <a:rPr lang="en-US" sz="1100" dirty="0">
+              <a:rPr lang="en-US" sz="1050" dirty="0">
                 <a:solidFill>
                   <a:srgbClr val="E6EDF2"/>
                 </a:solidFill>
@@ -11304,14 +11485,14 @@
               </a:rPr>
               <a:t>for ARCH in esp32c6 qemu; do</a:t>
             </a:r>
-            <a:endParaRPr lang="en-US" sz="1100" dirty="0"/>
+            <a:endParaRPr lang="en-US" sz="1050" dirty="0"/>
           </a:p>
           <a:p>
             <a:pPr indent="0" marL="0">
               <a:buNone/>
             </a:pPr>
             <a:r>
-              <a:rPr lang="en-US" sz="1100" dirty="0">
+              <a:rPr lang="en-US" sz="1050" dirty="0">
                 <a:solidFill>
                   <a:srgbClr val="E6EDF2"/>
                 </a:solidFill>
@@ -11321,14 +11502,14 @@
               </a:rPr>
               <a:t>  python3 -m prg32 cartridge build work/lemon_catcher_c_game.c \</a:t>
             </a:r>
-            <a:endParaRPr lang="en-US" sz="1100" dirty="0"/>
+            <a:endParaRPr lang="en-US" sz="1050" dirty="0"/>
           </a:p>
           <a:p>
             <a:pPr indent="0" marL="0">
               <a:buNone/>
             </a:pPr>
             <a:r>
-              <a:rPr lang="en-US" sz="1100" dirty="0">
+              <a:rPr lang="en-US" sz="1050" dirty="0">
                 <a:solidFill>
                   <a:srgbClr val="E6EDF2"/>
                 </a:solidFill>
@@ -11338,14 +11519,14 @@
               </a:rPr>
               <a:t>    --portable --architecture "$ARCH" \</a:t>
             </a:r>
-            <a:endParaRPr lang="en-US" sz="1100" dirty="0"/>
+            <a:endParaRPr lang="en-US" sz="1050" dirty="0"/>
           </a:p>
           <a:p>
             <a:pPr indent="0" marL="0">
               <a:buNone/>
             </a:pPr>
             <a:r>
-              <a:rPr lang="en-US" sz="1100" dirty="0">
+              <a:rPr lang="en-US" sz="1050" dirty="0">
                 <a:solidFill>
                   <a:srgbClr val="E6EDF2"/>
                 </a:solidFill>
@@ -11355,14 +11536,14 @@
               </a:rPr>
               <a:t>    --entry-prefix lemon_catcher_c --name lemon-catcher \</a:t>
             </a:r>
-            <a:endParaRPr lang="en-US" sz="1100" dirty="0"/>
+            <a:endParaRPr lang="en-US" sz="1050" dirty="0"/>
           </a:p>
           <a:p>
             <a:pPr indent="0" marL="0">
               <a:buNone/>
             </a:pPr>
             <a:r>
-              <a:rPr lang="en-US" sz="1100" dirty="0">
+              <a:rPr lang="en-US" sz="1050" dirty="0">
                 <a:solidFill>
                   <a:srgbClr val="E6EDF2"/>
                 </a:solidFill>
@@ -11372,14 +11553,14 @@
               </a:rPr>
               <a:t>    --out "build/store-lemon/lemon-catcher-$ARCH.prg32"</a:t>
             </a:r>
-            <a:endParaRPr lang="en-US" sz="1100" dirty="0"/>
+            <a:endParaRPr lang="en-US" sz="1050" dirty="0"/>
           </a:p>
           <a:p>
             <a:pPr indent="0" marL="0">
               <a:buNone/>
             </a:pPr>
             <a:r>
-              <a:rPr lang="en-US" sz="1100" dirty="0">
+              <a:rPr lang="en-US" sz="1050" dirty="0">
                 <a:solidFill>
                   <a:srgbClr val="E6EDF2"/>
                 </a:solidFill>
@@ -11389,14 +11570,14 @@
               </a:rPr>
               <a:t>done</a:t>
             </a:r>
-            <a:endParaRPr lang="en-US" sz="1100" dirty="0"/>
+            <a:endParaRPr lang="en-US" sz="1050" dirty="0"/>
           </a:p>
           <a:p>
             <a:pPr indent="0" marL="0">
               <a:buNone/>
             </a:pPr>
             <a:r>
-              <a:rPr lang="en-US" sz="1100" dirty="0">
+              <a:rPr lang="en-US" sz="1050" dirty="0">
                 <a:solidFill>
                   <a:srgbClr val="E6EDF2"/>
                 </a:solidFill>
@@ -11406,7 +11587,7 @@
               </a:rPr>
               <a:t>python3 -m prg32 cartridge summary build/store-lemon/lemon-catcher-esp32c6.prg32</a:t>
             </a:r>
-            <a:endParaRPr lang="en-US" sz="1100" dirty="0"/>
+            <a:endParaRPr lang="en-US" sz="1050" dirty="0"/>
           </a:p>
         </p:txBody>
       </p:sp>
@@ -11915,7 +12096,7 @@
               <a:buNone/>
             </a:pPr>
             <a:r>
-              <a:rPr lang="en-US" sz="1250" dirty="0">
+              <a:rPr lang="en-US" sz="1200" dirty="0">
                 <a:solidFill>
                   <a:srgbClr val="8FB3A0"/>
                 </a:solidFill>
@@ -11925,14 +12106,14 @@
               </a:rPr>
               <a:t>#!/usr/bin/env bash</a:t>
             </a:r>
-            <a:endParaRPr lang="en-US" sz="1250" dirty="0"/>
+            <a:endParaRPr lang="en-US" sz="1200" dirty="0"/>
           </a:p>
           <a:p>
             <a:pPr indent="0" marL="0">
               <a:buNone/>
             </a:pPr>
             <a:r>
-              <a:rPr lang="en-US" sz="1250" dirty="0">
+              <a:rPr lang="en-US" sz="1200" dirty="0">
                 <a:solidFill>
                   <a:srgbClr val="8FB3A0"/>
                 </a:solidFill>
@@ -11942,14 +12123,14 @@
               </a:rPr>
               <a:t># manifest.json and icon.png sit beside the two .prg32 files.</a:t>
             </a:r>
-            <a:endParaRPr lang="en-US" sz="1250" dirty="0"/>
+            <a:endParaRPr lang="en-US" sz="1200" dirty="0"/>
           </a:p>
           <a:p>
             <a:pPr indent="0" marL="0">
               <a:buNone/>
             </a:pPr>
             <a:r>
-              <a:rPr lang="en-US" sz="1250" dirty="0">
+              <a:rPr lang="en-US" sz="1200" dirty="0">
                 <a:solidFill>
                   <a:srgbClr val="E6EDF2"/>
                 </a:solidFill>
@@ -11959,14 +12140,14 @@
               </a:rPr>
               <a:t>python3 -m prg32 store pack-bundle \</a:t>
             </a:r>
-            <a:endParaRPr lang="en-US" sz="1250" dirty="0"/>
+            <a:endParaRPr lang="en-US" sz="1200" dirty="0"/>
           </a:p>
           <a:p>
             <a:pPr indent="0" marL="0">
               <a:buNone/>
             </a:pPr>
             <a:r>
-              <a:rPr lang="en-US" sz="1250" dirty="0">
+              <a:rPr lang="en-US" sz="1200" dirty="0">
                 <a:solidFill>
                   <a:srgbClr val="E6EDF2"/>
                 </a:solidFill>
@@ -11976,14 +12157,14 @@
               </a:rPr>
               <a:t>  --manifest build/store-lemon/manifest.json \</a:t>
             </a:r>
-            <a:endParaRPr lang="en-US" sz="1250" dirty="0"/>
+            <a:endParaRPr lang="en-US" sz="1200" dirty="0"/>
           </a:p>
           <a:p>
             <a:pPr indent="0" marL="0">
               <a:buNone/>
             </a:pPr>
             <a:r>
-              <a:rPr lang="en-US" sz="1250" dirty="0">
+              <a:rPr lang="en-US" sz="1200" dirty="0">
                 <a:solidFill>
                   <a:srgbClr val="E6EDF2"/>
                 </a:solidFill>
@@ -11993,14 +12174,14 @@
               </a:rPr>
               <a:t>  --out build/lemon-catcher-1.0.0.zip</a:t>
             </a:r>
-            <a:endParaRPr lang="en-US" sz="1250" dirty="0"/>
+            <a:endParaRPr lang="en-US" sz="1200" dirty="0"/>
           </a:p>
           <a:p>
             <a:pPr indent="0" marL="0">
               <a:buNone/>
             </a:pPr>
             <a:r>
-              <a:rPr lang="en-US" sz="1250" dirty="0">
+              <a:rPr lang="en-US" sz="1200" dirty="0">
                 <a:solidFill>
                   <a:srgbClr val="8FB3A0"/>
                 </a:solidFill>
@@ -12010,14 +12191,14 @@
               </a:rPr>
               <a:t># The token comes from the Store's Tokens page; keep it out of Git.</a:t>
             </a:r>
-            <a:endParaRPr lang="en-US" sz="1250" dirty="0"/>
+            <a:endParaRPr lang="en-US" sz="1200" dirty="0"/>
           </a:p>
           <a:p>
             <a:pPr indent="0" marL="0">
               <a:buNone/>
             </a:pPr>
             <a:r>
-              <a:rPr lang="en-US" sz="1250" dirty="0">
+              <a:rPr lang="en-US" sz="1200" dirty="0">
                 <a:solidFill>
                   <a:srgbClr val="E6EDF2"/>
                 </a:solidFill>
@@ -12027,14 +12208,14 @@
               </a:rPr>
               <a:t>python3 -m prg32 store publish-bundle build/lemon-catcher-1.0.0.zip \</a:t>
             </a:r>
-            <a:endParaRPr lang="en-US" sz="1250" dirty="0"/>
+            <a:endParaRPr lang="en-US" sz="1200" dirty="0"/>
           </a:p>
           <a:p>
             <a:pPr indent="0" marL="0">
               <a:buNone/>
             </a:pPr>
             <a:r>
-              <a:rPr lang="en-US" sz="1250" dirty="0">
+              <a:rPr lang="en-US" sz="1200" dirty="0">
                 <a:solidFill>
                   <a:srgbClr val="E6EDF2"/>
                 </a:solidFill>
@@ -12044,7 +12225,7 @@
               </a:rPr>
               <a:t>  --store-url "$PRG32_STORE_URL" --token "$PRG32_STORE_TOKEN"</a:t>
             </a:r>
-            <a:endParaRPr lang="en-US" sz="1250" dirty="0"/>
+            <a:endParaRPr lang="en-US" sz="1200" dirty="0"/>
           </a:p>
         </p:txBody>
       </p:sp>
@@ -12495,7 +12676,7 @@
                 <a:ea typeface="Cambria" pitchFamily="34" charset="-122"/>
                 <a:cs typeface="Cambria" pitchFamily="34" charset="-120"/>
               </a:rPr>
-              <a:t>A token is your account</a:t>
+              <a:t>What the tools answer</a:t>
             </a:r>
             <a:endParaRPr lang="en-US" sz="3000" dirty="0"/>
           </a:p>
@@ -12503,26 +12684,289 @@
       </p:sp>
       <p:sp>
         <p:nvSpPr>
-          <p:cNvPr id="3" name="Text 1"/>
-          <p:cNvSpPr txBox="1"/>
-          <p:nvPr/>
-        </p:nvSpPr>
-        <p:spPr>
-          <a:xfrm>
-            <a:off x="548640" y="1481328"/>
-            <a:ext cx="457200" cy="457200"/>
+          <p:cNvPr id="3" name="Shape 1"/>
+          <p:cNvSpPr/>
+          <p:nvPr/>
+        </p:nvSpPr>
+        <p:spPr>
+          <a:xfrm>
+            <a:off x="548640" y="1463040"/>
+            <a:ext cx="7406640" cy="4754880"/>
           </a:xfrm>
           <a:prstGeom prst="roundRect">
             <a:avLst>
-              <a:gd name="adj" fmla="val 16000"/>
+              <a:gd name="adj" fmla="val 1538"/>
             </a:avLst>
           </a:prstGeom>
           <a:solidFill>
-            <a:srgbClr val="0E7C86"/>
+            <a:srgbClr val="12202B"/>
+          </a:solidFill>
+          <a:ln w="12700">
+            <a:solidFill>
+              <a:srgbClr val="12202B"/>
+            </a:solidFill>
+            <a:prstDash val="solid"/>
+          </a:ln>
+        </p:spPr>
+      </p:sp>
+      <p:sp>
+        <p:nvSpPr>
+          <p:cNvPr id="4" name="Text 2"/>
+          <p:cNvSpPr txBox="1"/>
+          <p:nvPr/>
+        </p:nvSpPr>
+        <p:spPr>
+          <a:xfrm>
+            <a:off x="777240" y="1645920"/>
+            <a:ext cx="6949440" cy="4389120"/>
+          </a:xfrm>
+          <a:prstGeom prst="rect">
+            <a:avLst/>
+          </a:prstGeom>
+          <a:noFill/>
+          <a:ln/>
+        </p:spPr>
+        <p:txBody>
+          <a:bodyPr wrap="square" lIns="0" tIns="0" rIns="0" bIns="0" rtlCol="0" anchor="t"/>
+          <a:lstStyle/>
+          <a:p>
+            <a:pPr indent="0" marL="0">
+              <a:buNone/>
+            </a:pPr>
+            <a:r>
+              <a:rPr lang="en-US" sz="1150" dirty="0">
+                <a:solidFill>
+                  <a:srgbClr val="E6EDF2"/>
+                </a:solidFill>
+                <a:latin typeface="Courier New" pitchFamily="34" charset="0"/>
+                <a:ea typeface="Courier New" pitchFamily="34" charset="-122"/>
+                <a:cs typeface="Courier New" pitchFamily="34" charset="-120"/>
+              </a:rPr>
+              <a:t>$ python3 -m prg32 store publish-bundle build/lemon-catcher-1.0.0.zip ...</a:t>
+            </a:r>
+            <a:endParaRPr lang="en-US" sz="1150" dirty="0"/>
+          </a:p>
+          <a:p>
+            <a:pPr indent="0" marL="0">
+              <a:buNone/>
+            </a:pPr>
+            <a:r>
+              <a:rPr lang="en-US" sz="1150" dirty="0">
+                <a:solidFill>
+                  <a:srgbClr val="E6EDF2"/>
+                </a:solidFill>
+                <a:latin typeface="Courier New" pitchFamily="34" charset="0"/>
+                <a:ea typeface="Courier New" pitchFamily="34" charset="-122"/>
+                <a:cs typeface="Courier New" pitchFamily="34" charset="-120"/>
+              </a:rPr>
+              <a:t>[ { "architecture": "esp32c6", "file": "lemon-catcher-esp32c6.prg32" },</a:t>
+            </a:r>
+            <a:endParaRPr lang="en-US" sz="1150" dirty="0"/>
+          </a:p>
+          <a:p>
+            <a:pPr indent="0" marL="0">
+              <a:buNone/>
+            </a:pPr>
+            <a:r>
+              <a:rPr lang="en-US" sz="1150" dirty="0">
+                <a:solidFill>
+                  <a:srgbClr val="E6EDF2"/>
+                </a:solidFill>
+                <a:latin typeface="Courier New" pitchFamily="34" charset="0"/>
+                <a:ea typeface="Courier New" pitchFamily="34" charset="-122"/>
+                <a:cs typeface="Courier New" pitchFamily="34" charset="-120"/>
+              </a:rPr>
+              <a:t>  { "architecture": "qemu",    "file": "lemon-catcher-qemu.prg32" } ]</a:t>
+            </a:r>
+            <a:endParaRPr lang="en-US" sz="1150" dirty="0"/>
+          </a:p>
+          <a:p>
+            <a:pPr indent="0" marL="0">
+              <a:buNone/>
+            </a:pPr>
+            <a:r>
+              <a:rPr lang="en-US" sz="1150" dirty="0">
+                <a:solidFill>
+                  <a:srgbClr val="E6EDF2"/>
+                </a:solidFill>
+                <a:latin typeface="Courier New" pitchFamily="34" charset="0"/>
+                <a:ea typeface="Courier New" pitchFamily="34" charset="-122"/>
+                <a:cs typeface="Courier New" pitchFamily="34" charset="-120"/>
+              </a:rPr>
+              <a:t>Submitted for review</a:t>
+            </a:r>
+            <a:endParaRPr lang="en-US" sz="1150" dirty="0"/>
+          </a:p>
+          <a:p>
+            <a:pPr indent="0" marL="0">
+              <a:buNone/>
+            </a:pPr>
+            <a:r>
+              <a:rPr lang="en-US" sz="1150" dirty="0">
+                <a:solidFill>
+                  <a:srgbClr val="E6EDF2"/>
+                </a:solidFill>
+                <a:latin typeface="Courier New" pitchFamily="34" charset="0"/>
+                <a:ea typeface="Courier New" pitchFamily="34" charset="-122"/>
+                <a:cs typeface="Courier New" pitchFamily="34" charset="-120"/>
+              </a:rPr>
+              <a:t> </a:t>
+            </a:r>
+            <a:endParaRPr lang="en-US" sz="1150" dirty="0"/>
+          </a:p>
+          <a:p>
+            <a:pPr indent="0" marL="0">
+              <a:buNone/>
+            </a:pPr>
+            <a:r>
+              <a:rPr lang="en-US" sz="1150" dirty="0">
+                <a:solidFill>
+                  <a:srgbClr val="E6EDF2"/>
+                </a:solidFill>
+                <a:latin typeface="Courier New" pitchFamily="34" charset="0"/>
+                <a:ea typeface="Courier New" pitchFamily="34" charset="-122"/>
+                <a:cs typeface="Courier New" pitchFamily="34" charset="-120"/>
+              </a:rPr>
+              <a:t>$ curl -X POST .../api/submissions/1/verify -d '{"metadata":{"id":"x.y"}}'</a:t>
+            </a:r>
+            <a:endParaRPr lang="en-US" sz="1150" dirty="0"/>
+          </a:p>
+          <a:p>
+            <a:pPr indent="0" marL="0">
+              <a:buNone/>
+            </a:pPr>
+            <a:r>
+              <a:rPr lang="en-US" sz="1150" dirty="0">
+                <a:solidFill>
+                  <a:srgbClr val="E6EDF2"/>
+                </a:solidFill>
+                <a:latin typeface="Courier New" pitchFamily="34" charset="0"/>
+                <a:ea typeface="Courier New" pitchFamily="34" charset="-122"/>
+                <a:cs typeface="Courier New" pitchFamily="34" charset="-120"/>
+              </a:rPr>
+              <a:t>{ "error": "metadata.id cannot be changed during review", "ok": false }</a:t>
+            </a:r>
+            <a:endParaRPr lang="en-US" sz="1150" dirty="0"/>
+          </a:p>
+          <a:p>
+            <a:pPr indent="0" marL="0">
+              <a:buNone/>
+            </a:pPr>
+            <a:r>
+              <a:rPr lang="en-US" sz="1150" dirty="0">
+                <a:solidFill>
+                  <a:srgbClr val="E6EDF2"/>
+                </a:solidFill>
+                <a:latin typeface="Courier New" pitchFamily="34" charset="0"/>
+                <a:ea typeface="Courier New" pitchFamily="34" charset="-122"/>
+                <a:cs typeface="Courier New" pitchFamily="34" charset="-120"/>
+              </a:rPr>
+              <a:t> </a:t>
+            </a:r>
+            <a:endParaRPr lang="en-US" sz="1150" dirty="0"/>
+          </a:p>
+          <a:p>
+            <a:pPr indent="0" marL="0">
+              <a:buNone/>
+            </a:pPr>
+            <a:r>
+              <a:rPr lang="en-US" sz="1150" dirty="0">
+                <a:solidFill>
+                  <a:srgbClr val="E6EDF2"/>
+                </a:solidFill>
+                <a:latin typeface="Courier New" pitchFamily="34" charset="0"/>
+                <a:ea typeface="Courier New" pitchFamily="34" charset="-122"/>
+                <a:cs typeface="Courier New" pitchFamily="34" charset="-120"/>
+              </a:rPr>
+              <a:t>$ python3 -m prg32 store list --store-url ...</a:t>
+            </a:r>
+            <a:endParaRPr lang="en-US" sz="1150" dirty="0"/>
+          </a:p>
+          <a:p>
+            <a:pPr indent="0" marL="0">
+              <a:buNone/>
+            </a:pPr>
+            <a:r>
+              <a:rPr lang="en-US" sz="1150" dirty="0">
+                <a:solidFill>
+                  <a:srgbClr val="E6EDF2"/>
+                </a:solidFill>
+                <a:latin typeface="Courier New" pitchFamily="34" charset="0"/>
+                <a:ea typeface="Courier New" pitchFamily="34" charset="-122"/>
+                <a:cs typeface="Courier New" pitchFamily="34" charset="-120"/>
+              </a:rPr>
+              <a:t>ID                          Title          Version  Architectures</a:t>
+            </a:r>
+            <a:endParaRPr lang="en-US" sz="1150" dirty="0"/>
+          </a:p>
+          <a:p>
+            <a:pPr indent="0" marL="0">
+              <a:buNone/>
+            </a:pPr>
+            <a:r>
+              <a:rPr lang="en-US" sz="1150" dirty="0">
+                <a:solidFill>
+                  <a:srgbClr val="E6EDF2"/>
+                </a:solidFill>
+                <a:latin typeface="Courier New" pitchFamily="34" charset="0"/>
+                <a:ea typeface="Courier New" pitchFamily="34" charset="-122"/>
+                <a:cs typeface="Courier New" pitchFamily="34" charset="-120"/>
+              </a:rPr>
+              <a:t>org.example.lemon-catcher   Lemon Catcher           esp32c6, qemu</a:t>
+            </a:r>
+            <a:endParaRPr lang="en-US" sz="1150" dirty="0"/>
+          </a:p>
+        </p:txBody>
+      </p:sp>
+      <p:sp>
+        <p:nvSpPr>
+          <p:cNvPr id="5" name="Shape 3"/>
+          <p:cNvSpPr/>
+          <p:nvPr/>
+        </p:nvSpPr>
+        <p:spPr>
+          <a:xfrm>
+            <a:off x="8229600" y="1463040"/>
+            <a:ext cx="3413455" cy="1450848"/>
+          </a:xfrm>
+          <a:prstGeom prst="roundRect">
+            <a:avLst>
+              <a:gd name="adj" fmla="val 5042"/>
+            </a:avLst>
+          </a:prstGeom>
+          <a:solidFill>
+            <a:srgbClr val="EEF2F4"/>
+          </a:solidFill>
+          <a:ln w="12700">
+            <a:solidFill>
+              <a:srgbClr val="EEF2F4"/>
+            </a:solidFill>
+            <a:prstDash val="solid"/>
+          </a:ln>
+        </p:spPr>
+      </p:sp>
+      <p:sp>
+        <p:nvSpPr>
+          <p:cNvPr id="6" name="Text 4"/>
+          <p:cNvSpPr txBox="1"/>
+          <p:nvPr/>
+        </p:nvSpPr>
+        <p:spPr>
+          <a:xfrm>
+            <a:off x="8394192" y="1627632"/>
+            <a:ext cx="365760" cy="365760"/>
+          </a:xfrm>
+          <a:prstGeom prst="roundRect">
+            <a:avLst>
+              <a:gd name="adj" fmla="val 20000"/>
+            </a:avLst>
+          </a:prstGeom>
+          <a:solidFill>
+            <a:srgbClr val="C7791B"/>
           </a:solidFill>
           <a:ln>
             <a:solidFill>
-              <a:srgbClr val="0E7C86"/>
+              <a:srgbClr val="C7791B"/>
             </a:solidFill>
           </a:ln>
         </p:spPr>
@@ -12534,7 +12978,7 @@
               <a:buNone/>
             </a:pPr>
             <a:r>
-              <a:rPr lang="en-US" sz="1700" b="1" dirty="0">
+              <a:rPr lang="en-US" sz="1400" b="1" dirty="0">
                 <a:solidFill>
                   <a:srgbClr val="FFFFFF"/>
                 </a:solidFill>
@@ -12544,20 +12988,20 @@
               </a:rPr>
               <a:t>1</a:t>
             </a:r>
-            <a:endParaRPr lang="en-US" sz="1700" dirty="0"/>
-          </a:p>
-        </p:txBody>
-      </p:sp>
-      <p:sp>
-        <p:nvSpPr>
-          <p:cNvPr id="4" name="Text 2"/>
+            <a:endParaRPr lang="en-US" sz="1400" dirty="0"/>
+          </a:p>
+        </p:txBody>
+      </p:sp>
+      <p:sp>
+        <p:nvSpPr>
+          <p:cNvPr id="7" name="Text 5"/>
           <p:cNvSpPr txBox="1"/>
           <p:nvPr/>
         </p:nvSpPr>
         <p:spPr>
           <a:xfrm>
-            <a:off x="1280160" y="1463040"/>
-            <a:ext cx="10362895" cy="493776"/>
+            <a:off x="8915400" y="1600200"/>
+            <a:ext cx="2544775" cy="1176528"/>
           </a:xfrm>
           <a:prstGeom prst="rect">
             <a:avLst/>
@@ -12573,7 +13017,7 @@
               <a:buNone/>
             </a:pPr>
             <a:r>
-              <a:rPr lang="en-US" sz="2400" dirty="0">
+              <a:rPr lang="en-US" sz="1700" dirty="0">
                 <a:solidFill>
                   <a:srgbClr val="1B2530"/>
                 </a:solidFill>
@@ -12581,34 +13025,61 @@
                 <a:ea typeface="Calibri" pitchFamily="34" charset="-122"/>
                 <a:cs typeface="Calibri" pitchFamily="34" charset="-120"/>
               </a:rPr>
-              <a:t>Anything a script can do, the token can do</a:t>
-            </a:r>
-            <a:endParaRPr lang="en-US" sz="2400" dirty="0"/>
-          </a:p>
-        </p:txBody>
-      </p:sp>
-      <p:sp>
-        <p:nvSpPr>
-          <p:cNvPr id="5" name="Text 3"/>
-          <p:cNvSpPr txBox="1"/>
-          <p:nvPr/>
-        </p:nvSpPr>
-        <p:spPr>
-          <a:xfrm>
-            <a:off x="548640" y="2711196"/>
-            <a:ext cx="457200" cy="457200"/>
+              <a:t>A submission is pending</a:t>
+            </a:r>
+            <a:endParaRPr lang="en-US" sz="1700" dirty="0"/>
+          </a:p>
+        </p:txBody>
+      </p:sp>
+      <p:sp>
+        <p:nvSpPr>
+          <p:cNvPr id="8" name="Shape 6"/>
+          <p:cNvSpPr/>
+          <p:nvPr/>
+        </p:nvSpPr>
+        <p:spPr>
+          <a:xfrm>
+            <a:off x="8229600" y="3115056"/>
+            <a:ext cx="3413455" cy="1450848"/>
           </a:xfrm>
           <a:prstGeom prst="roundRect">
             <a:avLst>
-              <a:gd name="adj" fmla="val 16000"/>
+              <a:gd name="adj" fmla="val 5042"/>
             </a:avLst>
           </a:prstGeom>
           <a:solidFill>
-            <a:srgbClr val="0E7C86"/>
+            <a:srgbClr val="EEF2F4"/>
+          </a:solidFill>
+          <a:ln w="12700">
+            <a:solidFill>
+              <a:srgbClr val="EEF2F4"/>
+            </a:solidFill>
+            <a:prstDash val="solid"/>
+          </a:ln>
+        </p:spPr>
+      </p:sp>
+      <p:sp>
+        <p:nvSpPr>
+          <p:cNvPr id="9" name="Text 7"/>
+          <p:cNvSpPr txBox="1"/>
+          <p:nvPr/>
+        </p:nvSpPr>
+        <p:spPr>
+          <a:xfrm>
+            <a:off x="8394192" y="3279648"/>
+            <a:ext cx="365760" cy="365760"/>
+          </a:xfrm>
+          <a:prstGeom prst="roundRect">
+            <a:avLst>
+              <a:gd name="adj" fmla="val 20000"/>
+            </a:avLst>
+          </a:prstGeom>
+          <a:solidFill>
+            <a:srgbClr val="C7791B"/>
           </a:solidFill>
           <a:ln>
             <a:solidFill>
-              <a:srgbClr val="0E7C86"/>
+              <a:srgbClr val="C7791B"/>
             </a:solidFill>
           </a:ln>
         </p:spPr>
@@ -12620,7 +13091,7 @@
               <a:buNone/>
             </a:pPr>
             <a:r>
-              <a:rPr lang="en-US" sz="1700" b="1" dirty="0">
+              <a:rPr lang="en-US" sz="1400" b="1" dirty="0">
                 <a:solidFill>
                   <a:srgbClr val="FFFFFF"/>
                 </a:solidFill>
@@ -12630,20 +13101,20 @@
               </a:rPr>
               <a:t>2</a:t>
             </a:r>
-            <a:endParaRPr lang="en-US" sz="1700" dirty="0"/>
-          </a:p>
-        </p:txBody>
-      </p:sp>
-      <p:sp>
-        <p:nvSpPr>
-          <p:cNvPr id="6" name="Text 4"/>
+            <a:endParaRPr lang="en-US" sz="1400" dirty="0"/>
+          </a:p>
+        </p:txBody>
+      </p:sp>
+      <p:sp>
+        <p:nvSpPr>
+          <p:cNvPr id="10" name="Text 8"/>
           <p:cNvSpPr txBox="1"/>
           <p:nvPr/>
         </p:nvSpPr>
         <p:spPr>
           <a:xfrm>
-            <a:off x="1280160" y="2692908"/>
-            <a:ext cx="10362895" cy="493776"/>
+            <a:off x="8915400" y="3252216"/>
+            <a:ext cx="2544775" cy="1176528"/>
           </a:xfrm>
           <a:prstGeom prst="rect">
             <a:avLst/>
@@ -12659,7 +13130,7 @@
               <a:buNone/>
             </a:pPr>
             <a:r>
-              <a:rPr lang="en-US" sz="2400" dirty="0">
+              <a:rPr lang="en-US" sz="1700" dirty="0">
                 <a:solidFill>
                   <a:srgbClr val="1B2530"/>
                 </a:solidFill>
@@ -12667,34 +13138,61 @@
                 <a:ea typeface="Calibri" pitchFamily="34" charset="-122"/>
                 <a:cs typeface="Calibri" pitchFamily="34" charset="-120"/>
               </a:rPr>
-              <a:t>Keep it in an environment variable, never in source or in Git</a:t>
-            </a:r>
-            <a:endParaRPr lang="en-US" sz="2400" dirty="0"/>
-          </a:p>
-        </p:txBody>
-      </p:sp>
-      <p:sp>
-        <p:nvSpPr>
-          <p:cNvPr id="7" name="Text 5"/>
-          <p:cNvSpPr txBox="1"/>
-          <p:nvPr/>
-        </p:nvSpPr>
-        <p:spPr>
-          <a:xfrm>
-            <a:off x="548640" y="3941064"/>
-            <a:ext cx="457200" cy="457200"/>
+              <a:t>An editor cannot change identity</a:t>
+            </a:r>
+            <a:endParaRPr lang="en-US" sz="1700" dirty="0"/>
+          </a:p>
+        </p:txBody>
+      </p:sp>
+      <p:sp>
+        <p:nvSpPr>
+          <p:cNvPr id="11" name="Shape 9"/>
+          <p:cNvSpPr/>
+          <p:nvPr/>
+        </p:nvSpPr>
+        <p:spPr>
+          <a:xfrm>
+            <a:off x="8229600" y="4767072"/>
+            <a:ext cx="3413455" cy="1450848"/>
           </a:xfrm>
           <a:prstGeom prst="roundRect">
             <a:avLst>
-              <a:gd name="adj" fmla="val 16000"/>
+              <a:gd name="adj" fmla="val 5042"/>
             </a:avLst>
           </a:prstGeom>
           <a:solidFill>
-            <a:srgbClr val="0E7C86"/>
+            <a:srgbClr val="EEF2F4"/>
+          </a:solidFill>
+          <a:ln w="12700">
+            <a:solidFill>
+              <a:srgbClr val="EEF2F4"/>
+            </a:solidFill>
+            <a:prstDash val="solid"/>
+          </a:ln>
+        </p:spPr>
+      </p:sp>
+      <p:sp>
+        <p:nvSpPr>
+          <p:cNvPr id="12" name="Text 10"/>
+          <p:cNvSpPr txBox="1"/>
+          <p:nvPr/>
+        </p:nvSpPr>
+        <p:spPr>
+          <a:xfrm>
+            <a:off x="8394192" y="4931664"/>
+            <a:ext cx="365760" cy="365760"/>
+          </a:xfrm>
+          <a:prstGeom prst="roundRect">
+            <a:avLst>
+              <a:gd name="adj" fmla="val 20000"/>
+            </a:avLst>
+          </a:prstGeom>
+          <a:solidFill>
+            <a:srgbClr val="C7791B"/>
           </a:solidFill>
           <a:ln>
             <a:solidFill>
-              <a:srgbClr val="0E7C86"/>
+              <a:srgbClr val="C7791B"/>
             </a:solidFill>
           </a:ln>
         </p:spPr>
@@ -12706,7 +13204,7 @@
               <a:buNone/>
             </a:pPr>
             <a:r>
-              <a:rPr lang="en-US" sz="1700" b="1" dirty="0">
+              <a:rPr lang="en-US" sz="1400" b="1" dirty="0">
                 <a:solidFill>
                   <a:srgbClr val="FFFFFF"/>
                 </a:solidFill>
@@ -12716,20 +13214,20 @@
               </a:rPr>
               <a:t>3</a:t>
             </a:r>
-            <a:endParaRPr lang="en-US" sz="1700" dirty="0"/>
-          </a:p>
-        </p:txBody>
-      </p:sp>
-      <p:sp>
-        <p:nvSpPr>
-          <p:cNvPr id="8" name="Text 6"/>
+            <a:endParaRPr lang="en-US" sz="1400" dirty="0"/>
+          </a:p>
+        </p:txBody>
+      </p:sp>
+      <p:sp>
+        <p:nvSpPr>
+          <p:cNvPr id="13" name="Text 11"/>
           <p:cNvSpPr txBox="1"/>
           <p:nvPr/>
         </p:nvSpPr>
         <p:spPr>
           <a:xfrm>
-            <a:off x="1280160" y="3922776"/>
-            <a:ext cx="10362895" cy="493776"/>
+            <a:off x="8915400" y="4904232"/>
+            <a:ext cx="2544775" cy="1176528"/>
           </a:xfrm>
           <a:prstGeom prst="rect">
             <a:avLst/>
@@ -12745,7 +13243,7 @@
               <a:buNone/>
             </a:pPr>
             <a:r>
-              <a:rPr lang="en-US" sz="2400" dirty="0">
+              <a:rPr lang="en-US" sz="1700" dirty="0">
                 <a:solidFill>
                   <a:srgbClr val="1B2530"/>
                 </a:solidFill>
@@ -12753,95 +13251,9 @@
                 <a:ea typeface="Calibri" pitchFamily="34" charset="-122"/>
                 <a:cs typeface="Calibri" pitchFamily="34" charset="-120"/>
               </a:rPr>
-              <a:t>Label tokens by where they live: 'lab laptop'</a:t>
-            </a:r>
-            <a:endParaRPr lang="en-US" sz="2400" dirty="0"/>
-          </a:p>
-        </p:txBody>
-      </p:sp>
-      <p:sp>
-        <p:nvSpPr>
-          <p:cNvPr id="9" name="Text 7"/>
-          <p:cNvSpPr txBox="1"/>
-          <p:nvPr/>
-        </p:nvSpPr>
-        <p:spPr>
-          <a:xfrm>
-            <a:off x="548640" y="5170932"/>
-            <a:ext cx="457200" cy="457200"/>
-          </a:xfrm>
-          <a:prstGeom prst="roundRect">
-            <a:avLst>
-              <a:gd name="adj" fmla="val 16000"/>
-            </a:avLst>
-          </a:prstGeom>
-          <a:solidFill>
-            <a:srgbClr val="0E7C86"/>
-          </a:solidFill>
-          <a:ln>
-            <a:solidFill>
-              <a:srgbClr val="0E7C86"/>
-            </a:solidFill>
-          </a:ln>
-        </p:spPr>
-        <p:txBody>
-          <a:bodyPr wrap="square" lIns="0" tIns="0" rIns="0" bIns="0" rtlCol="0" anchor="ctr"/>
-          <a:lstStyle/>
-          <a:p>
-            <a:pPr algn="ctr" indent="0" marL="0">
-              <a:buNone/>
-            </a:pPr>
-            <a:r>
-              <a:rPr lang="en-US" sz="1700" b="1" dirty="0">
-                <a:solidFill>
-                  <a:srgbClr val="FFFFFF"/>
-                </a:solidFill>
-                <a:latin typeface="Calibri" pitchFamily="34" charset="0"/>
-                <a:ea typeface="Calibri" pitchFamily="34" charset="-122"/>
-                <a:cs typeface="Calibri" pitchFamily="34" charset="-120"/>
-              </a:rPr>
-              <a:t>4</a:t>
+              <a:t>After verification the game is listed</a:t>
             </a:r>
             <a:endParaRPr lang="en-US" sz="1700" dirty="0"/>
-          </a:p>
-        </p:txBody>
-      </p:sp>
-      <p:sp>
-        <p:nvSpPr>
-          <p:cNvPr id="10" name="Text 8"/>
-          <p:cNvSpPr txBox="1"/>
-          <p:nvPr/>
-        </p:nvSpPr>
-        <p:spPr>
-          <a:xfrm>
-            <a:off x="1280160" y="5152644"/>
-            <a:ext cx="10362895" cy="493776"/>
-          </a:xfrm>
-          <a:prstGeom prst="rect">
-            <a:avLst/>
-          </a:prstGeom>
-          <a:noFill/>
-          <a:ln/>
-        </p:spPr>
-        <p:txBody>
-          <a:bodyPr wrap="square" lIns="0" tIns="0" rIns="0" bIns="0" rtlCol="0" anchor="ctr"/>
-          <a:lstStyle/>
-          <a:p>
-            <a:pPr indent="0" marL="0">
-              <a:buNone/>
-            </a:pPr>
-            <a:r>
-              <a:rPr lang="en-US" sz="2400" dirty="0">
-                <a:solidFill>
-                  <a:srgbClr val="1B2530"/>
-                </a:solidFill>
-                <a:latin typeface="Calibri" pitchFamily="34" charset="0"/>
-                <a:ea typeface="Calibri" pitchFamily="34" charset="-122"/>
-                <a:cs typeface="Calibri" pitchFamily="34" charset="-120"/>
-              </a:rPr>
-              <a:t>Revoke a leaked token at once on the Tokens page</a:t>
-            </a:r>
-            <a:endParaRPr lang="en-US" sz="2400" dirty="0"/>
           </a:p>
         </p:txBody>
       </p:sp>
@@ -12953,6 +13365,1767 @@
                 <a:ea typeface="Cambria" pitchFamily="34" charset="-122"/>
                 <a:cs typeface="Cambria" pitchFamily="34" charset="-120"/>
               </a:rPr>
+              <a:t>The metadata trailer</a:t>
+            </a:r>
+            <a:endParaRPr lang="en-US" sz="3000" dirty="0"/>
+          </a:p>
+        </p:txBody>
+      </p:sp>
+      <p:sp>
+        <p:nvSpPr>
+          <p:cNvPr id="3" name="Text 1"/>
+          <p:cNvSpPr txBox="1"/>
+          <p:nvPr/>
+        </p:nvSpPr>
+        <p:spPr>
+          <a:xfrm>
+            <a:off x="548640" y="1463040"/>
+            <a:ext cx="822960" cy="500307"/>
+          </a:xfrm>
+          <a:prstGeom prst="rect">
+            <a:avLst/>
+          </a:prstGeom>
+          <a:noFill/>
+          <a:ln/>
+        </p:spPr>
+        <p:txBody>
+          <a:bodyPr wrap="square" lIns="0" tIns="0" rIns="0" bIns="0" rtlCol="0" anchor="ctr"/>
+          <a:lstStyle/>
+          <a:p>
+            <a:pPr algn="r" indent="0" marL="0">
+              <a:buNone/>
+            </a:pPr>
+            <a:r>
+              <a:rPr lang="en-US" sz="1223" dirty="0">
+                <a:solidFill>
+                  <a:srgbClr val="5B6B78"/>
+                </a:solidFill>
+                <a:latin typeface="Courier New" pitchFamily="34" charset="0"/>
+                <a:ea typeface="Courier New" pitchFamily="34" charset="-122"/>
+                <a:cs typeface="Courier New" pitchFamily="34" charset="-120"/>
+              </a:rPr>
+              <a:t>+0</a:t>
+            </a:r>
+            <a:endParaRPr lang="en-US" sz="1223" dirty="0"/>
+          </a:p>
+        </p:txBody>
+      </p:sp>
+      <p:sp>
+        <p:nvSpPr>
+          <p:cNvPr id="4" name="Text 2"/>
+          <p:cNvSpPr txBox="1"/>
+          <p:nvPr/>
+        </p:nvSpPr>
+        <p:spPr>
+          <a:xfrm>
+            <a:off x="1508760" y="1463040"/>
+            <a:ext cx="3291840" cy="500307"/>
+          </a:xfrm>
+          <a:prstGeom prst="rect">
+            <a:avLst/>
+          </a:prstGeom>
+          <a:solidFill>
+            <a:srgbClr val="2E4A62"/>
+          </a:solidFill>
+          <a:ln w="12700">
+            <a:solidFill>
+              <a:srgbClr val="FFFFFF"/>
+            </a:solidFill>
+          </a:ln>
+        </p:spPr>
+        <p:txBody>
+          <a:bodyPr wrap="square" lIns="0" tIns="0" rIns="0" bIns="0" rtlCol="0" anchor="ctr"/>
+          <a:lstStyle/>
+          <a:p>
+            <a:pPr algn="ctr" indent="0" marL="0">
+              <a:buNone/>
+            </a:pPr>
+            <a:r>
+              <a:rPr lang="en-US" sz="1423" b="1" dirty="0">
+                <a:solidFill>
+                  <a:srgbClr val="FFFFFF"/>
+                </a:solidFill>
+                <a:latin typeface="Courier New" pitchFamily="34" charset="0"/>
+                <a:ea typeface="Courier New" pitchFamily="34" charset="-122"/>
+                <a:cs typeface="Courier New" pitchFamily="34" charset="-120"/>
+              </a:rPr>
+              <a:t>"PRG32META"</a:t>
+            </a:r>
+            <a:endParaRPr lang="en-US" sz="1423" dirty="0"/>
+          </a:p>
+        </p:txBody>
+      </p:sp>
+      <p:sp>
+        <p:nvSpPr>
+          <p:cNvPr id="5" name="Text 3"/>
+          <p:cNvSpPr txBox="1"/>
+          <p:nvPr/>
+        </p:nvSpPr>
+        <p:spPr>
+          <a:xfrm>
+            <a:off x="4937760" y="1463040"/>
+            <a:ext cx="1143000" cy="500307"/>
+          </a:xfrm>
+          <a:prstGeom prst="rect">
+            <a:avLst/>
+          </a:prstGeom>
+          <a:noFill/>
+          <a:ln/>
+        </p:spPr>
+        <p:txBody>
+          <a:bodyPr wrap="square" lIns="0" tIns="0" rIns="0" bIns="0" rtlCol="0" anchor="ctr"/>
+          <a:lstStyle/>
+          <a:p>
+            <a:pPr indent="0" marL="0">
+              <a:buNone/>
+            </a:pPr>
+            <a:r>
+              <a:rPr lang="en-US" sz="1223" dirty="0">
+                <a:solidFill>
+                  <a:srgbClr val="5B6B78"/>
+                </a:solidFill>
+                <a:latin typeface="Calibri" pitchFamily="34" charset="0"/>
+                <a:ea typeface="Calibri" pitchFamily="34" charset="-122"/>
+                <a:cs typeface="Calibri" pitchFamily="34" charset="-120"/>
+              </a:rPr>
+              <a:t>9 bytes</a:t>
+            </a:r>
+            <a:endParaRPr lang="en-US" sz="1223" dirty="0"/>
+          </a:p>
+        </p:txBody>
+      </p:sp>
+      <p:sp>
+        <p:nvSpPr>
+          <p:cNvPr id="6" name="Text 4"/>
+          <p:cNvSpPr txBox="1"/>
+          <p:nvPr/>
+        </p:nvSpPr>
+        <p:spPr>
+          <a:xfrm>
+            <a:off x="6126480" y="1463040"/>
+            <a:ext cx="5516575" cy="500307"/>
+          </a:xfrm>
+          <a:prstGeom prst="rect">
+            <a:avLst/>
+          </a:prstGeom>
+          <a:noFill/>
+          <a:ln/>
+        </p:spPr>
+        <p:txBody>
+          <a:bodyPr wrap="square" lIns="0" tIns="0" rIns="0" bIns="0" rtlCol="0" anchor="ctr"/>
+          <a:lstStyle/>
+          <a:p>
+            <a:pPr indent="0" marL="0">
+              <a:buNone/>
+            </a:pPr>
+            <a:r>
+              <a:rPr lang="en-US" sz="1423" dirty="0">
+                <a:solidFill>
+                  <a:srgbClr val="1B2530"/>
+                </a:solidFill>
+                <a:latin typeface="Calibri" pitchFamily="34" charset="0"/>
+                <a:ea typeface="Calibri" pitchFamily="34" charset="-122"/>
+                <a:cs typeface="Calibri" pitchFamily="34" charset="-120"/>
+              </a:rPr>
+              <a:t>magic</a:t>
+            </a:r>
+            <a:endParaRPr lang="en-US" sz="1423" dirty="0"/>
+          </a:p>
+        </p:txBody>
+      </p:sp>
+      <p:sp>
+        <p:nvSpPr>
+          <p:cNvPr id="7" name="Text 5"/>
+          <p:cNvSpPr txBox="1"/>
+          <p:nvPr/>
+        </p:nvSpPr>
+        <p:spPr>
+          <a:xfrm>
+            <a:off x="548640" y="2027355"/>
+            <a:ext cx="822960" cy="500307"/>
+          </a:xfrm>
+          <a:prstGeom prst="rect">
+            <a:avLst/>
+          </a:prstGeom>
+          <a:noFill/>
+          <a:ln/>
+        </p:spPr>
+        <p:txBody>
+          <a:bodyPr wrap="square" lIns="0" tIns="0" rIns="0" bIns="0" rtlCol="0" anchor="ctr"/>
+          <a:lstStyle/>
+          <a:p>
+            <a:pPr algn="r" indent="0" marL="0">
+              <a:buNone/>
+            </a:pPr>
+            <a:r>
+              <a:rPr lang="en-US" sz="1223" dirty="0">
+                <a:solidFill>
+                  <a:srgbClr val="5B6B78"/>
+                </a:solidFill>
+                <a:latin typeface="Courier New" pitchFamily="34" charset="0"/>
+                <a:ea typeface="Courier New" pitchFamily="34" charset="-122"/>
+                <a:cs typeface="Courier New" pitchFamily="34" charset="-120"/>
+              </a:rPr>
+              <a:t>+9</a:t>
+            </a:r>
+            <a:endParaRPr lang="en-US" sz="1223" dirty="0"/>
+          </a:p>
+        </p:txBody>
+      </p:sp>
+      <p:sp>
+        <p:nvSpPr>
+          <p:cNvPr id="8" name="Text 6"/>
+          <p:cNvSpPr txBox="1"/>
+          <p:nvPr/>
+        </p:nvSpPr>
+        <p:spPr>
+          <a:xfrm>
+            <a:off x="1508760" y="2027355"/>
+            <a:ext cx="3291840" cy="500307"/>
+          </a:xfrm>
+          <a:prstGeom prst="rect">
+            <a:avLst/>
+          </a:prstGeom>
+          <a:solidFill>
+            <a:srgbClr val="0E7C86"/>
+          </a:solidFill>
+          <a:ln w="12700">
+            <a:solidFill>
+              <a:srgbClr val="FFFFFF"/>
+            </a:solidFill>
+          </a:ln>
+        </p:spPr>
+        <p:txBody>
+          <a:bodyPr wrap="square" lIns="0" tIns="0" rIns="0" bIns="0" rtlCol="0" anchor="ctr"/>
+          <a:lstStyle/>
+          <a:p>
+            <a:pPr algn="ctr" indent="0" marL="0">
+              <a:buNone/>
+            </a:pPr>
+            <a:r>
+              <a:rPr lang="en-US" sz="1423" b="1" dirty="0">
+                <a:solidFill>
+                  <a:srgbClr val="FFFFFF"/>
+                </a:solidFill>
+                <a:latin typeface="Courier New" pitchFamily="34" charset="0"/>
+                <a:ea typeface="Courier New" pitchFamily="34" charset="-122"/>
+                <a:cs typeface="Courier New" pitchFamily="34" charset="-120"/>
+              </a:rPr>
+              <a:t>version</a:t>
+            </a:r>
+            <a:endParaRPr lang="en-US" sz="1423" dirty="0"/>
+          </a:p>
+        </p:txBody>
+      </p:sp>
+      <p:sp>
+        <p:nvSpPr>
+          <p:cNvPr id="9" name="Text 7"/>
+          <p:cNvSpPr txBox="1"/>
+          <p:nvPr/>
+        </p:nvSpPr>
+        <p:spPr>
+          <a:xfrm>
+            <a:off x="4937760" y="2027355"/>
+            <a:ext cx="1143000" cy="500307"/>
+          </a:xfrm>
+          <a:prstGeom prst="rect">
+            <a:avLst/>
+          </a:prstGeom>
+          <a:noFill/>
+          <a:ln/>
+        </p:spPr>
+        <p:txBody>
+          <a:bodyPr wrap="square" lIns="0" tIns="0" rIns="0" bIns="0" rtlCol="0" anchor="ctr"/>
+          <a:lstStyle/>
+          <a:p>
+            <a:pPr indent="0" marL="0">
+              <a:buNone/>
+            </a:pPr>
+            <a:r>
+              <a:rPr lang="en-US" sz="1223" dirty="0">
+                <a:solidFill>
+                  <a:srgbClr val="5B6B78"/>
+                </a:solidFill>
+                <a:latin typeface="Calibri" pitchFamily="34" charset="0"/>
+                <a:ea typeface="Calibri" pitchFamily="34" charset="-122"/>
+                <a:cs typeface="Calibri" pitchFamily="34" charset="-120"/>
+              </a:rPr>
+              <a:t>1 bytes</a:t>
+            </a:r>
+            <a:endParaRPr lang="en-US" sz="1223" dirty="0"/>
+          </a:p>
+        </p:txBody>
+      </p:sp>
+      <p:sp>
+        <p:nvSpPr>
+          <p:cNvPr id="10" name="Text 8"/>
+          <p:cNvSpPr txBox="1"/>
+          <p:nvPr/>
+        </p:nvSpPr>
+        <p:spPr>
+          <a:xfrm>
+            <a:off x="6126480" y="2027355"/>
+            <a:ext cx="5516575" cy="500307"/>
+          </a:xfrm>
+          <a:prstGeom prst="rect">
+            <a:avLst/>
+          </a:prstGeom>
+          <a:noFill/>
+          <a:ln/>
+        </p:spPr>
+        <p:txBody>
+          <a:bodyPr wrap="square" lIns="0" tIns="0" rIns="0" bIns="0" rtlCol="0" anchor="ctr"/>
+          <a:lstStyle/>
+          <a:p>
+            <a:pPr indent="0" marL="0">
+              <a:buNone/>
+            </a:pPr>
+            <a:r>
+              <a:rPr lang="en-US" sz="1423" dirty="0">
+                <a:solidFill>
+                  <a:srgbClr val="1B2530"/>
+                </a:solidFill>
+                <a:latin typeface="Calibri" pitchFamily="34" charset="0"/>
+                <a:ea typeface="Calibri" pitchFamily="34" charset="-122"/>
+                <a:cs typeface="Calibri" pitchFamily="34" charset="-120"/>
+              </a:rPr>
+              <a:t>currently 1</a:t>
+            </a:r>
+            <a:endParaRPr lang="en-US" sz="1423" dirty="0"/>
+          </a:p>
+        </p:txBody>
+      </p:sp>
+      <p:sp>
+        <p:nvSpPr>
+          <p:cNvPr id="11" name="Text 9"/>
+          <p:cNvSpPr txBox="1"/>
+          <p:nvPr/>
+        </p:nvSpPr>
+        <p:spPr>
+          <a:xfrm>
+            <a:off x="548640" y="2591671"/>
+            <a:ext cx="822960" cy="500307"/>
+          </a:xfrm>
+          <a:prstGeom prst="rect">
+            <a:avLst/>
+          </a:prstGeom>
+          <a:noFill/>
+          <a:ln/>
+        </p:spPr>
+        <p:txBody>
+          <a:bodyPr wrap="square" lIns="0" tIns="0" rIns="0" bIns="0" rtlCol="0" anchor="ctr"/>
+          <a:lstStyle/>
+          <a:p>
+            <a:pPr algn="r" indent="0" marL="0">
+              <a:buNone/>
+            </a:pPr>
+            <a:r>
+              <a:rPr lang="en-US" sz="1223" dirty="0">
+                <a:solidFill>
+                  <a:srgbClr val="5B6B78"/>
+                </a:solidFill>
+                <a:latin typeface="Courier New" pitchFamily="34" charset="0"/>
+                <a:ea typeface="Courier New" pitchFamily="34" charset="-122"/>
+                <a:cs typeface="Courier New" pitchFamily="34" charset="-120"/>
+              </a:rPr>
+              <a:t>+10</a:t>
+            </a:r>
+            <a:endParaRPr lang="en-US" sz="1223" dirty="0"/>
+          </a:p>
+        </p:txBody>
+      </p:sp>
+      <p:sp>
+        <p:nvSpPr>
+          <p:cNvPr id="12" name="Text 10"/>
+          <p:cNvSpPr txBox="1"/>
+          <p:nvPr/>
+        </p:nvSpPr>
+        <p:spPr>
+          <a:xfrm>
+            <a:off x="1508760" y="2591671"/>
+            <a:ext cx="3291840" cy="500307"/>
+          </a:xfrm>
+          <a:prstGeom prst="rect">
+            <a:avLst/>
+          </a:prstGeom>
+          <a:solidFill>
+            <a:srgbClr val="6B4FA0"/>
+          </a:solidFill>
+          <a:ln w="12700">
+            <a:solidFill>
+              <a:srgbClr val="FFFFFF"/>
+            </a:solidFill>
+          </a:ln>
+        </p:spPr>
+        <p:txBody>
+          <a:bodyPr wrap="square" lIns="0" tIns="0" rIns="0" bIns="0" rtlCol="0" anchor="ctr"/>
+          <a:lstStyle/>
+          <a:p>
+            <a:pPr algn="ctr" indent="0" marL="0">
+              <a:buNone/>
+            </a:pPr>
+            <a:r>
+              <a:rPr lang="en-US" sz="1423" b="1" dirty="0">
+                <a:solidFill>
+                  <a:srgbClr val="FFFFFF"/>
+                </a:solidFill>
+                <a:latin typeface="Courier New" pitchFamily="34" charset="0"/>
+                <a:ea typeface="Courier New" pitchFamily="34" charset="-122"/>
+                <a:cs typeface="Courier New" pitchFamily="34" charset="-120"/>
+              </a:rPr>
+              <a:t>entry_count</a:t>
+            </a:r>
+            <a:endParaRPr lang="en-US" sz="1423" dirty="0"/>
+          </a:p>
+        </p:txBody>
+      </p:sp>
+      <p:sp>
+        <p:nvSpPr>
+          <p:cNvPr id="13" name="Text 11"/>
+          <p:cNvSpPr txBox="1"/>
+          <p:nvPr/>
+        </p:nvSpPr>
+        <p:spPr>
+          <a:xfrm>
+            <a:off x="4937760" y="2591671"/>
+            <a:ext cx="1143000" cy="500307"/>
+          </a:xfrm>
+          <a:prstGeom prst="rect">
+            <a:avLst/>
+          </a:prstGeom>
+          <a:noFill/>
+          <a:ln/>
+        </p:spPr>
+        <p:txBody>
+          <a:bodyPr wrap="square" lIns="0" tIns="0" rIns="0" bIns="0" rtlCol="0" anchor="ctr"/>
+          <a:lstStyle/>
+          <a:p>
+            <a:pPr indent="0" marL="0">
+              <a:buNone/>
+            </a:pPr>
+            <a:r>
+              <a:rPr lang="en-US" sz="1223" dirty="0">
+                <a:solidFill>
+                  <a:srgbClr val="5B6B78"/>
+                </a:solidFill>
+                <a:latin typeface="Calibri" pitchFamily="34" charset="0"/>
+                <a:ea typeface="Calibri" pitchFamily="34" charset="-122"/>
+                <a:cs typeface="Calibri" pitchFamily="34" charset="-120"/>
+              </a:rPr>
+              <a:t>2 bytes</a:t>
+            </a:r>
+            <a:endParaRPr lang="en-US" sz="1223" dirty="0"/>
+          </a:p>
+        </p:txBody>
+      </p:sp>
+      <p:sp>
+        <p:nvSpPr>
+          <p:cNvPr id="14" name="Text 12"/>
+          <p:cNvSpPr txBox="1"/>
+          <p:nvPr/>
+        </p:nvSpPr>
+        <p:spPr>
+          <a:xfrm>
+            <a:off x="6126480" y="2591671"/>
+            <a:ext cx="5516575" cy="500307"/>
+          </a:xfrm>
+          <a:prstGeom prst="rect">
+            <a:avLst/>
+          </a:prstGeom>
+          <a:noFill/>
+          <a:ln/>
+        </p:spPr>
+        <p:txBody>
+          <a:bodyPr wrap="square" lIns="0" tIns="0" rIns="0" bIns="0" rtlCol="0" anchor="ctr"/>
+          <a:lstStyle/>
+          <a:p>
+            <a:pPr indent="0" marL="0">
+              <a:buNone/>
+            </a:pPr>
+            <a:r>
+              <a:rPr lang="en-US" sz="1423" dirty="0">
+                <a:solidFill>
+                  <a:srgbClr val="1B2530"/>
+                </a:solidFill>
+                <a:latin typeface="Calibri" pitchFamily="34" charset="0"/>
+                <a:ea typeface="Calibri" pitchFamily="34" charset="-122"/>
+                <a:cs typeface="Calibri" pitchFamily="34" charset="-120"/>
+              </a:rPr>
+              <a:t>number of blocks</a:t>
+            </a:r>
+            <a:endParaRPr lang="en-US" sz="1423" dirty="0"/>
+          </a:p>
+        </p:txBody>
+      </p:sp>
+      <p:sp>
+        <p:nvSpPr>
+          <p:cNvPr id="15" name="Text 13"/>
+          <p:cNvSpPr txBox="1"/>
+          <p:nvPr/>
+        </p:nvSpPr>
+        <p:spPr>
+          <a:xfrm>
+            <a:off x="548640" y="3155986"/>
+            <a:ext cx="822960" cy="500307"/>
+          </a:xfrm>
+          <a:prstGeom prst="rect">
+            <a:avLst/>
+          </a:prstGeom>
+          <a:noFill/>
+          <a:ln/>
+        </p:spPr>
+        <p:txBody>
+          <a:bodyPr wrap="square" lIns="0" tIns="0" rIns="0" bIns="0" rtlCol="0" anchor="ctr"/>
+          <a:lstStyle/>
+          <a:p>
+            <a:pPr algn="r" indent="0" marL="0">
+              <a:buNone/>
+            </a:pPr>
+            <a:r>
+              <a:rPr lang="en-US" sz="1223" dirty="0">
+                <a:solidFill>
+                  <a:srgbClr val="5B6B78"/>
+                </a:solidFill>
+                <a:latin typeface="Courier New" pitchFamily="34" charset="0"/>
+                <a:ea typeface="Courier New" pitchFamily="34" charset="-122"/>
+                <a:cs typeface="Courier New" pitchFamily="34" charset="-120"/>
+              </a:rPr>
+              <a:t>+12</a:t>
+            </a:r>
+            <a:endParaRPr lang="en-US" sz="1223" dirty="0"/>
+          </a:p>
+        </p:txBody>
+      </p:sp>
+      <p:sp>
+        <p:nvSpPr>
+          <p:cNvPr id="16" name="Text 14"/>
+          <p:cNvSpPr txBox="1"/>
+          <p:nvPr/>
+        </p:nvSpPr>
+        <p:spPr>
+          <a:xfrm>
+            <a:off x="1508760" y="3155986"/>
+            <a:ext cx="3291840" cy="500307"/>
+          </a:xfrm>
+          <a:prstGeom prst="rect">
+            <a:avLst/>
+          </a:prstGeom>
+          <a:solidFill>
+            <a:srgbClr val="C7791B"/>
+          </a:solidFill>
+          <a:ln w="12700">
+            <a:solidFill>
+              <a:srgbClr val="FFFFFF"/>
+            </a:solidFill>
+          </a:ln>
+        </p:spPr>
+        <p:txBody>
+          <a:bodyPr wrap="square" lIns="0" tIns="0" rIns="0" bIns="0" rtlCol="0" anchor="ctr"/>
+          <a:lstStyle/>
+          <a:p>
+            <a:pPr algn="ctr" indent="0" marL="0">
+              <a:buNone/>
+            </a:pPr>
+            <a:r>
+              <a:rPr lang="en-US" sz="1423" b="1" dirty="0">
+                <a:solidFill>
+                  <a:srgbClr val="FFFFFF"/>
+                </a:solidFill>
+                <a:latin typeface="Courier New" pitchFamily="34" charset="0"/>
+                <a:ea typeface="Courier New" pitchFamily="34" charset="-122"/>
+                <a:cs typeface="Courier New" pitchFamily="34" charset="-120"/>
+              </a:rPr>
+              <a:t>trailer_size</a:t>
+            </a:r>
+            <a:endParaRPr lang="en-US" sz="1423" dirty="0"/>
+          </a:p>
+        </p:txBody>
+      </p:sp>
+      <p:sp>
+        <p:nvSpPr>
+          <p:cNvPr id="17" name="Text 15"/>
+          <p:cNvSpPr txBox="1"/>
+          <p:nvPr/>
+        </p:nvSpPr>
+        <p:spPr>
+          <a:xfrm>
+            <a:off x="4937760" y="3155986"/>
+            <a:ext cx="1143000" cy="500307"/>
+          </a:xfrm>
+          <a:prstGeom prst="rect">
+            <a:avLst/>
+          </a:prstGeom>
+          <a:noFill/>
+          <a:ln/>
+        </p:spPr>
+        <p:txBody>
+          <a:bodyPr wrap="square" lIns="0" tIns="0" rIns="0" bIns="0" rtlCol="0" anchor="ctr"/>
+          <a:lstStyle/>
+          <a:p>
+            <a:pPr indent="0" marL="0">
+              <a:buNone/>
+            </a:pPr>
+            <a:r>
+              <a:rPr lang="en-US" sz="1223" dirty="0">
+                <a:solidFill>
+                  <a:srgbClr val="5B6B78"/>
+                </a:solidFill>
+                <a:latin typeface="Calibri" pitchFamily="34" charset="0"/>
+                <a:ea typeface="Calibri" pitchFamily="34" charset="-122"/>
+                <a:cs typeface="Calibri" pitchFamily="34" charset="-120"/>
+              </a:rPr>
+              <a:t>4 bytes</a:t>
+            </a:r>
+            <a:endParaRPr lang="en-US" sz="1223" dirty="0"/>
+          </a:p>
+        </p:txBody>
+      </p:sp>
+      <p:sp>
+        <p:nvSpPr>
+          <p:cNvPr id="18" name="Text 16"/>
+          <p:cNvSpPr txBox="1"/>
+          <p:nvPr/>
+        </p:nvSpPr>
+        <p:spPr>
+          <a:xfrm>
+            <a:off x="6126480" y="3155986"/>
+            <a:ext cx="5516575" cy="500307"/>
+          </a:xfrm>
+          <a:prstGeom prst="rect">
+            <a:avLst/>
+          </a:prstGeom>
+          <a:noFill/>
+          <a:ln/>
+        </p:spPr>
+        <p:txBody>
+          <a:bodyPr wrap="square" lIns="0" tIns="0" rIns="0" bIns="0" rtlCol="0" anchor="ctr"/>
+          <a:lstStyle/>
+          <a:p>
+            <a:pPr indent="0" marL="0">
+              <a:buNone/>
+            </a:pPr>
+            <a:r>
+              <a:rPr lang="en-US" sz="1423" dirty="0">
+                <a:solidFill>
+                  <a:srgbClr val="1B2530"/>
+                </a:solidFill>
+                <a:latin typeface="Calibri" pitchFamily="34" charset="0"/>
+                <a:ea typeface="Calibri" pitchFamily="34" charset="-122"/>
+                <a:cs typeface="Calibri" pitchFamily="34" charset="-120"/>
+              </a:rPr>
+              <a:t>whole trailer, in bytes</a:t>
+            </a:r>
+            <a:endParaRPr lang="en-US" sz="1423" dirty="0"/>
+          </a:p>
+        </p:txBody>
+      </p:sp>
+      <p:sp>
+        <p:nvSpPr>
+          <p:cNvPr id="19" name="Text 17"/>
+          <p:cNvSpPr txBox="1"/>
+          <p:nvPr/>
+        </p:nvSpPr>
+        <p:spPr>
+          <a:xfrm>
+            <a:off x="548640" y="3720302"/>
+            <a:ext cx="822960" cy="500307"/>
+          </a:xfrm>
+          <a:prstGeom prst="rect">
+            <a:avLst/>
+          </a:prstGeom>
+          <a:noFill/>
+          <a:ln/>
+        </p:spPr>
+        <p:txBody>
+          <a:bodyPr wrap="square" lIns="0" tIns="0" rIns="0" bIns="0" rtlCol="0" anchor="ctr"/>
+          <a:lstStyle/>
+          <a:p>
+            <a:pPr algn="r" indent="0" marL="0">
+              <a:buNone/>
+            </a:pPr>
+            <a:r>
+              <a:rPr lang="en-US" sz="1223" dirty="0">
+                <a:solidFill>
+                  <a:srgbClr val="5B6B78"/>
+                </a:solidFill>
+                <a:latin typeface="Courier New" pitchFamily="34" charset="0"/>
+                <a:ea typeface="Courier New" pitchFamily="34" charset="-122"/>
+                <a:cs typeface="Courier New" pitchFamily="34" charset="-120"/>
+              </a:rPr>
+              <a:t>+16</a:t>
+            </a:r>
+            <a:endParaRPr lang="en-US" sz="1223" dirty="0"/>
+          </a:p>
+        </p:txBody>
+      </p:sp>
+      <p:sp>
+        <p:nvSpPr>
+          <p:cNvPr id="20" name="Text 18"/>
+          <p:cNvSpPr txBox="1"/>
+          <p:nvPr/>
+        </p:nvSpPr>
+        <p:spPr>
+          <a:xfrm>
+            <a:off x="1508760" y="3720302"/>
+            <a:ext cx="3291840" cy="500307"/>
+          </a:xfrm>
+          <a:prstGeom prst="rect">
+            <a:avLst/>
+          </a:prstGeom>
+          <a:solidFill>
+            <a:srgbClr val="2F7D4F"/>
+          </a:solidFill>
+          <a:ln w="12700">
+            <a:solidFill>
+              <a:srgbClr val="FFFFFF"/>
+            </a:solidFill>
+          </a:ln>
+        </p:spPr>
+        <p:txBody>
+          <a:bodyPr wrap="square" lIns="0" tIns="0" rIns="0" bIns="0" rtlCol="0" anchor="ctr"/>
+          <a:lstStyle/>
+          <a:p>
+            <a:pPr algn="ctr" indent="0" marL="0">
+              <a:buNone/>
+            </a:pPr>
+            <a:r>
+              <a:rPr lang="en-US" sz="1423" b="1" dirty="0">
+                <a:solidFill>
+                  <a:srgbClr val="FFFFFF"/>
+                </a:solidFill>
+                <a:latin typeface="Courier New" pitchFamily="34" charset="0"/>
+                <a:ea typeface="Courier New" pitchFamily="34" charset="-122"/>
+                <a:cs typeface="Courier New" pitchFamily="34" charset="-120"/>
+              </a:rPr>
+              <a:t>type</a:t>
+            </a:r>
+            <a:endParaRPr lang="en-US" sz="1423" dirty="0"/>
+          </a:p>
+        </p:txBody>
+      </p:sp>
+      <p:sp>
+        <p:nvSpPr>
+          <p:cNvPr id="21" name="Text 19"/>
+          <p:cNvSpPr txBox="1"/>
+          <p:nvPr/>
+        </p:nvSpPr>
+        <p:spPr>
+          <a:xfrm>
+            <a:off x="4937760" y="3720302"/>
+            <a:ext cx="1143000" cy="500307"/>
+          </a:xfrm>
+          <a:prstGeom prst="rect">
+            <a:avLst/>
+          </a:prstGeom>
+          <a:noFill/>
+          <a:ln/>
+        </p:spPr>
+        <p:txBody>
+          <a:bodyPr wrap="square" lIns="0" tIns="0" rIns="0" bIns="0" rtlCol="0" anchor="ctr"/>
+          <a:lstStyle/>
+          <a:p>
+            <a:pPr indent="0" marL="0">
+              <a:buNone/>
+            </a:pPr>
+            <a:r>
+              <a:rPr lang="en-US" sz="1223" dirty="0">
+                <a:solidFill>
+                  <a:srgbClr val="5B6B78"/>
+                </a:solidFill>
+                <a:latin typeface="Calibri" pitchFamily="34" charset="0"/>
+                <a:ea typeface="Calibri" pitchFamily="34" charset="-122"/>
+                <a:cs typeface="Calibri" pitchFamily="34" charset="-120"/>
+              </a:rPr>
+              <a:t>4 bytes</a:t>
+            </a:r>
+            <a:endParaRPr lang="en-US" sz="1223" dirty="0"/>
+          </a:p>
+        </p:txBody>
+      </p:sp>
+      <p:sp>
+        <p:nvSpPr>
+          <p:cNvPr id="22" name="Text 20"/>
+          <p:cNvSpPr txBox="1"/>
+          <p:nvPr/>
+        </p:nvSpPr>
+        <p:spPr>
+          <a:xfrm>
+            <a:off x="6126480" y="3720302"/>
+            <a:ext cx="5516575" cy="500307"/>
+          </a:xfrm>
+          <a:prstGeom prst="rect">
+            <a:avLst/>
+          </a:prstGeom>
+          <a:noFill/>
+          <a:ln/>
+        </p:spPr>
+        <p:txBody>
+          <a:bodyPr wrap="square" lIns="0" tIns="0" rIns="0" bIns="0" rtlCol="0" anchor="ctr"/>
+          <a:lstStyle/>
+          <a:p>
+            <a:pPr indent="0" marL="0">
+              <a:buNone/>
+            </a:pPr>
+            <a:r>
+              <a:rPr lang="en-US" sz="1423" dirty="0">
+                <a:solidFill>
+                  <a:srgbClr val="1B2530"/>
+                </a:solidFill>
+                <a:latin typeface="Calibri" pitchFamily="34" charset="0"/>
+                <a:ea typeface="Calibri" pitchFamily="34" charset="-122"/>
+                <a:cs typeface="Calibri" pitchFamily="34" charset="-120"/>
+              </a:rPr>
+              <a:t>META, ICON, SCRN, SIGN or COLO</a:t>
+            </a:r>
+            <a:endParaRPr lang="en-US" sz="1423" dirty="0"/>
+          </a:p>
+        </p:txBody>
+      </p:sp>
+      <p:sp>
+        <p:nvSpPr>
+          <p:cNvPr id="23" name="Text 21"/>
+          <p:cNvSpPr txBox="1"/>
+          <p:nvPr/>
+        </p:nvSpPr>
+        <p:spPr>
+          <a:xfrm>
+            <a:off x="548640" y="4284617"/>
+            <a:ext cx="822960" cy="500307"/>
+          </a:xfrm>
+          <a:prstGeom prst="rect">
+            <a:avLst/>
+          </a:prstGeom>
+          <a:noFill/>
+          <a:ln/>
+        </p:spPr>
+        <p:txBody>
+          <a:bodyPr wrap="square" lIns="0" tIns="0" rIns="0" bIns="0" rtlCol="0" anchor="ctr"/>
+          <a:lstStyle/>
+          <a:p>
+            <a:pPr algn="r" indent="0" marL="0">
+              <a:buNone/>
+            </a:pPr>
+            <a:r>
+              <a:rPr lang="en-US" sz="1223" dirty="0">
+                <a:solidFill>
+                  <a:srgbClr val="5B6B78"/>
+                </a:solidFill>
+                <a:latin typeface="Courier New" pitchFamily="34" charset="0"/>
+                <a:ea typeface="Courier New" pitchFamily="34" charset="-122"/>
+                <a:cs typeface="Courier New" pitchFamily="34" charset="-120"/>
+              </a:rPr>
+              <a:t>+20</a:t>
+            </a:r>
+            <a:endParaRPr lang="en-US" sz="1223" dirty="0"/>
+          </a:p>
+        </p:txBody>
+      </p:sp>
+      <p:sp>
+        <p:nvSpPr>
+          <p:cNvPr id="24" name="Text 22"/>
+          <p:cNvSpPr txBox="1"/>
+          <p:nvPr/>
+        </p:nvSpPr>
+        <p:spPr>
+          <a:xfrm>
+            <a:off x="1508760" y="4284617"/>
+            <a:ext cx="3291840" cy="500307"/>
+          </a:xfrm>
+          <a:prstGeom prst="rect">
+            <a:avLst/>
+          </a:prstGeom>
+          <a:solidFill>
+            <a:srgbClr val="B23A48"/>
+          </a:solidFill>
+          <a:ln w="12700">
+            <a:solidFill>
+              <a:srgbClr val="FFFFFF"/>
+            </a:solidFill>
+          </a:ln>
+        </p:spPr>
+        <p:txBody>
+          <a:bodyPr wrap="square" lIns="0" tIns="0" rIns="0" bIns="0" rtlCol="0" anchor="ctr"/>
+          <a:lstStyle/>
+          <a:p>
+            <a:pPr algn="ctr" indent="0" marL="0">
+              <a:buNone/>
+            </a:pPr>
+            <a:r>
+              <a:rPr lang="en-US" sz="1423" b="1" dirty="0">
+                <a:solidFill>
+                  <a:srgbClr val="FFFFFF"/>
+                </a:solidFill>
+                <a:latin typeface="Courier New" pitchFamily="34" charset="0"/>
+                <a:ea typeface="Courier New" pitchFamily="34" charset="-122"/>
+                <a:cs typeface="Courier New" pitchFamily="34" charset="-120"/>
+              </a:rPr>
+              <a:t>length</a:t>
+            </a:r>
+            <a:endParaRPr lang="en-US" sz="1423" dirty="0"/>
+          </a:p>
+        </p:txBody>
+      </p:sp>
+      <p:sp>
+        <p:nvSpPr>
+          <p:cNvPr id="25" name="Text 23"/>
+          <p:cNvSpPr txBox="1"/>
+          <p:nvPr/>
+        </p:nvSpPr>
+        <p:spPr>
+          <a:xfrm>
+            <a:off x="4937760" y="4284617"/>
+            <a:ext cx="1143000" cy="500307"/>
+          </a:xfrm>
+          <a:prstGeom prst="rect">
+            <a:avLst/>
+          </a:prstGeom>
+          <a:noFill/>
+          <a:ln/>
+        </p:spPr>
+        <p:txBody>
+          <a:bodyPr wrap="square" lIns="0" tIns="0" rIns="0" bIns="0" rtlCol="0" anchor="ctr"/>
+          <a:lstStyle/>
+          <a:p>
+            <a:pPr indent="0" marL="0">
+              <a:buNone/>
+            </a:pPr>
+            <a:r>
+              <a:rPr lang="en-US" sz="1223" dirty="0">
+                <a:solidFill>
+                  <a:srgbClr val="5B6B78"/>
+                </a:solidFill>
+                <a:latin typeface="Calibri" pitchFamily="34" charset="0"/>
+                <a:ea typeface="Calibri" pitchFamily="34" charset="-122"/>
+                <a:cs typeface="Calibri" pitchFamily="34" charset="-120"/>
+              </a:rPr>
+              <a:t>4 bytes</a:t>
+            </a:r>
+            <a:endParaRPr lang="en-US" sz="1223" dirty="0"/>
+          </a:p>
+        </p:txBody>
+      </p:sp>
+      <p:sp>
+        <p:nvSpPr>
+          <p:cNvPr id="26" name="Text 24"/>
+          <p:cNvSpPr txBox="1"/>
+          <p:nvPr/>
+        </p:nvSpPr>
+        <p:spPr>
+          <a:xfrm>
+            <a:off x="6126480" y="4284617"/>
+            <a:ext cx="5516575" cy="500307"/>
+          </a:xfrm>
+          <a:prstGeom prst="rect">
+            <a:avLst/>
+          </a:prstGeom>
+          <a:noFill/>
+          <a:ln/>
+        </p:spPr>
+        <p:txBody>
+          <a:bodyPr wrap="square" lIns="0" tIns="0" rIns="0" bIns="0" rtlCol="0" anchor="ctr"/>
+          <a:lstStyle/>
+          <a:p>
+            <a:pPr indent="0" marL="0">
+              <a:buNone/>
+            </a:pPr>
+            <a:r>
+              <a:rPr lang="en-US" sz="1423" dirty="0">
+                <a:solidFill>
+                  <a:srgbClr val="1B2530"/>
+                </a:solidFill>
+                <a:latin typeface="Calibri" pitchFamily="34" charset="0"/>
+                <a:ea typeface="Calibri" pitchFamily="34" charset="-122"/>
+                <a:cs typeface="Calibri" pitchFamily="34" charset="-120"/>
+              </a:rPr>
+              <a:t>bytes that follow</a:t>
+            </a:r>
+            <a:endParaRPr lang="en-US" sz="1423" dirty="0"/>
+          </a:p>
+        </p:txBody>
+      </p:sp>
+      <p:sp>
+        <p:nvSpPr>
+          <p:cNvPr id="27" name="Text 25"/>
+          <p:cNvSpPr txBox="1"/>
+          <p:nvPr/>
+        </p:nvSpPr>
+        <p:spPr>
+          <a:xfrm>
+            <a:off x="548640" y="4848933"/>
+            <a:ext cx="822960" cy="500307"/>
+          </a:xfrm>
+          <a:prstGeom prst="rect">
+            <a:avLst/>
+          </a:prstGeom>
+          <a:noFill/>
+          <a:ln/>
+        </p:spPr>
+        <p:txBody>
+          <a:bodyPr wrap="square" lIns="0" tIns="0" rIns="0" bIns="0" rtlCol="0" anchor="ctr"/>
+          <a:lstStyle/>
+          <a:p>
+            <a:pPr algn="r" indent="0" marL="0">
+              <a:buNone/>
+            </a:pPr>
+            <a:endParaRPr lang="en-US" sz="1223" dirty="0"/>
+          </a:p>
+        </p:txBody>
+      </p:sp>
+      <p:sp>
+        <p:nvSpPr>
+          <p:cNvPr id="28" name="Text 26"/>
+          <p:cNvSpPr txBox="1"/>
+          <p:nvPr/>
+        </p:nvSpPr>
+        <p:spPr>
+          <a:xfrm>
+            <a:off x="1508760" y="4848933"/>
+            <a:ext cx="3291840" cy="500307"/>
+          </a:xfrm>
+          <a:prstGeom prst="rect">
+            <a:avLst/>
+          </a:prstGeom>
+          <a:solidFill>
+            <a:srgbClr val="2E4A62"/>
+          </a:solidFill>
+          <a:ln w="12700">
+            <a:solidFill>
+              <a:srgbClr val="FFFFFF"/>
+            </a:solidFill>
+          </a:ln>
+        </p:spPr>
+        <p:txBody>
+          <a:bodyPr wrap="square" lIns="0" tIns="0" rIns="0" bIns="0" rtlCol="0" anchor="ctr"/>
+          <a:lstStyle/>
+          <a:p>
+            <a:pPr algn="ctr" indent="0" marL="0">
+              <a:buNone/>
+            </a:pPr>
+            <a:r>
+              <a:rPr lang="en-US" sz="1423" b="1" dirty="0">
+                <a:solidFill>
+                  <a:srgbClr val="FFFFFF"/>
+                </a:solidFill>
+                <a:latin typeface="Courier New" pitchFamily="34" charset="0"/>
+                <a:ea typeface="Courier New" pitchFamily="34" charset="-122"/>
+                <a:cs typeface="Courier New" pitchFamily="34" charset="-120"/>
+              </a:rPr>
+              <a:t>value</a:t>
+            </a:r>
+            <a:endParaRPr lang="en-US" sz="1423" dirty="0"/>
+          </a:p>
+        </p:txBody>
+      </p:sp>
+      <p:sp>
+        <p:nvSpPr>
+          <p:cNvPr id="29" name="Text 27"/>
+          <p:cNvSpPr txBox="1"/>
+          <p:nvPr/>
+        </p:nvSpPr>
+        <p:spPr>
+          <a:xfrm>
+            <a:off x="4937760" y="4848933"/>
+            <a:ext cx="1143000" cy="500307"/>
+          </a:xfrm>
+          <a:prstGeom prst="rect">
+            <a:avLst/>
+          </a:prstGeom>
+          <a:noFill/>
+          <a:ln/>
+        </p:spPr>
+        <p:txBody>
+          <a:bodyPr wrap="square" lIns="0" tIns="0" rIns="0" bIns="0" rtlCol="0" anchor="ctr"/>
+          <a:lstStyle/>
+          <a:p>
+            <a:pPr indent="0" marL="0">
+              <a:buNone/>
+            </a:pPr>
+            <a:r>
+              <a:rPr lang="en-US" sz="1223" dirty="0">
+                <a:solidFill>
+                  <a:srgbClr val="5B6B78"/>
+                </a:solidFill>
+                <a:latin typeface="Calibri" pitchFamily="34" charset="0"/>
+                <a:ea typeface="Calibri" pitchFamily="34" charset="-122"/>
+                <a:cs typeface="Calibri" pitchFamily="34" charset="-120"/>
+              </a:rPr>
+              <a:t>length</a:t>
+            </a:r>
+            <a:endParaRPr lang="en-US" sz="1223" dirty="0"/>
+          </a:p>
+        </p:txBody>
+      </p:sp>
+      <p:sp>
+        <p:nvSpPr>
+          <p:cNvPr id="30" name="Text 28"/>
+          <p:cNvSpPr txBox="1"/>
+          <p:nvPr/>
+        </p:nvSpPr>
+        <p:spPr>
+          <a:xfrm>
+            <a:off x="6126480" y="4848933"/>
+            <a:ext cx="5516575" cy="500307"/>
+          </a:xfrm>
+          <a:prstGeom prst="rect">
+            <a:avLst/>
+          </a:prstGeom>
+          <a:noFill/>
+          <a:ln/>
+        </p:spPr>
+        <p:txBody>
+          <a:bodyPr wrap="square" lIns="0" tIns="0" rIns="0" bIns="0" rtlCol="0" anchor="ctr"/>
+          <a:lstStyle/>
+          <a:p>
+            <a:pPr indent="0" marL="0">
+              <a:buNone/>
+            </a:pPr>
+            <a:r>
+              <a:rPr lang="en-US" sz="1423" dirty="0">
+                <a:solidFill>
+                  <a:srgbClr val="1B2530"/>
+                </a:solidFill>
+                <a:latin typeface="Calibri" pitchFamily="34" charset="0"/>
+                <a:ea typeface="Calibri" pitchFamily="34" charset="-122"/>
+                <a:cs typeface="Calibri" pitchFamily="34" charset="-120"/>
+              </a:rPr>
+              <a:t>JSON or image bytes; repeated per entry</a:t>
+            </a:r>
+            <a:endParaRPr lang="en-US" sz="1423" dirty="0"/>
+          </a:p>
+        </p:txBody>
+      </p:sp>
+      <p:sp>
+        <p:nvSpPr>
+          <p:cNvPr id="31" name="Shape 29"/>
+          <p:cNvSpPr/>
+          <p:nvPr/>
+        </p:nvSpPr>
+        <p:spPr>
+          <a:xfrm>
+            <a:off x="548640" y="5458968"/>
+            <a:ext cx="11094415" cy="758952"/>
+          </a:xfrm>
+          <a:prstGeom prst="roundRect">
+            <a:avLst>
+              <a:gd name="adj" fmla="val 9639"/>
+            </a:avLst>
+          </a:prstGeom>
+          <a:solidFill>
+            <a:srgbClr val="EEF2F4"/>
+          </a:solidFill>
+          <a:ln w="12700">
+            <a:solidFill>
+              <a:srgbClr val="EEF2F4"/>
+            </a:solidFill>
+            <a:prstDash val="solid"/>
+          </a:ln>
+        </p:spPr>
+      </p:sp>
+      <p:sp>
+        <p:nvSpPr>
+          <p:cNvPr id="32" name="Text 30"/>
+          <p:cNvSpPr txBox="1"/>
+          <p:nvPr/>
+        </p:nvSpPr>
+        <p:spPr>
+          <a:xfrm>
+            <a:off x="822960" y="5532120"/>
+            <a:ext cx="10545775" cy="612648"/>
+          </a:xfrm>
+          <a:prstGeom prst="rect">
+            <a:avLst/>
+          </a:prstGeom>
+          <a:noFill/>
+          <a:ln/>
+        </p:spPr>
+        <p:txBody>
+          <a:bodyPr wrap="square" lIns="0" tIns="0" rIns="0" bIns="0" rtlCol="0" anchor="ctr"/>
+          <a:lstStyle/>
+          <a:p>
+            <a:pPr indent="0" marL="0">
+              <a:buNone/>
+            </a:pPr>
+            <a:r>
+              <a:rPr lang="en-US" sz="1700" dirty="0">
+                <a:solidFill>
+                  <a:srgbClr val="1B2530"/>
+                </a:solidFill>
+                <a:latin typeface="Calibri" pitchFamily="34" charset="0"/>
+                <a:ea typeface="Calibri" pitchFamily="34" charset="-122"/>
+                <a:cs typeface="Calibri" pitchFamily="34" charset="-120"/>
+              </a:rPr>
+              <a:t>Appended after the code. The Store adds one on publication: the 3432-byte cartridge we uploaded came back as 4418 bytes.</a:t>
+            </a:r>
+            <a:endParaRPr lang="en-US" sz="1700" dirty="0"/>
+          </a:p>
+        </p:txBody>
+      </p:sp>
+      <p:sp>
+        <p:nvSpPr>
+          <p:cNvPr id="25" name="Slide Number Placeholder 0"/>
+          <p:cNvSpPr>
+            <a:spLocks noGrp="1"/>
+          </p:cNvSpPr>
+          <p:nvPr>
+            <p:ph type="sldNum" sz="quarter" idx="4294967295"/>
+          </p:nvPr>
+        </p:nvSpPr>
+        <p:spPr>
+          <a:xfrm>
+            <a:off x="11002975" y="6419088"/>
+            <a:ext cx="640080" cy="274320"/>
+          </a:xfrm>
+          <a:prstGeom prst="rect">
+            <a:avLst/>
+          </a:prstGeom>
+          <a:extLst>
+            <a:ext uri="{C572A759-6A51-4108-AA02-DFA0A04FC94B}">
+              <ma14:wrappingTextBoxFlag xmlns:ma14="http://schemas.microsoft.com/office/mac/drawingml/2011/main" val="0"/>
+            </a:ext>
+          </a:extLst>
+        </p:spPr>
+        <p:txBody>
+          <a:bodyPr/>
+          <a:lstStyle>
+            <a:lvl1pPr>
+              <a:defRPr sz="1000">
+                <a:solidFill>
+                  <a:srgbClr val="5B6B78"/>
+                </a:solidFill>
+                <a:latin typeface="Calibri"/>
+                <a:ea typeface="Calibri"/>
+                <a:cs typeface="Calibri"/>
+              </a:defRPr>
+            </a:lvl1pPr>
+          </a:lstStyle>
+          <a:p>
+            <a:pPr algn="r"/>
+            <a:fld id="{F7021451-1387-4CA6-816F-3879F97B5CBC}" type="slidenum">
+              <a:rPr b="0" lang="en-US"/>
+              <a:t>23</a:t>
+            </a:fld>
+            <a:endParaRPr lang="en-US"/>
+          </a:p>
+        </p:txBody>
+      </p:sp>
+    </p:spTree>
+  </p:cSld>
+  <p:clrMapOvr>
+    <a:masterClrMapping/>
+  </p:clrMapOvr>
+</p:sld>
+</file>
+
+<file path=ppt/slides/slide24.xml><?xml version="1.0" encoding="utf-8"?>
+<p:sld xmlns:a="http://schemas.openxmlformats.org/drawingml/2006/main" xmlns:r="http://schemas.openxmlformats.org/officeDocument/2006/relationships" xmlns:p="http://schemas.openxmlformats.org/presentationml/2006/main">
+  <p:cSld name="Slide 24">
+    <p:spTree>
+      <p:nvGrpSpPr>
+        <p:cNvPr id="1" name=""/>
+        <p:cNvGrpSpPr/>
+        <p:nvPr/>
+      </p:nvGrpSpPr>
+      <p:grpSpPr>
+        <a:xfrm>
+          <a:off x="0" y="0"/>
+          <a:ext cx="0" cy="0"/>
+          <a:chOff x="0" y="0"/>
+          <a:chExt cx="0" cy="0"/>
+        </a:xfrm>
+      </p:grpSpPr>
+      <p:sp>
+        <p:nvSpPr>
+          <p:cNvPr id="2" name="Text 1"/>
+          <p:cNvSpPr/>
+          <p:nvPr>
+            <p:ph idx="101" type="title" hasCustomPrompt="1"/>
+          </p:nvPr>
+        </p:nvSpPr>
+        <p:spPr>
+          <a:xfrm>
+            <a:off x="548640" y="384048"/>
+            <a:ext cx="11094415" cy="868680"/>
+          </a:xfrm>
+          <a:prstGeom prst="rect">
+            <a:avLst/>
+          </a:prstGeom>
+          <a:noFill/>
+          <a:ln/>
+        </p:spPr>
+        <p:txBody>
+          <a:bodyPr wrap="square" lIns="0" tIns="0" rIns="0" bIns="0" rtlCol="0" anchor="ctr"/>
+          <a:lstStyle/>
+          <a:p>
+            <a:pPr algn="l" indent="0" marL="0">
+              <a:buNone/>
+            </a:pPr>
+            <a:r>
+              <a:rPr lang="en-US" sz="3000" b="1" dirty="0">
+                <a:solidFill>
+                  <a:srgbClr val="2E4A62"/>
+                </a:solidFill>
+                <a:latin typeface="Cambria" pitchFamily="34" charset="0"/>
+                <a:ea typeface="Cambria" pitchFamily="34" charset="-122"/>
+                <a:cs typeface="Cambria" pitchFamily="34" charset="-120"/>
+              </a:rPr>
+              <a:t>A token is your account</a:t>
+            </a:r>
+            <a:endParaRPr lang="en-US" sz="3000" dirty="0"/>
+          </a:p>
+        </p:txBody>
+      </p:sp>
+      <p:sp>
+        <p:nvSpPr>
+          <p:cNvPr id="3" name="Text 1"/>
+          <p:cNvSpPr txBox="1"/>
+          <p:nvPr/>
+        </p:nvSpPr>
+        <p:spPr>
+          <a:xfrm>
+            <a:off x="548640" y="1481328"/>
+            <a:ext cx="457200" cy="457200"/>
+          </a:xfrm>
+          <a:prstGeom prst="roundRect">
+            <a:avLst>
+              <a:gd name="adj" fmla="val 16000"/>
+            </a:avLst>
+          </a:prstGeom>
+          <a:solidFill>
+            <a:srgbClr val="0E7C86"/>
+          </a:solidFill>
+          <a:ln>
+            <a:solidFill>
+              <a:srgbClr val="0E7C86"/>
+            </a:solidFill>
+          </a:ln>
+        </p:spPr>
+        <p:txBody>
+          <a:bodyPr wrap="square" lIns="0" tIns="0" rIns="0" bIns="0" rtlCol="0" anchor="ctr"/>
+          <a:lstStyle/>
+          <a:p>
+            <a:pPr algn="ctr" indent="0" marL="0">
+              <a:buNone/>
+            </a:pPr>
+            <a:r>
+              <a:rPr lang="en-US" sz="1700" b="1" dirty="0">
+                <a:solidFill>
+                  <a:srgbClr val="FFFFFF"/>
+                </a:solidFill>
+                <a:latin typeface="Calibri" pitchFamily="34" charset="0"/>
+                <a:ea typeface="Calibri" pitchFamily="34" charset="-122"/>
+                <a:cs typeface="Calibri" pitchFamily="34" charset="-120"/>
+              </a:rPr>
+              <a:t>1</a:t>
+            </a:r>
+            <a:endParaRPr lang="en-US" sz="1700" dirty="0"/>
+          </a:p>
+        </p:txBody>
+      </p:sp>
+      <p:sp>
+        <p:nvSpPr>
+          <p:cNvPr id="4" name="Text 2"/>
+          <p:cNvSpPr txBox="1"/>
+          <p:nvPr/>
+        </p:nvSpPr>
+        <p:spPr>
+          <a:xfrm>
+            <a:off x="1280160" y="1463040"/>
+            <a:ext cx="10362895" cy="493776"/>
+          </a:xfrm>
+          <a:prstGeom prst="rect">
+            <a:avLst/>
+          </a:prstGeom>
+          <a:noFill/>
+          <a:ln/>
+        </p:spPr>
+        <p:txBody>
+          <a:bodyPr wrap="square" lIns="0" tIns="0" rIns="0" bIns="0" rtlCol="0" anchor="ctr"/>
+          <a:lstStyle/>
+          <a:p>
+            <a:pPr indent="0" marL="0">
+              <a:buNone/>
+            </a:pPr>
+            <a:r>
+              <a:rPr lang="en-US" sz="2400" dirty="0">
+                <a:solidFill>
+                  <a:srgbClr val="1B2530"/>
+                </a:solidFill>
+                <a:latin typeface="Calibri" pitchFamily="34" charset="0"/>
+                <a:ea typeface="Calibri" pitchFamily="34" charset="-122"/>
+                <a:cs typeface="Calibri" pitchFamily="34" charset="-120"/>
+              </a:rPr>
+              <a:t>Anything a script can do, the token can do</a:t>
+            </a:r>
+            <a:endParaRPr lang="en-US" sz="2400" dirty="0"/>
+          </a:p>
+        </p:txBody>
+      </p:sp>
+      <p:sp>
+        <p:nvSpPr>
+          <p:cNvPr id="5" name="Text 3"/>
+          <p:cNvSpPr txBox="1"/>
+          <p:nvPr/>
+        </p:nvSpPr>
+        <p:spPr>
+          <a:xfrm>
+            <a:off x="548640" y="2711196"/>
+            <a:ext cx="457200" cy="457200"/>
+          </a:xfrm>
+          <a:prstGeom prst="roundRect">
+            <a:avLst>
+              <a:gd name="adj" fmla="val 16000"/>
+            </a:avLst>
+          </a:prstGeom>
+          <a:solidFill>
+            <a:srgbClr val="0E7C86"/>
+          </a:solidFill>
+          <a:ln>
+            <a:solidFill>
+              <a:srgbClr val="0E7C86"/>
+            </a:solidFill>
+          </a:ln>
+        </p:spPr>
+        <p:txBody>
+          <a:bodyPr wrap="square" lIns="0" tIns="0" rIns="0" bIns="0" rtlCol="0" anchor="ctr"/>
+          <a:lstStyle/>
+          <a:p>
+            <a:pPr algn="ctr" indent="0" marL="0">
+              <a:buNone/>
+            </a:pPr>
+            <a:r>
+              <a:rPr lang="en-US" sz="1700" b="1" dirty="0">
+                <a:solidFill>
+                  <a:srgbClr val="FFFFFF"/>
+                </a:solidFill>
+                <a:latin typeface="Calibri" pitchFamily="34" charset="0"/>
+                <a:ea typeface="Calibri" pitchFamily="34" charset="-122"/>
+                <a:cs typeface="Calibri" pitchFamily="34" charset="-120"/>
+              </a:rPr>
+              <a:t>2</a:t>
+            </a:r>
+            <a:endParaRPr lang="en-US" sz="1700" dirty="0"/>
+          </a:p>
+        </p:txBody>
+      </p:sp>
+      <p:sp>
+        <p:nvSpPr>
+          <p:cNvPr id="6" name="Text 4"/>
+          <p:cNvSpPr txBox="1"/>
+          <p:nvPr/>
+        </p:nvSpPr>
+        <p:spPr>
+          <a:xfrm>
+            <a:off x="1280160" y="2692908"/>
+            <a:ext cx="10362895" cy="493776"/>
+          </a:xfrm>
+          <a:prstGeom prst="rect">
+            <a:avLst/>
+          </a:prstGeom>
+          <a:noFill/>
+          <a:ln/>
+        </p:spPr>
+        <p:txBody>
+          <a:bodyPr wrap="square" lIns="0" tIns="0" rIns="0" bIns="0" rtlCol="0" anchor="ctr"/>
+          <a:lstStyle/>
+          <a:p>
+            <a:pPr indent="0" marL="0">
+              <a:buNone/>
+            </a:pPr>
+            <a:r>
+              <a:rPr lang="en-US" sz="2400" dirty="0">
+                <a:solidFill>
+                  <a:srgbClr val="1B2530"/>
+                </a:solidFill>
+                <a:latin typeface="Calibri" pitchFamily="34" charset="0"/>
+                <a:ea typeface="Calibri" pitchFamily="34" charset="-122"/>
+                <a:cs typeface="Calibri" pitchFamily="34" charset="-120"/>
+              </a:rPr>
+              <a:t>Keep it in an environment variable, never in source or in Git</a:t>
+            </a:r>
+            <a:endParaRPr lang="en-US" sz="2400" dirty="0"/>
+          </a:p>
+        </p:txBody>
+      </p:sp>
+      <p:sp>
+        <p:nvSpPr>
+          <p:cNvPr id="7" name="Text 5"/>
+          <p:cNvSpPr txBox="1"/>
+          <p:nvPr/>
+        </p:nvSpPr>
+        <p:spPr>
+          <a:xfrm>
+            <a:off x="548640" y="3941064"/>
+            <a:ext cx="457200" cy="457200"/>
+          </a:xfrm>
+          <a:prstGeom prst="roundRect">
+            <a:avLst>
+              <a:gd name="adj" fmla="val 16000"/>
+            </a:avLst>
+          </a:prstGeom>
+          <a:solidFill>
+            <a:srgbClr val="0E7C86"/>
+          </a:solidFill>
+          <a:ln>
+            <a:solidFill>
+              <a:srgbClr val="0E7C86"/>
+            </a:solidFill>
+          </a:ln>
+        </p:spPr>
+        <p:txBody>
+          <a:bodyPr wrap="square" lIns="0" tIns="0" rIns="0" bIns="0" rtlCol="0" anchor="ctr"/>
+          <a:lstStyle/>
+          <a:p>
+            <a:pPr algn="ctr" indent="0" marL="0">
+              <a:buNone/>
+            </a:pPr>
+            <a:r>
+              <a:rPr lang="en-US" sz="1700" b="1" dirty="0">
+                <a:solidFill>
+                  <a:srgbClr val="FFFFFF"/>
+                </a:solidFill>
+                <a:latin typeface="Calibri" pitchFamily="34" charset="0"/>
+                <a:ea typeface="Calibri" pitchFamily="34" charset="-122"/>
+                <a:cs typeface="Calibri" pitchFamily="34" charset="-120"/>
+              </a:rPr>
+              <a:t>3</a:t>
+            </a:r>
+            <a:endParaRPr lang="en-US" sz="1700" dirty="0"/>
+          </a:p>
+        </p:txBody>
+      </p:sp>
+      <p:sp>
+        <p:nvSpPr>
+          <p:cNvPr id="8" name="Text 6"/>
+          <p:cNvSpPr txBox="1"/>
+          <p:nvPr/>
+        </p:nvSpPr>
+        <p:spPr>
+          <a:xfrm>
+            <a:off x="1280160" y="3922776"/>
+            <a:ext cx="10362895" cy="493776"/>
+          </a:xfrm>
+          <a:prstGeom prst="rect">
+            <a:avLst/>
+          </a:prstGeom>
+          <a:noFill/>
+          <a:ln/>
+        </p:spPr>
+        <p:txBody>
+          <a:bodyPr wrap="square" lIns="0" tIns="0" rIns="0" bIns="0" rtlCol="0" anchor="ctr"/>
+          <a:lstStyle/>
+          <a:p>
+            <a:pPr indent="0" marL="0">
+              <a:buNone/>
+            </a:pPr>
+            <a:r>
+              <a:rPr lang="en-US" sz="2400" dirty="0">
+                <a:solidFill>
+                  <a:srgbClr val="1B2530"/>
+                </a:solidFill>
+                <a:latin typeface="Calibri" pitchFamily="34" charset="0"/>
+                <a:ea typeface="Calibri" pitchFamily="34" charset="-122"/>
+                <a:cs typeface="Calibri" pitchFamily="34" charset="-120"/>
+              </a:rPr>
+              <a:t>Label tokens by where they live: 'lab laptop'</a:t>
+            </a:r>
+            <a:endParaRPr lang="en-US" sz="2400" dirty="0"/>
+          </a:p>
+        </p:txBody>
+      </p:sp>
+      <p:sp>
+        <p:nvSpPr>
+          <p:cNvPr id="9" name="Text 7"/>
+          <p:cNvSpPr txBox="1"/>
+          <p:nvPr/>
+        </p:nvSpPr>
+        <p:spPr>
+          <a:xfrm>
+            <a:off x="548640" y="5170932"/>
+            <a:ext cx="457200" cy="457200"/>
+          </a:xfrm>
+          <a:prstGeom prst="roundRect">
+            <a:avLst>
+              <a:gd name="adj" fmla="val 16000"/>
+            </a:avLst>
+          </a:prstGeom>
+          <a:solidFill>
+            <a:srgbClr val="0E7C86"/>
+          </a:solidFill>
+          <a:ln>
+            <a:solidFill>
+              <a:srgbClr val="0E7C86"/>
+            </a:solidFill>
+          </a:ln>
+        </p:spPr>
+        <p:txBody>
+          <a:bodyPr wrap="square" lIns="0" tIns="0" rIns="0" bIns="0" rtlCol="0" anchor="ctr"/>
+          <a:lstStyle/>
+          <a:p>
+            <a:pPr algn="ctr" indent="0" marL="0">
+              <a:buNone/>
+            </a:pPr>
+            <a:r>
+              <a:rPr lang="en-US" sz="1700" b="1" dirty="0">
+                <a:solidFill>
+                  <a:srgbClr val="FFFFFF"/>
+                </a:solidFill>
+                <a:latin typeface="Calibri" pitchFamily="34" charset="0"/>
+                <a:ea typeface="Calibri" pitchFamily="34" charset="-122"/>
+                <a:cs typeface="Calibri" pitchFamily="34" charset="-120"/>
+              </a:rPr>
+              <a:t>4</a:t>
+            </a:r>
+            <a:endParaRPr lang="en-US" sz="1700" dirty="0"/>
+          </a:p>
+        </p:txBody>
+      </p:sp>
+      <p:sp>
+        <p:nvSpPr>
+          <p:cNvPr id="10" name="Text 8"/>
+          <p:cNvSpPr txBox="1"/>
+          <p:nvPr/>
+        </p:nvSpPr>
+        <p:spPr>
+          <a:xfrm>
+            <a:off x="1280160" y="5152644"/>
+            <a:ext cx="10362895" cy="493776"/>
+          </a:xfrm>
+          <a:prstGeom prst="rect">
+            <a:avLst/>
+          </a:prstGeom>
+          <a:noFill/>
+          <a:ln/>
+        </p:spPr>
+        <p:txBody>
+          <a:bodyPr wrap="square" lIns="0" tIns="0" rIns="0" bIns="0" rtlCol="0" anchor="ctr"/>
+          <a:lstStyle/>
+          <a:p>
+            <a:pPr indent="0" marL="0">
+              <a:buNone/>
+            </a:pPr>
+            <a:r>
+              <a:rPr lang="en-US" sz="2400" dirty="0">
+                <a:solidFill>
+                  <a:srgbClr val="1B2530"/>
+                </a:solidFill>
+                <a:latin typeface="Calibri" pitchFamily="34" charset="0"/>
+                <a:ea typeface="Calibri" pitchFamily="34" charset="-122"/>
+                <a:cs typeface="Calibri" pitchFamily="34" charset="-120"/>
+              </a:rPr>
+              <a:t>Revoke a leaked token at once on the Tokens page</a:t>
+            </a:r>
+            <a:endParaRPr lang="en-US" sz="2400" dirty="0"/>
+          </a:p>
+        </p:txBody>
+      </p:sp>
+      <p:sp>
+        <p:nvSpPr>
+          <p:cNvPr id="25" name="Slide Number Placeholder 0"/>
+          <p:cNvSpPr>
+            <a:spLocks noGrp="1"/>
+          </p:cNvSpPr>
+          <p:nvPr>
+            <p:ph type="sldNum" sz="quarter" idx="4294967295"/>
+          </p:nvPr>
+        </p:nvSpPr>
+        <p:spPr>
+          <a:xfrm>
+            <a:off x="11002975" y="6419088"/>
+            <a:ext cx="640080" cy="274320"/>
+          </a:xfrm>
+          <a:prstGeom prst="rect">
+            <a:avLst/>
+          </a:prstGeom>
+          <a:extLst>
+            <a:ext uri="{C572A759-6A51-4108-AA02-DFA0A04FC94B}">
+              <ma14:wrappingTextBoxFlag xmlns:ma14="http://schemas.microsoft.com/office/mac/drawingml/2011/main" val="0"/>
+            </a:ext>
+          </a:extLst>
+        </p:spPr>
+        <p:txBody>
+          <a:bodyPr/>
+          <a:lstStyle>
+            <a:lvl1pPr>
+              <a:defRPr sz="1000">
+                <a:solidFill>
+                  <a:srgbClr val="5B6B78"/>
+                </a:solidFill>
+                <a:latin typeface="Calibri"/>
+                <a:ea typeface="Calibri"/>
+                <a:cs typeface="Calibri"/>
+              </a:defRPr>
+            </a:lvl1pPr>
+          </a:lstStyle>
+          <a:p>
+            <a:pPr algn="r"/>
+            <a:fld id="{F7021451-1387-4CA6-816F-3879F97B5CBC}" type="slidenum">
+              <a:rPr b="0" lang="en-US"/>
+              <a:t>24</a:t>
+            </a:fld>
+            <a:endParaRPr lang="en-US"/>
+          </a:p>
+        </p:txBody>
+      </p:sp>
+    </p:spTree>
+  </p:cSld>
+  <p:clrMapOvr>
+    <a:masterClrMapping/>
+  </p:clrMapOvr>
+</p:sld>
+</file>
+
+<file path=ppt/slides/slide25.xml><?xml version="1.0" encoding="utf-8"?>
+<p:sld xmlns:a="http://schemas.openxmlformats.org/drawingml/2006/main" xmlns:r="http://schemas.openxmlformats.org/officeDocument/2006/relationships" xmlns:p="http://schemas.openxmlformats.org/presentationml/2006/main">
+  <p:cSld name="Slide 25">
+    <p:spTree>
+      <p:nvGrpSpPr>
+        <p:cNvPr id="1" name=""/>
+        <p:cNvGrpSpPr/>
+        <p:nvPr/>
+      </p:nvGrpSpPr>
+      <p:grpSpPr>
+        <a:xfrm>
+          <a:off x="0" y="0"/>
+          <a:ext cx="0" cy="0"/>
+          <a:chOff x="0" y="0"/>
+          <a:chExt cx="0" cy="0"/>
+        </a:xfrm>
+      </p:grpSpPr>
+      <p:sp>
+        <p:nvSpPr>
+          <p:cNvPr id="2" name="Text 1"/>
+          <p:cNvSpPr/>
+          <p:nvPr>
+            <p:ph idx="101" type="title" hasCustomPrompt="1"/>
+          </p:nvPr>
+        </p:nvSpPr>
+        <p:spPr>
+          <a:xfrm>
+            <a:off x="548640" y="384048"/>
+            <a:ext cx="11094415" cy="868680"/>
+          </a:xfrm>
+          <a:prstGeom prst="rect">
+            <a:avLst/>
+          </a:prstGeom>
+          <a:noFill/>
+          <a:ln/>
+        </p:spPr>
+        <p:txBody>
+          <a:bodyPr wrap="square" lIns="0" tIns="0" rIns="0" bIns="0" rtlCol="0" anchor="ctr"/>
+          <a:lstStyle/>
+          <a:p>
+            <a:pPr algn="l" indent="0" marL="0">
+              <a:buNone/>
+            </a:pPr>
+            <a:r>
+              <a:rPr lang="en-US" sz="3000" b="1" dirty="0">
+                <a:solidFill>
+                  <a:srgbClr val="2E4A62"/>
+                </a:solidFill>
+                <a:latin typeface="Cambria" pitchFamily="34" charset="0"/>
+                <a:ea typeface="Cambria" pitchFamily="34" charset="-122"/>
+                <a:cs typeface="Cambria" pitchFamily="34" charset="-120"/>
+              </a:rPr>
               <a:t>Before you submit</a:t>
             </a:r>
             <a:endParaRPr lang="en-US" sz="3000" dirty="0"/>
@@ -12961,7 +15134,7 @@
       </p:sp>
       <p:graphicFrame>
         <p:nvGraphicFramePr>
-          <p:cNvPr id="24" name="Table 0"/>
+          <p:cNvPr id="26" name="Table 0"/>
           <p:cNvGraphicFramePr>
             <a:graphicFrameLocks noGrp="1"/>
           </p:cNvGraphicFramePr>
@@ -13997,740 +16170,6 @@
             <a:pPr algn="r"/>
             <a:fld id="{F7021451-1387-4CA6-816F-3879F97B5CBC}" type="slidenum">
               <a:rPr b="0" lang="en-US"/>
-              <a:t>23</a:t>
-            </a:fld>
-            <a:endParaRPr lang="en-US"/>
-          </a:p>
-        </p:txBody>
-      </p:sp>
-    </p:spTree>
-  </p:cSld>
-  <p:clrMapOvr>
-    <a:masterClrMapping/>
-  </p:clrMapOvr>
-</p:sld>
-</file>
-
-<file path=ppt/slides/slide24.xml><?xml version="1.0" encoding="utf-8"?>
-<p:sld xmlns:a="http://schemas.openxmlformats.org/drawingml/2006/main" xmlns:r="http://schemas.openxmlformats.org/officeDocument/2006/relationships" xmlns:p="http://schemas.openxmlformats.org/presentationml/2006/main">
-  <p:cSld name="Slide 24">
-    <p:spTree>
-      <p:nvGrpSpPr>
-        <p:cNvPr id="1" name=""/>
-        <p:cNvGrpSpPr/>
-        <p:nvPr/>
-      </p:nvGrpSpPr>
-      <p:grpSpPr>
-        <a:xfrm>
-          <a:off x="0" y="0"/>
-          <a:ext cx="0" cy="0"/>
-          <a:chOff x="0" y="0"/>
-          <a:chExt cx="0" cy="0"/>
-        </a:xfrm>
-      </p:grpSpPr>
-      <p:sp>
-        <p:nvSpPr>
-          <p:cNvPr id="2" name="Text 0"/>
-          <p:cNvSpPr txBox="1"/>
-          <p:nvPr/>
-        </p:nvSpPr>
-        <p:spPr>
-          <a:xfrm>
-            <a:off x="548640" y="1371600"/>
-            <a:ext cx="2743200" cy="1188720"/>
-          </a:xfrm>
-          <a:prstGeom prst="rect">
-            <a:avLst/>
-          </a:prstGeom>
-          <a:noFill/>
-          <a:ln/>
-        </p:spPr>
-        <p:txBody>
-          <a:bodyPr wrap="square" lIns="0" tIns="0" rIns="0" bIns="0" rtlCol="0" anchor="t"/>
-          <a:lstStyle/>
-          <a:p>
-            <a:pPr indent="0" marL="0">
-              <a:buNone/>
-            </a:pPr>
-            <a:r>
-              <a:rPr lang="en-US" sz="8000" b="1" dirty="0">
-                <a:solidFill>
-                  <a:srgbClr val="5CC7D1"/>
-                </a:solidFill>
-                <a:latin typeface="Cambria" pitchFamily="34" charset="0"/>
-                <a:ea typeface="Cambria" pitchFamily="34" charset="-122"/>
-                <a:cs typeface="Cambria" pitchFamily="34" charset="-120"/>
-              </a:rPr>
-              <a:t>04</a:t>
-            </a:r>
-            <a:endParaRPr lang="en-US" sz="8000" dirty="0"/>
-          </a:p>
-        </p:txBody>
-      </p:sp>
-      <p:sp>
-        <p:nvSpPr>
-          <p:cNvPr id="3" name="Text 1"/>
-          <p:cNvSpPr txBox="1"/>
-          <p:nvPr/>
-        </p:nvSpPr>
-        <p:spPr>
-          <a:xfrm>
-            <a:off x="548640" y="2834640"/>
-            <a:ext cx="11094415" cy="1371600"/>
-          </a:xfrm>
-          <a:prstGeom prst="rect">
-            <a:avLst/>
-          </a:prstGeom>
-          <a:noFill/>
-          <a:ln/>
-        </p:spPr>
-        <p:txBody>
-          <a:bodyPr wrap="square" lIns="0" tIns="0" rIns="0" bIns="0" rtlCol="0" anchor="ctr"/>
-          <a:lstStyle/>
-          <a:p>
-            <a:pPr indent="0" marL="0">
-              <a:buNone/>
-            </a:pPr>
-            <a:r>
-              <a:rPr lang="en-US" sz="4200" b="1" dirty="0">
-                <a:solidFill>
-                  <a:srgbClr val="FFFFFF"/>
-                </a:solidFill>
-                <a:latin typeface="Cambria" pitchFamily="34" charset="0"/>
-                <a:ea typeface="Cambria" pitchFamily="34" charset="-122"/>
-                <a:cs typeface="Cambria" pitchFamily="34" charset="-120"/>
-              </a:rPr>
-              <a:t>The editor</a:t>
-            </a:r>
-            <a:endParaRPr lang="en-US" sz="4200" dirty="0"/>
-          </a:p>
-        </p:txBody>
-      </p:sp>
-      <p:sp>
-        <p:nvSpPr>
-          <p:cNvPr id="4" name="Text 2"/>
-          <p:cNvSpPr txBox="1"/>
-          <p:nvPr/>
-        </p:nvSpPr>
-        <p:spPr>
-          <a:xfrm>
-            <a:off x="548640" y="4389120"/>
-            <a:ext cx="11094415" cy="1097280"/>
-          </a:xfrm>
-          <a:prstGeom prst="rect">
-            <a:avLst/>
-          </a:prstGeom>
-          <a:noFill/>
-          <a:ln/>
-        </p:spPr>
-        <p:txBody>
-          <a:bodyPr wrap="square" lIns="0" tIns="0" rIns="0" bIns="0" rtlCol="0" anchor="t"/>
-          <a:lstStyle/>
-          <a:p>
-            <a:pPr indent="0" marL="0">
-              <a:buNone/>
-            </a:pPr>
-            <a:r>
-              <a:rPr lang="en-US" sz="2200" dirty="0">
-                <a:solidFill>
-                  <a:srgbClr val="CFE3EA"/>
-                </a:solidFill>
-                <a:latin typeface="Calibri" pitchFamily="34" charset="0"/>
-                <a:ea typeface="Calibri" pitchFamily="34" charset="-122"/>
-                <a:cs typeface="Calibri" pitchFamily="34" charset="-120"/>
-              </a:rPr>
-              <a:t>Reviewing submissions</a:t>
-            </a:r>
-            <a:endParaRPr lang="en-US" sz="2200" dirty="0"/>
-          </a:p>
-        </p:txBody>
-      </p:sp>
-      <p:sp>
-        <p:nvSpPr>
-          <p:cNvPr id="25" name="Slide Number Placeholder 0"/>
-          <p:cNvSpPr>
-            <a:spLocks noGrp="1"/>
-          </p:cNvSpPr>
-          <p:nvPr>
-            <p:ph type="sldNum" sz="quarter" idx="4294967295"/>
-          </p:nvPr>
-        </p:nvSpPr>
-        <p:spPr>
-          <a:xfrm>
-            <a:off x="11002975" y="6419088"/>
-            <a:ext cx="640080" cy="274320"/>
-          </a:xfrm>
-          <a:prstGeom prst="rect">
-            <a:avLst/>
-          </a:prstGeom>
-          <a:extLst>
-            <a:ext uri="{C572A759-6A51-4108-AA02-DFA0A04FC94B}">
-              <ma14:wrappingTextBoxFlag xmlns:ma14="http://schemas.microsoft.com/office/mac/drawingml/2011/main" val="0"/>
-            </a:ext>
-          </a:extLst>
-        </p:spPr>
-        <p:txBody>
-          <a:bodyPr/>
-          <a:lstStyle>
-            <a:lvl1pPr>
-              <a:defRPr sz="1000">
-                <a:solidFill>
-                  <a:srgbClr val="CFE3EA"/>
-                </a:solidFill>
-                <a:latin typeface="Calibri"/>
-                <a:ea typeface="Calibri"/>
-                <a:cs typeface="Calibri"/>
-              </a:defRPr>
-            </a:lvl1pPr>
-          </a:lstStyle>
-          <a:p>
-            <a:pPr algn="r"/>
-            <a:fld id="{F7021451-1387-4CA6-816F-3879F97B5CBC}" type="slidenum">
-              <a:rPr b="0" lang="en-US"/>
-              <a:t>24</a:t>
-            </a:fld>
-            <a:endParaRPr lang="en-US"/>
-          </a:p>
-        </p:txBody>
-      </p:sp>
-    </p:spTree>
-  </p:cSld>
-  <p:clrMapOvr>
-    <a:masterClrMapping/>
-  </p:clrMapOvr>
-</p:sld>
-</file>
-
-<file path=ppt/slides/slide25.xml><?xml version="1.0" encoding="utf-8"?>
-<p:sld xmlns:a="http://schemas.openxmlformats.org/drawingml/2006/main" xmlns:r="http://schemas.openxmlformats.org/officeDocument/2006/relationships" xmlns:p="http://schemas.openxmlformats.org/presentationml/2006/main">
-  <p:cSld name="Slide 25">
-    <p:spTree>
-      <p:nvGrpSpPr>
-        <p:cNvPr id="1" name=""/>
-        <p:cNvGrpSpPr/>
-        <p:nvPr/>
-      </p:nvGrpSpPr>
-      <p:grpSpPr>
-        <a:xfrm>
-          <a:off x="0" y="0"/>
-          <a:ext cx="0" cy="0"/>
-          <a:chOff x="0" y="0"/>
-          <a:chExt cx="0" cy="0"/>
-        </a:xfrm>
-      </p:grpSpPr>
-      <p:sp>
-        <p:nvSpPr>
-          <p:cNvPr id="2" name="Text 1"/>
-          <p:cNvSpPr/>
-          <p:nvPr>
-            <p:ph idx="101" type="title" hasCustomPrompt="1"/>
-          </p:nvPr>
-        </p:nvSpPr>
-        <p:spPr>
-          <a:xfrm>
-            <a:off x="548640" y="384048"/>
-            <a:ext cx="11094415" cy="868680"/>
-          </a:xfrm>
-          <a:prstGeom prst="rect">
-            <a:avLst/>
-          </a:prstGeom>
-          <a:noFill/>
-          <a:ln/>
-        </p:spPr>
-        <p:txBody>
-          <a:bodyPr wrap="square" lIns="0" tIns="0" rIns="0" bIns="0" rtlCol="0" anchor="ctr"/>
-          <a:lstStyle/>
-          <a:p>
-            <a:pPr algn="l" indent="0" marL="0">
-              <a:buNone/>
-            </a:pPr>
-            <a:r>
-              <a:rPr lang="en-US" sz="3000" b="1" dirty="0">
-                <a:solidFill>
-                  <a:srgbClr val="2E4A62"/>
-                </a:solidFill>
-                <a:latin typeface="Cambria" pitchFamily="34" charset="0"/>
-                <a:ea typeface="Cambria" pitchFamily="34" charset="-122"/>
-                <a:cs typeface="Cambria" pitchFamily="34" charset="-120"/>
-              </a:rPr>
-              <a:t>What an editor sees and may do</a:t>
-            </a:r>
-            <a:endParaRPr lang="en-US" sz="3000" dirty="0"/>
-          </a:p>
-        </p:txBody>
-      </p:sp>
-      <p:sp>
-        <p:nvSpPr>
-          <p:cNvPr id="3" name="Text 1"/>
-          <p:cNvSpPr txBox="1"/>
-          <p:nvPr/>
-        </p:nvSpPr>
-        <p:spPr>
-          <a:xfrm>
-            <a:off x="548640" y="1481328"/>
-            <a:ext cx="457200" cy="457200"/>
-          </a:xfrm>
-          <a:prstGeom prst="roundRect">
-            <a:avLst>
-              <a:gd name="adj" fmla="val 16000"/>
-            </a:avLst>
-          </a:prstGeom>
-          <a:solidFill>
-            <a:srgbClr val="0E7C86"/>
-          </a:solidFill>
-          <a:ln>
-            <a:solidFill>
-              <a:srgbClr val="0E7C86"/>
-            </a:solidFill>
-          </a:ln>
-        </p:spPr>
-        <p:txBody>
-          <a:bodyPr wrap="square" lIns="0" tIns="0" rIns="0" bIns="0" rtlCol="0" anchor="ctr"/>
-          <a:lstStyle/>
-          <a:p>
-            <a:pPr algn="ctr" indent="0" marL="0">
-              <a:buNone/>
-            </a:pPr>
-            <a:r>
-              <a:rPr lang="en-US" sz="1700" b="1" dirty="0">
-                <a:solidFill>
-                  <a:srgbClr val="FFFFFF"/>
-                </a:solidFill>
-                <a:latin typeface="Calibri" pitchFamily="34" charset="0"/>
-                <a:ea typeface="Calibri" pitchFamily="34" charset="-122"/>
-                <a:cs typeface="Calibri" pitchFamily="34" charset="-120"/>
-              </a:rPr>
-              <a:t>1</a:t>
-            </a:r>
-            <a:endParaRPr lang="en-US" sz="1700" dirty="0"/>
-          </a:p>
-        </p:txBody>
-      </p:sp>
-      <p:sp>
-        <p:nvSpPr>
-          <p:cNvPr id="4" name="Text 2"/>
-          <p:cNvSpPr txBox="1"/>
-          <p:nvPr/>
-        </p:nvSpPr>
-        <p:spPr>
-          <a:xfrm>
-            <a:off x="1280160" y="1463040"/>
-            <a:ext cx="10362895" cy="493776"/>
-          </a:xfrm>
-          <a:prstGeom prst="rect">
-            <a:avLst/>
-          </a:prstGeom>
-          <a:noFill/>
-          <a:ln/>
-        </p:spPr>
-        <p:txBody>
-          <a:bodyPr wrap="square" lIns="0" tIns="0" rIns="0" bIns="0" rtlCol="0" anchor="ctr"/>
-          <a:lstStyle/>
-          <a:p>
-            <a:pPr indent="0" marL="0">
-              <a:buNone/>
-            </a:pPr>
-            <a:r>
-              <a:rPr lang="en-US" sz="2200" dirty="0">
-                <a:solidFill>
-                  <a:srgbClr val="1B2530"/>
-                </a:solidFill>
-                <a:latin typeface="Calibri" pitchFamily="34" charset="0"/>
-                <a:ea typeface="Calibri" pitchFamily="34" charset="-122"/>
-                <a:cs typeface="Calibri" pitchFamily="34" charset="-120"/>
-              </a:rPr>
-              <a:t>A Review item in the navigation bar: the pending queue</a:t>
-            </a:r>
-            <a:endParaRPr lang="en-US" sz="2200" dirty="0"/>
-          </a:p>
-        </p:txBody>
-      </p:sp>
-      <p:sp>
-        <p:nvSpPr>
-          <p:cNvPr id="5" name="Text 3"/>
-          <p:cNvSpPr txBox="1"/>
-          <p:nvPr/>
-        </p:nvSpPr>
-        <p:spPr>
-          <a:xfrm>
-            <a:off x="548640" y="2465222"/>
-            <a:ext cx="457200" cy="457200"/>
-          </a:xfrm>
-          <a:prstGeom prst="roundRect">
-            <a:avLst>
-              <a:gd name="adj" fmla="val 16000"/>
-            </a:avLst>
-          </a:prstGeom>
-          <a:solidFill>
-            <a:srgbClr val="0E7C86"/>
-          </a:solidFill>
-          <a:ln>
-            <a:solidFill>
-              <a:srgbClr val="0E7C86"/>
-            </a:solidFill>
-          </a:ln>
-        </p:spPr>
-        <p:txBody>
-          <a:bodyPr wrap="square" lIns="0" tIns="0" rIns="0" bIns="0" rtlCol="0" anchor="ctr"/>
-          <a:lstStyle/>
-          <a:p>
-            <a:pPr algn="ctr" indent="0" marL="0">
-              <a:buNone/>
-            </a:pPr>
-            <a:r>
-              <a:rPr lang="en-US" sz="1700" b="1" dirty="0">
-                <a:solidFill>
-                  <a:srgbClr val="FFFFFF"/>
-                </a:solidFill>
-                <a:latin typeface="Calibri" pitchFamily="34" charset="0"/>
-                <a:ea typeface="Calibri" pitchFamily="34" charset="-122"/>
-                <a:cs typeface="Calibri" pitchFamily="34" charset="-120"/>
-              </a:rPr>
-              <a:t>2</a:t>
-            </a:r>
-            <a:endParaRPr lang="en-US" sz="1700" dirty="0"/>
-          </a:p>
-        </p:txBody>
-      </p:sp>
-      <p:sp>
-        <p:nvSpPr>
-          <p:cNvPr id="6" name="Text 4"/>
-          <p:cNvSpPr txBox="1"/>
-          <p:nvPr/>
-        </p:nvSpPr>
-        <p:spPr>
-          <a:xfrm>
-            <a:off x="1280160" y="2446934"/>
-            <a:ext cx="10362895" cy="493776"/>
-          </a:xfrm>
-          <a:prstGeom prst="rect">
-            <a:avLst/>
-          </a:prstGeom>
-          <a:noFill/>
-          <a:ln/>
-        </p:spPr>
-        <p:txBody>
-          <a:bodyPr wrap="square" lIns="0" tIns="0" rIns="0" bIns="0" rtlCol="0" anchor="ctr"/>
-          <a:lstStyle/>
-          <a:p>
-            <a:pPr indent="0" marL="0">
-              <a:buNone/>
-            </a:pPr>
-            <a:r>
-              <a:rPr lang="en-US" sz="2200" dirty="0">
-                <a:solidFill>
-                  <a:srgbClr val="1B2530"/>
-                </a:solidFill>
-                <a:latin typeface="Calibri" pitchFamily="34" charset="0"/>
-                <a:ea typeface="Calibri" pitchFamily="34" charset="-122"/>
-                <a:cs typeface="Calibri" pitchFamily="34" charset="-120"/>
-              </a:rPr>
-              <a:t>For each submission: submitter, id, version, authors, files</a:t>
-            </a:r>
-            <a:endParaRPr lang="en-US" sz="2200" dirty="0"/>
-          </a:p>
-        </p:txBody>
-      </p:sp>
-      <p:sp>
-        <p:nvSpPr>
-          <p:cNvPr id="7" name="Text 5"/>
-          <p:cNvSpPr txBox="1"/>
-          <p:nvPr/>
-        </p:nvSpPr>
-        <p:spPr>
-          <a:xfrm>
-            <a:off x="548640" y="3449117"/>
-            <a:ext cx="457200" cy="457200"/>
-          </a:xfrm>
-          <a:prstGeom prst="roundRect">
-            <a:avLst>
-              <a:gd name="adj" fmla="val 16000"/>
-            </a:avLst>
-          </a:prstGeom>
-          <a:solidFill>
-            <a:srgbClr val="0E7C86"/>
-          </a:solidFill>
-          <a:ln>
-            <a:solidFill>
-              <a:srgbClr val="0E7C86"/>
-            </a:solidFill>
-          </a:ln>
-        </p:spPr>
-        <p:txBody>
-          <a:bodyPr wrap="square" lIns="0" tIns="0" rIns="0" bIns="0" rtlCol="0" anchor="ctr"/>
-          <a:lstStyle/>
-          <a:p>
-            <a:pPr algn="ctr" indent="0" marL="0">
-              <a:buNone/>
-            </a:pPr>
-            <a:r>
-              <a:rPr lang="en-US" sz="1700" b="1" dirty="0">
-                <a:solidFill>
-                  <a:srgbClr val="FFFFFF"/>
-                </a:solidFill>
-                <a:latin typeface="Calibri" pitchFamily="34" charset="0"/>
-                <a:ea typeface="Calibri" pitchFamily="34" charset="-122"/>
-                <a:cs typeface="Calibri" pitchFamily="34" charset="-120"/>
-              </a:rPr>
-              <a:t>3</a:t>
-            </a:r>
-            <a:endParaRPr lang="en-US" sz="1700" dirty="0"/>
-          </a:p>
-        </p:txBody>
-      </p:sp>
-      <p:sp>
-        <p:nvSpPr>
-          <p:cNvPr id="8" name="Text 6"/>
-          <p:cNvSpPr txBox="1"/>
-          <p:nvPr/>
-        </p:nvSpPr>
-        <p:spPr>
-          <a:xfrm>
-            <a:off x="1280160" y="3430829"/>
-            <a:ext cx="10362895" cy="819302"/>
-          </a:xfrm>
-          <a:prstGeom prst="rect">
-            <a:avLst/>
-          </a:prstGeom>
-          <a:noFill/>
-          <a:ln/>
-        </p:spPr>
-        <p:txBody>
-          <a:bodyPr wrap="square" lIns="0" tIns="0" rIns="0" bIns="0" rtlCol="0" anchor="t"/>
-          <a:lstStyle/>
-          <a:p>
-            <a:pPr indent="0" marL="0">
-              <a:buNone/>
-            </a:pPr>
-            <a:r>
-              <a:rPr lang="en-US" sz="2200" dirty="0">
-                <a:solidFill>
-                  <a:srgbClr val="1B2530"/>
-                </a:solidFill>
-                <a:latin typeface="Calibri" pitchFamily="34" charset="0"/>
-                <a:ea typeface="Calibri" pitchFamily="34" charset="-122"/>
-                <a:cs typeface="Calibri" pitchFamily="34" charset="-120"/>
-              </a:rPr>
-              <a:t>Seven editable fields: title, summary, description, tags, licence, homepage, repository</a:t>
-            </a:r>
-            <a:endParaRPr lang="en-US" sz="2200" dirty="0"/>
-          </a:p>
-        </p:txBody>
-      </p:sp>
-      <p:sp>
-        <p:nvSpPr>
-          <p:cNvPr id="9" name="Text 7"/>
-          <p:cNvSpPr txBox="1"/>
-          <p:nvPr/>
-        </p:nvSpPr>
-        <p:spPr>
-          <a:xfrm>
-            <a:off x="548640" y="4433011"/>
-            <a:ext cx="457200" cy="457200"/>
-          </a:xfrm>
-          <a:prstGeom prst="roundRect">
-            <a:avLst>
-              <a:gd name="adj" fmla="val 16000"/>
-            </a:avLst>
-          </a:prstGeom>
-          <a:solidFill>
-            <a:srgbClr val="0E7C86"/>
-          </a:solidFill>
-          <a:ln>
-            <a:solidFill>
-              <a:srgbClr val="0E7C86"/>
-            </a:solidFill>
-          </a:ln>
-        </p:spPr>
-        <p:txBody>
-          <a:bodyPr wrap="square" lIns="0" tIns="0" rIns="0" bIns="0" rtlCol="0" anchor="ctr"/>
-          <a:lstStyle/>
-          <a:p>
-            <a:pPr algn="ctr" indent="0" marL="0">
-              <a:buNone/>
-            </a:pPr>
-            <a:r>
-              <a:rPr lang="en-US" sz="1700" b="1" dirty="0">
-                <a:solidFill>
-                  <a:srgbClr val="FFFFFF"/>
-                </a:solidFill>
-                <a:latin typeface="Calibri" pitchFamily="34" charset="0"/>
-                <a:ea typeface="Calibri" pitchFamily="34" charset="-122"/>
-                <a:cs typeface="Calibri" pitchFamily="34" charset="-120"/>
-              </a:rPr>
-              <a:t>4</a:t>
-            </a:r>
-            <a:endParaRPr lang="en-US" sz="1700" dirty="0"/>
-          </a:p>
-        </p:txBody>
-      </p:sp>
-      <p:sp>
-        <p:nvSpPr>
-          <p:cNvPr id="10" name="Text 8"/>
-          <p:cNvSpPr txBox="1"/>
-          <p:nvPr/>
-        </p:nvSpPr>
-        <p:spPr>
-          <a:xfrm>
-            <a:off x="1280160" y="4414723"/>
-            <a:ext cx="10362895" cy="493776"/>
-          </a:xfrm>
-          <a:prstGeom prst="rect">
-            <a:avLst/>
-          </a:prstGeom>
-          <a:noFill/>
-          <a:ln/>
-        </p:spPr>
-        <p:txBody>
-          <a:bodyPr wrap="square" lIns="0" tIns="0" rIns="0" bIns="0" rtlCol="0" anchor="ctr"/>
-          <a:lstStyle/>
-          <a:p>
-            <a:pPr indent="0" marL="0">
-              <a:buNone/>
-            </a:pPr>
-            <a:r>
-              <a:rPr lang="en-US" sz="2200" dirty="0">
-                <a:solidFill>
-                  <a:srgbClr val="1B2530"/>
-                </a:solidFill>
-                <a:latin typeface="Calibri" pitchFamily="34" charset="0"/>
-                <a:ea typeface="Calibri" pitchFamily="34" charset="-122"/>
-                <a:cs typeface="Calibri" pitchFamily="34" charset="-120"/>
-              </a:rPr>
-              <a:t>Two outcomes: Verify and Publish, or Reject</a:t>
-            </a:r>
-            <a:endParaRPr lang="en-US" sz="2200" dirty="0"/>
-          </a:p>
-        </p:txBody>
-      </p:sp>
-      <p:sp>
-        <p:nvSpPr>
-          <p:cNvPr id="11" name="Text 9"/>
-          <p:cNvSpPr txBox="1"/>
-          <p:nvPr/>
-        </p:nvSpPr>
-        <p:spPr>
-          <a:xfrm>
-            <a:off x="548640" y="5416906"/>
-            <a:ext cx="457200" cy="457200"/>
-          </a:xfrm>
-          <a:prstGeom prst="roundRect">
-            <a:avLst>
-              <a:gd name="adj" fmla="val 16000"/>
-            </a:avLst>
-          </a:prstGeom>
-          <a:solidFill>
-            <a:srgbClr val="0E7C86"/>
-          </a:solidFill>
-          <a:ln>
-            <a:solidFill>
-              <a:srgbClr val="0E7C86"/>
-            </a:solidFill>
-          </a:ln>
-        </p:spPr>
-        <p:txBody>
-          <a:bodyPr wrap="square" lIns="0" tIns="0" rIns="0" bIns="0" rtlCol="0" anchor="ctr"/>
-          <a:lstStyle/>
-          <a:p>
-            <a:pPr algn="ctr" indent="0" marL="0">
-              <a:buNone/>
-            </a:pPr>
-            <a:r>
-              <a:rPr lang="en-US" sz="1700" b="1" dirty="0">
-                <a:solidFill>
-                  <a:srgbClr val="FFFFFF"/>
-                </a:solidFill>
-                <a:latin typeface="Calibri" pitchFamily="34" charset="0"/>
-                <a:ea typeface="Calibri" pitchFamily="34" charset="-122"/>
-                <a:cs typeface="Calibri" pitchFamily="34" charset="-120"/>
-              </a:rPr>
-              <a:t>5</a:t>
-            </a:r>
-            <a:endParaRPr lang="en-US" sz="1700" dirty="0"/>
-          </a:p>
-        </p:txBody>
-      </p:sp>
-      <p:sp>
-        <p:nvSpPr>
-          <p:cNvPr id="12" name="Text 10"/>
-          <p:cNvSpPr txBox="1"/>
-          <p:nvPr/>
-        </p:nvSpPr>
-        <p:spPr>
-          <a:xfrm>
-            <a:off x="1280160" y="5398618"/>
-            <a:ext cx="10362895" cy="493776"/>
-          </a:xfrm>
-          <a:prstGeom prst="rect">
-            <a:avLst/>
-          </a:prstGeom>
-          <a:noFill/>
-          <a:ln/>
-        </p:spPr>
-        <p:txBody>
-          <a:bodyPr wrap="square" lIns="0" tIns="0" rIns="0" bIns="0" rtlCol="0" anchor="ctr"/>
-          <a:lstStyle/>
-          <a:p>
-            <a:pPr indent="0" marL="0">
-              <a:buNone/>
-            </a:pPr>
-            <a:r>
-              <a:rPr lang="en-US" sz="2200" dirty="0">
-                <a:solidFill>
-                  <a:srgbClr val="1B2530"/>
-                </a:solidFill>
-                <a:latin typeface="Calibri" pitchFamily="34" charset="0"/>
-                <a:ea typeface="Calibri" pitchFamily="34" charset="-122"/>
-                <a:cs typeface="Calibri" pitchFamily="34" charset="-120"/>
-              </a:rPr>
-              <a:t>Later: edit or delete published versions</a:t>
-            </a:r>
-            <a:endParaRPr lang="en-US" sz="2200" dirty="0"/>
-          </a:p>
-        </p:txBody>
-      </p:sp>
-      <p:sp>
-        <p:nvSpPr>
-          <p:cNvPr id="25" name="Slide Number Placeholder 0"/>
-          <p:cNvSpPr>
-            <a:spLocks noGrp="1"/>
-          </p:cNvSpPr>
-          <p:nvPr>
-            <p:ph type="sldNum" sz="quarter" idx="4294967295"/>
-          </p:nvPr>
-        </p:nvSpPr>
-        <p:spPr>
-          <a:xfrm>
-            <a:off x="11002975" y="6419088"/>
-            <a:ext cx="640080" cy="274320"/>
-          </a:xfrm>
-          <a:prstGeom prst="rect">
-            <a:avLst/>
-          </a:prstGeom>
-          <a:extLst>
-            <a:ext uri="{C572A759-6A51-4108-AA02-DFA0A04FC94B}">
-              <ma14:wrappingTextBoxFlag xmlns:ma14="http://schemas.microsoft.com/office/mac/drawingml/2011/main" val="0"/>
-            </a:ext>
-          </a:extLst>
-        </p:spPr>
-        <p:txBody>
-          <a:bodyPr/>
-          <a:lstStyle>
-            <a:lvl1pPr>
-              <a:defRPr sz="1000">
-                <a:solidFill>
-                  <a:srgbClr val="5B6B78"/>
-                </a:solidFill>
-                <a:latin typeface="Calibri"/>
-                <a:ea typeface="Calibri"/>
-                <a:cs typeface="Calibri"/>
-              </a:defRPr>
-            </a:lvl1pPr>
-          </a:lstStyle>
-          <a:p>
-            <a:pPr algn="r"/>
-            <a:fld id="{F7021451-1387-4CA6-816F-3879F97B5CBC}" type="slidenum">
-              <a:rPr b="0" lang="en-US"/>
               <a:t>25</a:t>
             </a:fld>
             <a:endParaRPr lang="en-US"/>
@@ -14764,6 +16203,196 @@
       </p:grpSpPr>
       <p:sp>
         <p:nvSpPr>
+          <p:cNvPr id="2" name="Text 0"/>
+          <p:cNvSpPr txBox="1"/>
+          <p:nvPr/>
+        </p:nvSpPr>
+        <p:spPr>
+          <a:xfrm>
+            <a:off x="548640" y="1371600"/>
+            <a:ext cx="2743200" cy="1188720"/>
+          </a:xfrm>
+          <a:prstGeom prst="rect">
+            <a:avLst/>
+          </a:prstGeom>
+          <a:noFill/>
+          <a:ln/>
+        </p:spPr>
+        <p:txBody>
+          <a:bodyPr wrap="square" lIns="0" tIns="0" rIns="0" bIns="0" rtlCol="0" anchor="t"/>
+          <a:lstStyle/>
+          <a:p>
+            <a:pPr indent="0" marL="0">
+              <a:buNone/>
+            </a:pPr>
+            <a:r>
+              <a:rPr lang="en-US" sz="8000" b="1" dirty="0">
+                <a:solidFill>
+                  <a:srgbClr val="5CC7D1"/>
+                </a:solidFill>
+                <a:latin typeface="Cambria" pitchFamily="34" charset="0"/>
+                <a:ea typeface="Cambria" pitchFamily="34" charset="-122"/>
+                <a:cs typeface="Cambria" pitchFamily="34" charset="-120"/>
+              </a:rPr>
+              <a:t>04</a:t>
+            </a:r>
+            <a:endParaRPr lang="en-US" sz="8000" dirty="0"/>
+          </a:p>
+        </p:txBody>
+      </p:sp>
+      <p:sp>
+        <p:nvSpPr>
+          <p:cNvPr id="3" name="Text 1"/>
+          <p:cNvSpPr txBox="1"/>
+          <p:nvPr/>
+        </p:nvSpPr>
+        <p:spPr>
+          <a:xfrm>
+            <a:off x="548640" y="2834640"/>
+            <a:ext cx="11094415" cy="1371600"/>
+          </a:xfrm>
+          <a:prstGeom prst="rect">
+            <a:avLst/>
+          </a:prstGeom>
+          <a:noFill/>
+          <a:ln/>
+        </p:spPr>
+        <p:txBody>
+          <a:bodyPr wrap="square" lIns="0" tIns="0" rIns="0" bIns="0" rtlCol="0" anchor="ctr"/>
+          <a:lstStyle/>
+          <a:p>
+            <a:pPr indent="0" marL="0">
+              <a:buNone/>
+            </a:pPr>
+            <a:r>
+              <a:rPr lang="en-US" sz="4200" b="1" dirty="0">
+                <a:solidFill>
+                  <a:srgbClr val="FFFFFF"/>
+                </a:solidFill>
+                <a:latin typeface="Cambria" pitchFamily="34" charset="0"/>
+                <a:ea typeface="Cambria" pitchFamily="34" charset="-122"/>
+                <a:cs typeface="Cambria" pitchFamily="34" charset="-120"/>
+              </a:rPr>
+              <a:t>The editor</a:t>
+            </a:r>
+            <a:endParaRPr lang="en-US" sz="4200" dirty="0"/>
+          </a:p>
+        </p:txBody>
+      </p:sp>
+      <p:sp>
+        <p:nvSpPr>
+          <p:cNvPr id="4" name="Text 2"/>
+          <p:cNvSpPr txBox="1"/>
+          <p:nvPr/>
+        </p:nvSpPr>
+        <p:spPr>
+          <a:xfrm>
+            <a:off x="548640" y="4389120"/>
+            <a:ext cx="11094415" cy="1097280"/>
+          </a:xfrm>
+          <a:prstGeom prst="rect">
+            <a:avLst/>
+          </a:prstGeom>
+          <a:noFill/>
+          <a:ln/>
+        </p:spPr>
+        <p:txBody>
+          <a:bodyPr wrap="square" lIns="0" tIns="0" rIns="0" bIns="0" rtlCol="0" anchor="t"/>
+          <a:lstStyle/>
+          <a:p>
+            <a:pPr indent="0" marL="0">
+              <a:buNone/>
+            </a:pPr>
+            <a:r>
+              <a:rPr lang="en-US" sz="2200" dirty="0">
+                <a:solidFill>
+                  <a:srgbClr val="CFE3EA"/>
+                </a:solidFill>
+                <a:latin typeface="Calibri" pitchFamily="34" charset="0"/>
+                <a:ea typeface="Calibri" pitchFamily="34" charset="-122"/>
+                <a:cs typeface="Calibri" pitchFamily="34" charset="-120"/>
+              </a:rPr>
+              <a:t>Reviewing submissions</a:t>
+            </a:r>
+            <a:endParaRPr lang="en-US" sz="2200" dirty="0"/>
+          </a:p>
+        </p:txBody>
+      </p:sp>
+      <p:sp>
+        <p:nvSpPr>
+          <p:cNvPr id="25" name="Slide Number Placeholder 0"/>
+          <p:cNvSpPr>
+            <a:spLocks noGrp="1"/>
+          </p:cNvSpPr>
+          <p:nvPr>
+            <p:ph type="sldNum" sz="quarter" idx="4294967295"/>
+          </p:nvPr>
+        </p:nvSpPr>
+        <p:spPr>
+          <a:xfrm>
+            <a:off x="11002975" y="6419088"/>
+            <a:ext cx="640080" cy="274320"/>
+          </a:xfrm>
+          <a:prstGeom prst="rect">
+            <a:avLst/>
+          </a:prstGeom>
+          <a:extLst>
+            <a:ext uri="{C572A759-6A51-4108-AA02-DFA0A04FC94B}">
+              <ma14:wrappingTextBoxFlag xmlns:ma14="http://schemas.microsoft.com/office/mac/drawingml/2011/main" val="0"/>
+            </a:ext>
+          </a:extLst>
+        </p:spPr>
+        <p:txBody>
+          <a:bodyPr/>
+          <a:lstStyle>
+            <a:lvl1pPr>
+              <a:defRPr sz="1000">
+                <a:solidFill>
+                  <a:srgbClr val="CFE3EA"/>
+                </a:solidFill>
+                <a:latin typeface="Calibri"/>
+                <a:ea typeface="Calibri"/>
+                <a:cs typeface="Calibri"/>
+              </a:defRPr>
+            </a:lvl1pPr>
+          </a:lstStyle>
+          <a:p>
+            <a:pPr algn="r"/>
+            <a:fld id="{F7021451-1387-4CA6-816F-3879F97B5CBC}" type="slidenum">
+              <a:rPr b="0" lang="en-US"/>
+              <a:t>26</a:t>
+            </a:fld>
+            <a:endParaRPr lang="en-US"/>
+          </a:p>
+        </p:txBody>
+      </p:sp>
+    </p:spTree>
+  </p:cSld>
+  <p:clrMapOvr>
+    <a:masterClrMapping/>
+  </p:clrMapOvr>
+</p:sld>
+</file>
+
+<file path=ppt/slides/slide27.xml><?xml version="1.0" encoding="utf-8"?>
+<p:sld xmlns:a="http://schemas.openxmlformats.org/drawingml/2006/main" xmlns:r="http://schemas.openxmlformats.org/officeDocument/2006/relationships" xmlns:p="http://schemas.openxmlformats.org/presentationml/2006/main">
+  <p:cSld name="Slide 27">
+    <p:spTree>
+      <p:nvGrpSpPr>
+        <p:cNvPr id="1" name=""/>
+        <p:cNvGrpSpPr/>
+        <p:nvPr/>
+      </p:nvGrpSpPr>
+      <p:grpSpPr>
+        <a:xfrm>
+          <a:off x="0" y="0"/>
+          <a:ext cx="0" cy="0"/>
+          <a:chOff x="0" y="0"/>
+          <a:chExt cx="0" cy="0"/>
+        </a:xfrm>
+      </p:grpSpPr>
+      <p:sp>
+        <p:nvSpPr>
           <p:cNvPr id="2" name="Text 1"/>
           <p:cNvSpPr/>
           <p:nvPr>
@@ -14797,6 +16426,550 @@
                 <a:ea typeface="Cambria" pitchFamily="34" charset="-122"/>
                 <a:cs typeface="Cambria" pitchFamily="34" charset="-120"/>
               </a:rPr>
+              <a:t>What an editor sees and may do</a:t>
+            </a:r>
+            <a:endParaRPr lang="en-US" sz="3000" dirty="0"/>
+          </a:p>
+        </p:txBody>
+      </p:sp>
+      <p:sp>
+        <p:nvSpPr>
+          <p:cNvPr id="3" name="Text 1"/>
+          <p:cNvSpPr txBox="1"/>
+          <p:nvPr/>
+        </p:nvSpPr>
+        <p:spPr>
+          <a:xfrm>
+            <a:off x="548640" y="1481328"/>
+            <a:ext cx="457200" cy="457200"/>
+          </a:xfrm>
+          <a:prstGeom prst="roundRect">
+            <a:avLst>
+              <a:gd name="adj" fmla="val 16000"/>
+            </a:avLst>
+          </a:prstGeom>
+          <a:solidFill>
+            <a:srgbClr val="0E7C86"/>
+          </a:solidFill>
+          <a:ln>
+            <a:solidFill>
+              <a:srgbClr val="0E7C86"/>
+            </a:solidFill>
+          </a:ln>
+        </p:spPr>
+        <p:txBody>
+          <a:bodyPr wrap="square" lIns="0" tIns="0" rIns="0" bIns="0" rtlCol="0" anchor="ctr"/>
+          <a:lstStyle/>
+          <a:p>
+            <a:pPr algn="ctr" indent="0" marL="0">
+              <a:buNone/>
+            </a:pPr>
+            <a:r>
+              <a:rPr lang="en-US" sz="1700" b="1" dirty="0">
+                <a:solidFill>
+                  <a:srgbClr val="FFFFFF"/>
+                </a:solidFill>
+                <a:latin typeface="Calibri" pitchFamily="34" charset="0"/>
+                <a:ea typeface="Calibri" pitchFamily="34" charset="-122"/>
+                <a:cs typeface="Calibri" pitchFamily="34" charset="-120"/>
+              </a:rPr>
+              <a:t>1</a:t>
+            </a:r>
+            <a:endParaRPr lang="en-US" sz="1700" dirty="0"/>
+          </a:p>
+        </p:txBody>
+      </p:sp>
+      <p:sp>
+        <p:nvSpPr>
+          <p:cNvPr id="4" name="Text 2"/>
+          <p:cNvSpPr txBox="1"/>
+          <p:nvPr/>
+        </p:nvSpPr>
+        <p:spPr>
+          <a:xfrm>
+            <a:off x="1280160" y="1463040"/>
+            <a:ext cx="10362895" cy="493776"/>
+          </a:xfrm>
+          <a:prstGeom prst="rect">
+            <a:avLst/>
+          </a:prstGeom>
+          <a:noFill/>
+          <a:ln/>
+        </p:spPr>
+        <p:txBody>
+          <a:bodyPr wrap="square" lIns="0" tIns="0" rIns="0" bIns="0" rtlCol="0" anchor="ctr"/>
+          <a:lstStyle/>
+          <a:p>
+            <a:pPr indent="0" marL="0">
+              <a:buNone/>
+            </a:pPr>
+            <a:r>
+              <a:rPr lang="en-US" sz="2200" dirty="0">
+                <a:solidFill>
+                  <a:srgbClr val="1B2530"/>
+                </a:solidFill>
+                <a:latin typeface="Calibri" pitchFamily="34" charset="0"/>
+                <a:ea typeface="Calibri" pitchFamily="34" charset="-122"/>
+                <a:cs typeface="Calibri" pitchFamily="34" charset="-120"/>
+              </a:rPr>
+              <a:t>A Review item in the navigation bar: the pending queue</a:t>
+            </a:r>
+            <a:endParaRPr lang="en-US" sz="2200" dirty="0"/>
+          </a:p>
+        </p:txBody>
+      </p:sp>
+      <p:sp>
+        <p:nvSpPr>
+          <p:cNvPr id="5" name="Text 3"/>
+          <p:cNvSpPr txBox="1"/>
+          <p:nvPr/>
+        </p:nvSpPr>
+        <p:spPr>
+          <a:xfrm>
+            <a:off x="548640" y="2465222"/>
+            <a:ext cx="457200" cy="457200"/>
+          </a:xfrm>
+          <a:prstGeom prst="roundRect">
+            <a:avLst>
+              <a:gd name="adj" fmla="val 16000"/>
+            </a:avLst>
+          </a:prstGeom>
+          <a:solidFill>
+            <a:srgbClr val="0E7C86"/>
+          </a:solidFill>
+          <a:ln>
+            <a:solidFill>
+              <a:srgbClr val="0E7C86"/>
+            </a:solidFill>
+          </a:ln>
+        </p:spPr>
+        <p:txBody>
+          <a:bodyPr wrap="square" lIns="0" tIns="0" rIns="0" bIns="0" rtlCol="0" anchor="ctr"/>
+          <a:lstStyle/>
+          <a:p>
+            <a:pPr algn="ctr" indent="0" marL="0">
+              <a:buNone/>
+            </a:pPr>
+            <a:r>
+              <a:rPr lang="en-US" sz="1700" b="1" dirty="0">
+                <a:solidFill>
+                  <a:srgbClr val="FFFFFF"/>
+                </a:solidFill>
+                <a:latin typeface="Calibri" pitchFamily="34" charset="0"/>
+                <a:ea typeface="Calibri" pitchFamily="34" charset="-122"/>
+                <a:cs typeface="Calibri" pitchFamily="34" charset="-120"/>
+              </a:rPr>
+              <a:t>2</a:t>
+            </a:r>
+            <a:endParaRPr lang="en-US" sz="1700" dirty="0"/>
+          </a:p>
+        </p:txBody>
+      </p:sp>
+      <p:sp>
+        <p:nvSpPr>
+          <p:cNvPr id="6" name="Text 4"/>
+          <p:cNvSpPr txBox="1"/>
+          <p:nvPr/>
+        </p:nvSpPr>
+        <p:spPr>
+          <a:xfrm>
+            <a:off x="1280160" y="2446934"/>
+            <a:ext cx="10362895" cy="493776"/>
+          </a:xfrm>
+          <a:prstGeom prst="rect">
+            <a:avLst/>
+          </a:prstGeom>
+          <a:noFill/>
+          <a:ln/>
+        </p:spPr>
+        <p:txBody>
+          <a:bodyPr wrap="square" lIns="0" tIns="0" rIns="0" bIns="0" rtlCol="0" anchor="ctr"/>
+          <a:lstStyle/>
+          <a:p>
+            <a:pPr indent="0" marL="0">
+              <a:buNone/>
+            </a:pPr>
+            <a:r>
+              <a:rPr lang="en-US" sz="2200" dirty="0">
+                <a:solidFill>
+                  <a:srgbClr val="1B2530"/>
+                </a:solidFill>
+                <a:latin typeface="Calibri" pitchFamily="34" charset="0"/>
+                <a:ea typeface="Calibri" pitchFamily="34" charset="-122"/>
+                <a:cs typeface="Calibri" pitchFamily="34" charset="-120"/>
+              </a:rPr>
+              <a:t>For each submission: submitter, id, version, authors, files</a:t>
+            </a:r>
+            <a:endParaRPr lang="en-US" sz="2200" dirty="0"/>
+          </a:p>
+        </p:txBody>
+      </p:sp>
+      <p:sp>
+        <p:nvSpPr>
+          <p:cNvPr id="7" name="Text 5"/>
+          <p:cNvSpPr txBox="1"/>
+          <p:nvPr/>
+        </p:nvSpPr>
+        <p:spPr>
+          <a:xfrm>
+            <a:off x="548640" y="3449117"/>
+            <a:ext cx="457200" cy="457200"/>
+          </a:xfrm>
+          <a:prstGeom prst="roundRect">
+            <a:avLst>
+              <a:gd name="adj" fmla="val 16000"/>
+            </a:avLst>
+          </a:prstGeom>
+          <a:solidFill>
+            <a:srgbClr val="0E7C86"/>
+          </a:solidFill>
+          <a:ln>
+            <a:solidFill>
+              <a:srgbClr val="0E7C86"/>
+            </a:solidFill>
+          </a:ln>
+        </p:spPr>
+        <p:txBody>
+          <a:bodyPr wrap="square" lIns="0" tIns="0" rIns="0" bIns="0" rtlCol="0" anchor="ctr"/>
+          <a:lstStyle/>
+          <a:p>
+            <a:pPr algn="ctr" indent="0" marL="0">
+              <a:buNone/>
+            </a:pPr>
+            <a:r>
+              <a:rPr lang="en-US" sz="1700" b="1" dirty="0">
+                <a:solidFill>
+                  <a:srgbClr val="FFFFFF"/>
+                </a:solidFill>
+                <a:latin typeface="Calibri" pitchFamily="34" charset="0"/>
+                <a:ea typeface="Calibri" pitchFamily="34" charset="-122"/>
+                <a:cs typeface="Calibri" pitchFamily="34" charset="-120"/>
+              </a:rPr>
+              <a:t>3</a:t>
+            </a:r>
+            <a:endParaRPr lang="en-US" sz="1700" dirty="0"/>
+          </a:p>
+        </p:txBody>
+      </p:sp>
+      <p:sp>
+        <p:nvSpPr>
+          <p:cNvPr id="8" name="Text 6"/>
+          <p:cNvSpPr txBox="1"/>
+          <p:nvPr/>
+        </p:nvSpPr>
+        <p:spPr>
+          <a:xfrm>
+            <a:off x="1280160" y="3430829"/>
+            <a:ext cx="10362895" cy="819302"/>
+          </a:xfrm>
+          <a:prstGeom prst="rect">
+            <a:avLst/>
+          </a:prstGeom>
+          <a:noFill/>
+          <a:ln/>
+        </p:spPr>
+        <p:txBody>
+          <a:bodyPr wrap="square" lIns="0" tIns="0" rIns="0" bIns="0" rtlCol="0" anchor="t"/>
+          <a:lstStyle/>
+          <a:p>
+            <a:pPr indent="0" marL="0">
+              <a:buNone/>
+            </a:pPr>
+            <a:r>
+              <a:rPr lang="en-US" sz="2200" dirty="0">
+                <a:solidFill>
+                  <a:srgbClr val="1B2530"/>
+                </a:solidFill>
+                <a:latin typeface="Calibri" pitchFamily="34" charset="0"/>
+                <a:ea typeface="Calibri" pitchFamily="34" charset="-122"/>
+                <a:cs typeface="Calibri" pitchFamily="34" charset="-120"/>
+              </a:rPr>
+              <a:t>Seven editable fields: title, summary, description, tags, licence, homepage, repository</a:t>
+            </a:r>
+            <a:endParaRPr lang="en-US" sz="2200" dirty="0"/>
+          </a:p>
+        </p:txBody>
+      </p:sp>
+      <p:sp>
+        <p:nvSpPr>
+          <p:cNvPr id="9" name="Text 7"/>
+          <p:cNvSpPr txBox="1"/>
+          <p:nvPr/>
+        </p:nvSpPr>
+        <p:spPr>
+          <a:xfrm>
+            <a:off x="548640" y="4433011"/>
+            <a:ext cx="457200" cy="457200"/>
+          </a:xfrm>
+          <a:prstGeom prst="roundRect">
+            <a:avLst>
+              <a:gd name="adj" fmla="val 16000"/>
+            </a:avLst>
+          </a:prstGeom>
+          <a:solidFill>
+            <a:srgbClr val="0E7C86"/>
+          </a:solidFill>
+          <a:ln>
+            <a:solidFill>
+              <a:srgbClr val="0E7C86"/>
+            </a:solidFill>
+          </a:ln>
+        </p:spPr>
+        <p:txBody>
+          <a:bodyPr wrap="square" lIns="0" tIns="0" rIns="0" bIns="0" rtlCol="0" anchor="ctr"/>
+          <a:lstStyle/>
+          <a:p>
+            <a:pPr algn="ctr" indent="0" marL="0">
+              <a:buNone/>
+            </a:pPr>
+            <a:r>
+              <a:rPr lang="en-US" sz="1700" b="1" dirty="0">
+                <a:solidFill>
+                  <a:srgbClr val="FFFFFF"/>
+                </a:solidFill>
+                <a:latin typeface="Calibri" pitchFamily="34" charset="0"/>
+                <a:ea typeface="Calibri" pitchFamily="34" charset="-122"/>
+                <a:cs typeface="Calibri" pitchFamily="34" charset="-120"/>
+              </a:rPr>
+              <a:t>4</a:t>
+            </a:r>
+            <a:endParaRPr lang="en-US" sz="1700" dirty="0"/>
+          </a:p>
+        </p:txBody>
+      </p:sp>
+      <p:sp>
+        <p:nvSpPr>
+          <p:cNvPr id="10" name="Text 8"/>
+          <p:cNvSpPr txBox="1"/>
+          <p:nvPr/>
+        </p:nvSpPr>
+        <p:spPr>
+          <a:xfrm>
+            <a:off x="1280160" y="4414723"/>
+            <a:ext cx="10362895" cy="493776"/>
+          </a:xfrm>
+          <a:prstGeom prst="rect">
+            <a:avLst/>
+          </a:prstGeom>
+          <a:noFill/>
+          <a:ln/>
+        </p:spPr>
+        <p:txBody>
+          <a:bodyPr wrap="square" lIns="0" tIns="0" rIns="0" bIns="0" rtlCol="0" anchor="ctr"/>
+          <a:lstStyle/>
+          <a:p>
+            <a:pPr indent="0" marL="0">
+              <a:buNone/>
+            </a:pPr>
+            <a:r>
+              <a:rPr lang="en-US" sz="2200" dirty="0">
+                <a:solidFill>
+                  <a:srgbClr val="1B2530"/>
+                </a:solidFill>
+                <a:latin typeface="Calibri" pitchFamily="34" charset="0"/>
+                <a:ea typeface="Calibri" pitchFamily="34" charset="-122"/>
+                <a:cs typeface="Calibri" pitchFamily="34" charset="-120"/>
+              </a:rPr>
+              <a:t>Two outcomes: Verify and Publish, or Reject</a:t>
+            </a:r>
+            <a:endParaRPr lang="en-US" sz="2200" dirty="0"/>
+          </a:p>
+        </p:txBody>
+      </p:sp>
+      <p:sp>
+        <p:nvSpPr>
+          <p:cNvPr id="11" name="Text 9"/>
+          <p:cNvSpPr txBox="1"/>
+          <p:nvPr/>
+        </p:nvSpPr>
+        <p:spPr>
+          <a:xfrm>
+            <a:off x="548640" y="5416906"/>
+            <a:ext cx="457200" cy="457200"/>
+          </a:xfrm>
+          <a:prstGeom prst="roundRect">
+            <a:avLst>
+              <a:gd name="adj" fmla="val 16000"/>
+            </a:avLst>
+          </a:prstGeom>
+          <a:solidFill>
+            <a:srgbClr val="0E7C86"/>
+          </a:solidFill>
+          <a:ln>
+            <a:solidFill>
+              <a:srgbClr val="0E7C86"/>
+            </a:solidFill>
+          </a:ln>
+        </p:spPr>
+        <p:txBody>
+          <a:bodyPr wrap="square" lIns="0" tIns="0" rIns="0" bIns="0" rtlCol="0" anchor="ctr"/>
+          <a:lstStyle/>
+          <a:p>
+            <a:pPr algn="ctr" indent="0" marL="0">
+              <a:buNone/>
+            </a:pPr>
+            <a:r>
+              <a:rPr lang="en-US" sz="1700" b="1" dirty="0">
+                <a:solidFill>
+                  <a:srgbClr val="FFFFFF"/>
+                </a:solidFill>
+                <a:latin typeface="Calibri" pitchFamily="34" charset="0"/>
+                <a:ea typeface="Calibri" pitchFamily="34" charset="-122"/>
+                <a:cs typeface="Calibri" pitchFamily="34" charset="-120"/>
+              </a:rPr>
+              <a:t>5</a:t>
+            </a:r>
+            <a:endParaRPr lang="en-US" sz="1700" dirty="0"/>
+          </a:p>
+        </p:txBody>
+      </p:sp>
+      <p:sp>
+        <p:nvSpPr>
+          <p:cNvPr id="12" name="Text 10"/>
+          <p:cNvSpPr txBox="1"/>
+          <p:nvPr/>
+        </p:nvSpPr>
+        <p:spPr>
+          <a:xfrm>
+            <a:off x="1280160" y="5398618"/>
+            <a:ext cx="10362895" cy="493776"/>
+          </a:xfrm>
+          <a:prstGeom prst="rect">
+            <a:avLst/>
+          </a:prstGeom>
+          <a:noFill/>
+          <a:ln/>
+        </p:spPr>
+        <p:txBody>
+          <a:bodyPr wrap="square" lIns="0" tIns="0" rIns="0" bIns="0" rtlCol="0" anchor="ctr"/>
+          <a:lstStyle/>
+          <a:p>
+            <a:pPr indent="0" marL="0">
+              <a:buNone/>
+            </a:pPr>
+            <a:r>
+              <a:rPr lang="en-US" sz="2200" dirty="0">
+                <a:solidFill>
+                  <a:srgbClr val="1B2530"/>
+                </a:solidFill>
+                <a:latin typeface="Calibri" pitchFamily="34" charset="0"/>
+                <a:ea typeface="Calibri" pitchFamily="34" charset="-122"/>
+                <a:cs typeface="Calibri" pitchFamily="34" charset="-120"/>
+              </a:rPr>
+              <a:t>Later: edit or delete published versions</a:t>
+            </a:r>
+            <a:endParaRPr lang="en-US" sz="2200" dirty="0"/>
+          </a:p>
+        </p:txBody>
+      </p:sp>
+      <p:sp>
+        <p:nvSpPr>
+          <p:cNvPr id="25" name="Slide Number Placeholder 0"/>
+          <p:cNvSpPr>
+            <a:spLocks noGrp="1"/>
+          </p:cNvSpPr>
+          <p:nvPr>
+            <p:ph type="sldNum" sz="quarter" idx="4294967295"/>
+          </p:nvPr>
+        </p:nvSpPr>
+        <p:spPr>
+          <a:xfrm>
+            <a:off x="11002975" y="6419088"/>
+            <a:ext cx="640080" cy="274320"/>
+          </a:xfrm>
+          <a:prstGeom prst="rect">
+            <a:avLst/>
+          </a:prstGeom>
+          <a:extLst>
+            <a:ext uri="{C572A759-6A51-4108-AA02-DFA0A04FC94B}">
+              <ma14:wrappingTextBoxFlag xmlns:ma14="http://schemas.microsoft.com/office/mac/drawingml/2011/main" val="0"/>
+            </a:ext>
+          </a:extLst>
+        </p:spPr>
+        <p:txBody>
+          <a:bodyPr/>
+          <a:lstStyle>
+            <a:lvl1pPr>
+              <a:defRPr sz="1000">
+                <a:solidFill>
+                  <a:srgbClr val="5B6B78"/>
+                </a:solidFill>
+                <a:latin typeface="Calibri"/>
+                <a:ea typeface="Calibri"/>
+                <a:cs typeface="Calibri"/>
+              </a:defRPr>
+            </a:lvl1pPr>
+          </a:lstStyle>
+          <a:p>
+            <a:pPr algn="r"/>
+            <a:fld id="{F7021451-1387-4CA6-816F-3879F97B5CBC}" type="slidenum">
+              <a:rPr b="0" lang="en-US"/>
+              <a:t>27</a:t>
+            </a:fld>
+            <a:endParaRPr lang="en-US"/>
+          </a:p>
+        </p:txBody>
+      </p:sp>
+    </p:spTree>
+  </p:cSld>
+  <p:clrMapOvr>
+    <a:masterClrMapping/>
+  </p:clrMapOvr>
+</p:sld>
+</file>
+
+<file path=ppt/slides/slide28.xml><?xml version="1.0" encoding="utf-8"?>
+<p:sld xmlns:a="http://schemas.openxmlformats.org/drawingml/2006/main" xmlns:r="http://schemas.openxmlformats.org/officeDocument/2006/relationships" xmlns:p="http://schemas.openxmlformats.org/presentationml/2006/main">
+  <p:cSld name="Slide 28">
+    <p:spTree>
+      <p:nvGrpSpPr>
+        <p:cNvPr id="1" name=""/>
+        <p:cNvGrpSpPr/>
+        <p:nvPr/>
+      </p:nvGrpSpPr>
+      <p:grpSpPr>
+        <a:xfrm>
+          <a:off x="0" y="0"/>
+          <a:ext cx="0" cy="0"/>
+          <a:chOff x="0" y="0"/>
+          <a:chExt cx="0" cy="0"/>
+        </a:xfrm>
+      </p:grpSpPr>
+      <p:sp>
+        <p:nvSpPr>
+          <p:cNvPr id="2" name="Text 1"/>
+          <p:cNvSpPr/>
+          <p:nvPr>
+            <p:ph idx="101" type="title" hasCustomPrompt="1"/>
+          </p:nvPr>
+        </p:nvSpPr>
+        <p:spPr>
+          <a:xfrm>
+            <a:off x="548640" y="384048"/>
+            <a:ext cx="11094415" cy="868680"/>
+          </a:xfrm>
+          <a:prstGeom prst="rect">
+            <a:avLst/>
+          </a:prstGeom>
+          <a:noFill/>
+          <a:ln/>
+        </p:spPr>
+        <p:txBody>
+          <a:bodyPr wrap="square" lIns="0" tIns="0" rIns="0" bIns="0" rtlCol="0" anchor="ctr"/>
+          <a:lstStyle/>
+          <a:p>
+            <a:pPr algn="l" indent="0" marL="0">
+              <a:buNone/>
+            </a:pPr>
+            <a:r>
+              <a:rPr lang="en-US" sz="3000" b="1" dirty="0">
+                <a:solidFill>
+                  <a:srgbClr val="2E4A62"/>
+                </a:solidFill>
+                <a:latin typeface="Cambria" pitchFamily="34" charset="0"/>
+                <a:ea typeface="Cambria" pitchFamily="34" charset="-122"/>
+                <a:cs typeface="Cambria" pitchFamily="34" charset="-120"/>
+              </a:rPr>
               <a:t>An editorial checklist</a:t>
             </a:r>
             <a:endParaRPr lang="en-US" sz="3000" dirty="0"/>
@@ -14805,7 +16978,7 @@
       </p:sp>
       <p:graphicFrame>
         <p:nvGraphicFramePr>
-          <p:cNvPr id="27" name="Table 0"/>
+          <p:cNvPr id="29" name="Table 0"/>
           <p:cNvGraphicFramePr>
             <a:graphicFrameLocks noGrp="1"/>
           </p:cNvGraphicFramePr>
@@ -15841,422 +18014,6 @@
             <a:pPr algn="r"/>
             <a:fld id="{F7021451-1387-4CA6-816F-3879F97B5CBC}" type="slidenum">
               <a:rPr b="0" lang="en-US"/>
-              <a:t>26</a:t>
-            </a:fld>
-            <a:endParaRPr lang="en-US"/>
-          </a:p>
-        </p:txBody>
-      </p:sp>
-    </p:spTree>
-  </p:cSld>
-  <p:clrMapOvr>
-    <a:masterClrMapping/>
-  </p:clrMapOvr>
-</p:sld>
-</file>
-
-<file path=ppt/slides/slide27.xml><?xml version="1.0" encoding="utf-8"?>
-<p:sld xmlns:a="http://schemas.openxmlformats.org/drawingml/2006/main" xmlns:r="http://schemas.openxmlformats.org/officeDocument/2006/relationships" xmlns:p="http://schemas.openxmlformats.org/presentationml/2006/main">
-  <p:cSld name="Slide 27">
-    <p:spTree>
-      <p:nvGrpSpPr>
-        <p:cNvPr id="1" name=""/>
-        <p:cNvGrpSpPr/>
-        <p:nvPr/>
-      </p:nvGrpSpPr>
-      <p:grpSpPr>
-        <a:xfrm>
-          <a:off x="0" y="0"/>
-          <a:ext cx="0" cy="0"/>
-          <a:chOff x="0" y="0"/>
-          <a:chExt cx="0" cy="0"/>
-        </a:xfrm>
-      </p:grpSpPr>
-      <p:sp>
-        <p:nvSpPr>
-          <p:cNvPr id="2" name="Shape 0"/>
-          <p:cNvSpPr/>
-          <p:nvPr/>
-        </p:nvSpPr>
-        <p:spPr>
-          <a:xfrm>
-            <a:off x="548640" y="640080"/>
-            <a:ext cx="168250" cy="168250"/>
-          </a:xfrm>
-          <a:prstGeom prst="rect">
-            <a:avLst/>
-          </a:prstGeom>
-          <a:solidFill>
-            <a:srgbClr val="0E7C86"/>
-          </a:solidFill>
-          <a:ln w="12700">
-            <a:solidFill>
-              <a:srgbClr val="0E7C86"/>
-            </a:solidFill>
-            <a:prstDash val="solid"/>
-          </a:ln>
-        </p:spPr>
-      </p:sp>
-      <p:sp>
-        <p:nvSpPr>
-          <p:cNvPr id="3" name="Shape 1"/>
-          <p:cNvSpPr/>
-          <p:nvPr/>
-        </p:nvSpPr>
-        <p:spPr>
-          <a:xfrm>
-            <a:off x="731520" y="640080"/>
-            <a:ext cx="168250" cy="168250"/>
-          </a:xfrm>
-          <a:prstGeom prst="rect">
-            <a:avLst/>
-          </a:prstGeom>
-          <a:solidFill>
-            <a:srgbClr val="C7791B"/>
-          </a:solidFill>
-          <a:ln w="12700">
-            <a:solidFill>
-              <a:srgbClr val="C7791B"/>
-            </a:solidFill>
-            <a:prstDash val="solid"/>
-          </a:ln>
-        </p:spPr>
-      </p:sp>
-      <p:sp>
-        <p:nvSpPr>
-          <p:cNvPr id="4" name="Shape 2"/>
-          <p:cNvSpPr/>
-          <p:nvPr/>
-        </p:nvSpPr>
-        <p:spPr>
-          <a:xfrm>
-            <a:off x="731520" y="822960"/>
-            <a:ext cx="168250" cy="168250"/>
-          </a:xfrm>
-          <a:prstGeom prst="rect">
-            <a:avLst/>
-          </a:prstGeom>
-          <a:solidFill>
-            <a:srgbClr val="0E7C86"/>
-          </a:solidFill>
-          <a:ln w="12700">
-            <a:solidFill>
-              <a:srgbClr val="0E7C86"/>
-            </a:solidFill>
-            <a:prstDash val="solid"/>
-          </a:ln>
-        </p:spPr>
-      </p:sp>
-      <p:sp>
-        <p:nvSpPr>
-          <p:cNvPr id="5" name="Text 3"/>
-          <p:cNvSpPr txBox="1"/>
-          <p:nvPr/>
-        </p:nvSpPr>
-        <p:spPr>
-          <a:xfrm>
-            <a:off x="548640" y="1554480"/>
-            <a:ext cx="11094415" cy="2743200"/>
-          </a:xfrm>
-          <a:prstGeom prst="rect">
-            <a:avLst/>
-          </a:prstGeom>
-          <a:noFill/>
-          <a:ln/>
-        </p:spPr>
-        <p:txBody>
-          <a:bodyPr wrap="square" lIns="0" tIns="0" rIns="0" bIns="0" rtlCol="0" anchor="ctr"/>
-          <a:lstStyle/>
-          <a:p>
-            <a:pPr indent="0" marL="0">
-              <a:buNone/>
-            </a:pPr>
-            <a:r>
-              <a:rPr lang="en-US" sz="4400" b="1" dirty="0">
-                <a:solidFill>
-                  <a:srgbClr val="FFFFFF"/>
-                </a:solidFill>
-                <a:latin typeface="Cambria" pitchFamily="34" charset="0"/>
-                <a:ea typeface="Cambria" pitchFamily="34" charset="-122"/>
-                <a:cs typeface="Cambria" pitchFamily="34" charset="-120"/>
-              </a:rPr>
-              <a:t>The editor may improve how a game is described, but not what it is or who made it.</a:t>
-            </a:r>
-            <a:endParaRPr lang="en-US" sz="4400" dirty="0"/>
-          </a:p>
-        </p:txBody>
-      </p:sp>
-      <p:sp>
-        <p:nvSpPr>
-          <p:cNvPr id="6" name="Text 4"/>
-          <p:cNvSpPr txBox="1"/>
-          <p:nvPr/>
-        </p:nvSpPr>
-        <p:spPr>
-          <a:xfrm>
-            <a:off x="548640" y="4480560"/>
-            <a:ext cx="11094415" cy="1371600"/>
-          </a:xfrm>
-          <a:prstGeom prst="rect">
-            <a:avLst/>
-          </a:prstGeom>
-          <a:noFill/>
-          <a:ln/>
-        </p:spPr>
-        <p:txBody>
-          <a:bodyPr wrap="square" lIns="0" tIns="0" rIns="0" bIns="0" rtlCol="0" anchor="t"/>
-          <a:lstStyle/>
-          <a:p>
-            <a:pPr indent="0" marL="0">
-              <a:buNone/>
-            </a:pPr>
-            <a:r>
-              <a:rPr lang="en-US" sz="2200" dirty="0">
-                <a:solidFill>
-                  <a:srgbClr val="CFE3EA"/>
-                </a:solidFill>
-                <a:latin typeface="Calibri" pitchFamily="34" charset="0"/>
-                <a:ea typeface="Calibri" pitchFamily="34" charset="-122"/>
-                <a:cs typeface="Calibri" pitchFamily="34" charset="-120"/>
-              </a:rPr>
-              <a:t>The same separation a journal observes between copy-editing a paper and changing its authors.</a:t>
-            </a:r>
-            <a:endParaRPr lang="en-US" sz="2200" dirty="0"/>
-          </a:p>
-        </p:txBody>
-      </p:sp>
-      <p:sp>
-        <p:nvSpPr>
-          <p:cNvPr id="25" name="Slide Number Placeholder 0"/>
-          <p:cNvSpPr>
-            <a:spLocks noGrp="1"/>
-          </p:cNvSpPr>
-          <p:nvPr>
-            <p:ph type="sldNum" sz="quarter" idx="4294967295"/>
-          </p:nvPr>
-        </p:nvSpPr>
-        <p:spPr>
-          <a:xfrm>
-            <a:off x="11002975" y="6419088"/>
-            <a:ext cx="640080" cy="274320"/>
-          </a:xfrm>
-          <a:prstGeom prst="rect">
-            <a:avLst/>
-          </a:prstGeom>
-          <a:extLst>
-            <a:ext uri="{C572A759-6A51-4108-AA02-DFA0A04FC94B}">
-              <ma14:wrappingTextBoxFlag xmlns:ma14="http://schemas.microsoft.com/office/mac/drawingml/2011/main" val="0"/>
-            </a:ext>
-          </a:extLst>
-        </p:spPr>
-        <p:txBody>
-          <a:bodyPr/>
-          <a:lstStyle>
-            <a:lvl1pPr>
-              <a:defRPr sz="1000">
-                <a:solidFill>
-                  <a:srgbClr val="CFE3EA"/>
-                </a:solidFill>
-                <a:latin typeface="Calibri"/>
-                <a:ea typeface="Calibri"/>
-                <a:cs typeface="Calibri"/>
-              </a:defRPr>
-            </a:lvl1pPr>
-          </a:lstStyle>
-          <a:p>
-            <a:pPr algn="r"/>
-            <a:fld id="{F7021451-1387-4CA6-816F-3879F97B5CBC}" type="slidenum">
-              <a:rPr b="0" lang="en-US"/>
-              <a:t>27</a:t>
-            </a:fld>
-            <a:endParaRPr lang="en-US"/>
-          </a:p>
-        </p:txBody>
-      </p:sp>
-    </p:spTree>
-  </p:cSld>
-  <p:clrMapOvr>
-    <a:masterClrMapping/>
-  </p:clrMapOvr>
-</p:sld>
-</file>
-
-<file path=ppt/slides/slide28.xml><?xml version="1.0" encoding="utf-8"?>
-<p:sld xmlns:a="http://schemas.openxmlformats.org/drawingml/2006/main" xmlns:r="http://schemas.openxmlformats.org/officeDocument/2006/relationships" xmlns:p="http://schemas.openxmlformats.org/presentationml/2006/main">
-  <p:cSld name="Slide 28">
-    <p:spTree>
-      <p:nvGrpSpPr>
-        <p:cNvPr id="1" name=""/>
-        <p:cNvGrpSpPr/>
-        <p:nvPr/>
-      </p:nvGrpSpPr>
-      <p:grpSpPr>
-        <a:xfrm>
-          <a:off x="0" y="0"/>
-          <a:ext cx="0" cy="0"/>
-          <a:chOff x="0" y="0"/>
-          <a:chExt cx="0" cy="0"/>
-        </a:xfrm>
-      </p:grpSpPr>
-      <p:sp>
-        <p:nvSpPr>
-          <p:cNvPr id="2" name="Text 0"/>
-          <p:cNvSpPr txBox="1"/>
-          <p:nvPr/>
-        </p:nvSpPr>
-        <p:spPr>
-          <a:xfrm>
-            <a:off x="548640" y="1371600"/>
-            <a:ext cx="2743200" cy="1188720"/>
-          </a:xfrm>
-          <a:prstGeom prst="rect">
-            <a:avLst/>
-          </a:prstGeom>
-          <a:noFill/>
-          <a:ln/>
-        </p:spPr>
-        <p:txBody>
-          <a:bodyPr wrap="square" lIns="0" tIns="0" rIns="0" bIns="0" rtlCol="0" anchor="t"/>
-          <a:lstStyle/>
-          <a:p>
-            <a:pPr indent="0" marL="0">
-              <a:buNone/>
-            </a:pPr>
-            <a:r>
-              <a:rPr lang="en-US" sz="8000" b="1" dirty="0">
-                <a:solidFill>
-                  <a:srgbClr val="5CC7D1"/>
-                </a:solidFill>
-                <a:latin typeface="Cambria" pitchFamily="34" charset="0"/>
-                <a:ea typeface="Cambria" pitchFamily="34" charset="-122"/>
-                <a:cs typeface="Cambria" pitchFamily="34" charset="-120"/>
-              </a:rPr>
-              <a:t>05</a:t>
-            </a:r>
-            <a:endParaRPr lang="en-US" sz="8000" dirty="0"/>
-          </a:p>
-        </p:txBody>
-      </p:sp>
-      <p:sp>
-        <p:nvSpPr>
-          <p:cNvPr id="3" name="Text 1"/>
-          <p:cNvSpPr txBox="1"/>
-          <p:nvPr/>
-        </p:nvSpPr>
-        <p:spPr>
-          <a:xfrm>
-            <a:off x="548640" y="2834640"/>
-            <a:ext cx="11094415" cy="1371600"/>
-          </a:xfrm>
-          <a:prstGeom prst="rect">
-            <a:avLst/>
-          </a:prstGeom>
-          <a:noFill/>
-          <a:ln/>
-        </p:spPr>
-        <p:txBody>
-          <a:bodyPr wrap="square" lIns="0" tIns="0" rIns="0" bIns="0" rtlCol="0" anchor="ctr"/>
-          <a:lstStyle/>
-          <a:p>
-            <a:pPr indent="0" marL="0">
-              <a:buNone/>
-            </a:pPr>
-            <a:r>
-              <a:rPr lang="en-US" sz="4200" b="1" dirty="0">
-                <a:solidFill>
-                  <a:srgbClr val="FFFFFF"/>
-                </a:solidFill>
-                <a:latin typeface="Cambria" pitchFamily="34" charset="0"/>
-                <a:ea typeface="Cambria" pitchFamily="34" charset="-122"/>
-                <a:cs typeface="Cambria" pitchFamily="34" charset="-120"/>
-              </a:rPr>
-              <a:t>The administrator</a:t>
-            </a:r>
-            <a:endParaRPr lang="en-US" sz="4200" dirty="0"/>
-          </a:p>
-        </p:txBody>
-      </p:sp>
-      <p:sp>
-        <p:nvSpPr>
-          <p:cNvPr id="4" name="Text 2"/>
-          <p:cNvSpPr txBox="1"/>
-          <p:nvPr/>
-        </p:nvSpPr>
-        <p:spPr>
-          <a:xfrm>
-            <a:off x="548640" y="4389120"/>
-            <a:ext cx="11094415" cy="1097280"/>
-          </a:xfrm>
-          <a:prstGeom prst="rect">
-            <a:avLst/>
-          </a:prstGeom>
-          <a:noFill/>
-          <a:ln/>
-        </p:spPr>
-        <p:txBody>
-          <a:bodyPr wrap="square" lIns="0" tIns="0" rIns="0" bIns="0" rtlCol="0" anchor="t"/>
-          <a:lstStyle/>
-          <a:p>
-            <a:pPr indent="0" marL="0">
-              <a:buNone/>
-            </a:pPr>
-            <a:r>
-              <a:rPr lang="en-US" sz="2200" dirty="0">
-                <a:solidFill>
-                  <a:srgbClr val="CFE3EA"/>
-                </a:solidFill>
-                <a:latin typeface="Calibri" pitchFamily="34" charset="0"/>
-                <a:ea typeface="Calibri" pitchFamily="34" charset="-122"/>
-                <a:cs typeface="Calibri" pitchFamily="34" charset="-120"/>
-              </a:rPr>
-              <a:t>Running a Store</a:t>
-            </a:r>
-            <a:endParaRPr lang="en-US" sz="2200" dirty="0"/>
-          </a:p>
-        </p:txBody>
-      </p:sp>
-      <p:sp>
-        <p:nvSpPr>
-          <p:cNvPr id="25" name="Slide Number Placeholder 0"/>
-          <p:cNvSpPr>
-            <a:spLocks noGrp="1"/>
-          </p:cNvSpPr>
-          <p:nvPr>
-            <p:ph type="sldNum" sz="quarter" idx="4294967295"/>
-          </p:nvPr>
-        </p:nvSpPr>
-        <p:spPr>
-          <a:xfrm>
-            <a:off x="11002975" y="6419088"/>
-            <a:ext cx="640080" cy="274320"/>
-          </a:xfrm>
-          <a:prstGeom prst="rect">
-            <a:avLst/>
-          </a:prstGeom>
-          <a:extLst>
-            <a:ext uri="{C572A759-6A51-4108-AA02-DFA0A04FC94B}">
-              <ma14:wrappingTextBoxFlag xmlns:ma14="http://schemas.microsoft.com/office/mac/drawingml/2011/main" val="0"/>
-            </a:ext>
-          </a:extLst>
-        </p:spPr>
-        <p:txBody>
-          <a:bodyPr/>
-          <a:lstStyle>
-            <a:lvl1pPr>
-              <a:defRPr sz="1000">
-                <a:solidFill>
-                  <a:srgbClr val="CFE3EA"/>
-                </a:solidFill>
-                <a:latin typeface="Calibri"/>
-                <a:ea typeface="Calibri"/>
-                <a:cs typeface="Calibri"/>
-              </a:defRPr>
-            </a:lvl1pPr>
-          </a:lstStyle>
-          <a:p>
-            <a:pPr algn="r"/>
-            <a:fld id="{F7021451-1387-4CA6-816F-3879F97B5CBC}" type="slidenum">
-              <a:rPr b="0" lang="en-US"/>
               <a:t>28</a:t>
             </a:fld>
             <a:endParaRPr lang="en-US"/>
@@ -16290,20 +18047,93 @@
       </p:grpSpPr>
       <p:sp>
         <p:nvSpPr>
-          <p:cNvPr id="2" name="Text 1"/>
+          <p:cNvPr id="2" name="Shape 0"/>
           <p:cNvSpPr/>
-          <p:nvPr>
-            <p:ph idx="101" type="title" hasCustomPrompt="1"/>
-          </p:nvPr>
-        </p:nvSpPr>
-        <p:spPr>
-          <a:xfrm>
-            <a:off x="548640" y="384048"/>
-            <a:ext cx="11094415" cy="868680"/>
+          <p:nvPr/>
+        </p:nvSpPr>
+        <p:spPr>
+          <a:xfrm>
+            <a:off x="548640" y="640080"/>
+            <a:ext cx="168250" cy="168250"/>
           </a:xfrm>
           <a:prstGeom prst="rect">
             <a:avLst/>
           </a:prstGeom>
+          <a:solidFill>
+            <a:srgbClr val="0E7C86"/>
+          </a:solidFill>
+          <a:ln w="12700">
+            <a:solidFill>
+              <a:srgbClr val="0E7C86"/>
+            </a:solidFill>
+            <a:prstDash val="solid"/>
+          </a:ln>
+        </p:spPr>
+      </p:sp>
+      <p:sp>
+        <p:nvSpPr>
+          <p:cNvPr id="3" name="Shape 1"/>
+          <p:cNvSpPr/>
+          <p:nvPr/>
+        </p:nvSpPr>
+        <p:spPr>
+          <a:xfrm>
+            <a:off x="731520" y="640080"/>
+            <a:ext cx="168250" cy="168250"/>
+          </a:xfrm>
+          <a:prstGeom prst="rect">
+            <a:avLst/>
+          </a:prstGeom>
+          <a:solidFill>
+            <a:srgbClr val="C7791B"/>
+          </a:solidFill>
+          <a:ln w="12700">
+            <a:solidFill>
+              <a:srgbClr val="C7791B"/>
+            </a:solidFill>
+            <a:prstDash val="solid"/>
+          </a:ln>
+        </p:spPr>
+      </p:sp>
+      <p:sp>
+        <p:nvSpPr>
+          <p:cNvPr id="4" name="Shape 2"/>
+          <p:cNvSpPr/>
+          <p:nvPr/>
+        </p:nvSpPr>
+        <p:spPr>
+          <a:xfrm>
+            <a:off x="731520" y="822960"/>
+            <a:ext cx="168250" cy="168250"/>
+          </a:xfrm>
+          <a:prstGeom prst="rect">
+            <a:avLst/>
+          </a:prstGeom>
+          <a:solidFill>
+            <a:srgbClr val="0E7C86"/>
+          </a:solidFill>
+          <a:ln w="12700">
+            <a:solidFill>
+              <a:srgbClr val="0E7C86"/>
+            </a:solidFill>
+            <a:prstDash val="solid"/>
+          </a:ln>
+        </p:spPr>
+      </p:sp>
+      <p:sp>
+        <p:nvSpPr>
+          <p:cNvPr id="5" name="Text 3"/>
+          <p:cNvSpPr txBox="1"/>
+          <p:nvPr/>
+        </p:nvSpPr>
+        <p:spPr>
+          <a:xfrm>
+            <a:off x="548640" y="1554480"/>
+            <a:ext cx="11094415" cy="2743200"/>
+          </a:xfrm>
+          <a:prstGeom prst="rect">
+            <a:avLst/>
+          </a:prstGeom>
           <a:noFill/>
           <a:ln/>
         </p:spPr>
@@ -16311,61 +18141,34 @@
           <a:bodyPr wrap="square" lIns="0" tIns="0" rIns="0" bIns="0" rtlCol="0" anchor="ctr"/>
           <a:lstStyle/>
           <a:p>
-            <a:pPr algn="l" indent="0" marL="0">
-              <a:buNone/>
-            </a:pPr>
-            <a:r>
-              <a:rPr lang="en-US" sz="3000" b="1" dirty="0">
-                <a:solidFill>
-                  <a:srgbClr val="2E4A62"/>
+            <a:pPr indent="0" marL="0">
+              <a:buNone/>
+            </a:pPr>
+            <a:r>
+              <a:rPr lang="en-US" sz="4400" b="1" dirty="0">
+                <a:solidFill>
+                  <a:srgbClr val="FFFFFF"/>
                 </a:solidFill>
                 <a:latin typeface="Cambria" pitchFamily="34" charset="0"/>
                 <a:ea typeface="Cambria" pitchFamily="34" charset="-122"/>
                 <a:cs typeface="Cambria" pitchFamily="34" charset="-120"/>
               </a:rPr>
-              <a:t>First deployment</a:t>
-            </a:r>
-            <a:endParaRPr lang="en-US" sz="3000" dirty="0"/>
-          </a:p>
-        </p:txBody>
-      </p:sp>
-      <p:sp>
-        <p:nvSpPr>
-          <p:cNvPr id="3" name="Shape 1"/>
-          <p:cNvSpPr/>
-          <p:nvPr/>
-        </p:nvSpPr>
-        <p:spPr>
-          <a:xfrm>
-            <a:off x="548640" y="1463040"/>
-            <a:ext cx="7406640" cy="4754880"/>
-          </a:xfrm>
-          <a:prstGeom prst="roundRect">
-            <a:avLst>
-              <a:gd name="adj" fmla="val 1538"/>
-            </a:avLst>
-          </a:prstGeom>
-          <a:solidFill>
-            <a:srgbClr val="12202B"/>
-          </a:solidFill>
-          <a:ln w="12700">
-            <a:solidFill>
-              <a:srgbClr val="12202B"/>
-            </a:solidFill>
-            <a:prstDash val="solid"/>
-          </a:ln>
-        </p:spPr>
-      </p:sp>
-      <p:sp>
-        <p:nvSpPr>
-          <p:cNvPr id="4" name="Text 2"/>
+              <a:t>The editor may improve how a game is described, but not what it is or who made it.</a:t>
+            </a:r>
+            <a:endParaRPr lang="en-US" sz="4400" dirty="0"/>
+          </a:p>
+        </p:txBody>
+      </p:sp>
+      <p:sp>
+        <p:nvSpPr>
+          <p:cNvPr id="6" name="Text 4"/>
           <p:cNvSpPr txBox="1"/>
           <p:nvPr/>
         </p:nvSpPr>
         <p:spPr>
           <a:xfrm>
-            <a:off x="777240" y="1645920"/>
-            <a:ext cx="6949440" cy="4389120"/>
+            <a:off x="548640" y="4480560"/>
+            <a:ext cx="11094415" cy="1371600"/>
           </a:xfrm>
           <a:prstGeom prst="rect">
             <a:avLst/>
@@ -16381,602 +18184,17 @@
               <a:buNone/>
             </a:pPr>
             <a:r>
-              <a:rPr lang="en-US" sz="1050" dirty="0">
-                <a:solidFill>
-                  <a:srgbClr val="8FB3A0"/>
-                </a:solidFill>
-                <a:latin typeface="Courier New" pitchFamily="34" charset="0"/>
-                <a:ea typeface="Courier New" pitchFamily="34" charset="-122"/>
-                <a:cs typeface="Courier New" pitchFamily="34" charset="-120"/>
-              </a:rPr>
-              <a:t>#!/usr/bin/env bash</a:t>
-            </a:r>
-            <a:endParaRPr lang="en-US" sz="1050" dirty="0"/>
-          </a:p>
-          <a:p>
-            <a:pPr indent="0" marL="0">
-              <a:buNone/>
-            </a:pPr>
-            <a:r>
-              <a:rPr lang="en-US" sz="1050" dirty="0">
-                <a:solidFill>
-                  <a:srgbClr val="8FB3A0"/>
-                </a:solidFill>
-                <a:latin typeface="Courier New" pitchFamily="34" charset="0"/>
-                <a:ea typeface="Courier New" pitchFamily="34" charset="-122"/>
-                <a:cs typeface="Courier New" pitchFamily="34" charset="-120"/>
-              </a:rPr>
-              <a:t># Administrators: first deployment of a classroom Store.</a:t>
-            </a:r>
-            <a:endParaRPr lang="en-US" sz="1050" dirty="0"/>
-          </a:p>
-          <a:p>
-            <a:pPr indent="0" marL="0">
-              <a:buNone/>
-            </a:pPr>
-            <a:r>
-              <a:rPr lang="en-US" sz="1050" dirty="0">
-                <a:solidFill>
-                  <a:srgbClr val="E6EDF2"/>
-                </a:solidFill>
-                <a:latin typeface="Courier New" pitchFamily="34" charset="0"/>
-                <a:ea typeface="Courier New" pitchFamily="34" charset="-122"/>
-                <a:cs typeface="Courier New" pitchFamily="34" charset="-120"/>
-              </a:rPr>
-              <a:t>git clone https://github.com/riscv-prg32/CartridgeStore.git</a:t>
-            </a:r>
-            <a:endParaRPr lang="en-US" sz="1050" dirty="0"/>
-          </a:p>
-          <a:p>
-            <a:pPr indent="0" marL="0">
-              <a:buNone/>
-            </a:pPr>
-            <a:r>
-              <a:rPr lang="en-US" sz="1050" dirty="0">
-                <a:solidFill>
-                  <a:srgbClr val="E6EDF2"/>
-                </a:solidFill>
-                <a:latin typeface="Courier New" pitchFamily="34" charset="0"/>
-                <a:ea typeface="Courier New" pitchFamily="34" charset="-122"/>
-                <a:cs typeface="Courier New" pitchFamily="34" charset="-120"/>
-              </a:rPr>
-              <a:t>cd CartridgeStore</a:t>
-            </a:r>
-            <a:endParaRPr lang="en-US" sz="1050" dirty="0"/>
-          </a:p>
-          <a:p>
-            <a:pPr indent="0" marL="0">
-              <a:buNone/>
-            </a:pPr>
-            <a:r>
-              <a:rPr lang="en-US" sz="1050" dirty="0">
-                <a:solidFill>
-                  <a:srgbClr val="E6EDF2"/>
-                </a:solidFill>
-                <a:latin typeface="Courier New" pitchFamily="34" charset="0"/>
-                <a:ea typeface="Courier New" pitchFamily="34" charset="-122"/>
-                <a:cs typeface="Courier New" pitchFamily="34" charset="-120"/>
-              </a:rPr>
-              <a:t>export SECRET_KEY="$(python3 -c 'import secrets; print(secrets.token_urlsafe(32))')"</a:t>
-            </a:r>
-            <a:endParaRPr lang="en-US" sz="1050" dirty="0"/>
-          </a:p>
-          <a:p>
-            <a:pPr indent="0" marL="0">
-              <a:buNone/>
-            </a:pPr>
-            <a:r>
-              <a:rPr lang="en-US" sz="1050" dirty="0">
-                <a:solidFill>
-                  <a:srgbClr val="E6EDF2"/>
-                </a:solidFill>
-                <a:latin typeface="Courier New" pitchFamily="34" charset="0"/>
-                <a:ea typeface="Courier New" pitchFamily="34" charset="-122"/>
-                <a:cs typeface="Courier New" pitchFamily="34" charset="-120"/>
-              </a:rPr>
-              <a:t>docker compose up --build -d</a:t>
-            </a:r>
-            <a:endParaRPr lang="en-US" sz="1050" dirty="0"/>
-          </a:p>
-          <a:p>
-            <a:pPr indent="0" marL="0">
-              <a:buNone/>
-            </a:pPr>
-            <a:r>
-              <a:rPr lang="en-US" sz="1050" dirty="0">
-                <a:solidFill>
-                  <a:srgbClr val="E6EDF2"/>
-                </a:solidFill>
-                <a:latin typeface="Courier New" pitchFamily="34" charset="0"/>
-                <a:ea typeface="Courier New" pitchFamily="34" charset="-122"/>
-                <a:cs typeface="Courier New" pitchFamily="34" charset="-120"/>
-              </a:rPr>
-              <a:t>curl http://127.0.0.1:5080/.well-known/prg32-store.json  </a:t>
-            </a:r>
-            <a:pPr indent="0" marL="0">
-              <a:buNone/>
-            </a:pPr>
-            <a:r>
-              <a:rPr lang="en-US" sz="1050" dirty="0">
-                <a:solidFill>
-                  <a:srgbClr val="8FB3A0"/>
-                </a:solidFill>
-                <a:latin typeface="Courier New" pitchFamily="34" charset="0"/>
-                <a:ea typeface="Courier New" pitchFamily="34" charset="-122"/>
-                <a:cs typeface="Courier New" pitchFamily="34" charset="-120"/>
-              </a:rPr>
-              <a:t> # health check</a:t>
-            </a:r>
-            <a:endParaRPr lang="en-US" sz="1050" dirty="0"/>
-          </a:p>
-          <a:p>
-            <a:pPr indent="0" marL="0">
-              <a:buNone/>
-            </a:pPr>
-            <a:r>
-              <a:rPr lang="en-US" sz="1050" dirty="0">
-                <a:solidFill>
-                  <a:srgbClr val="8FB3A0"/>
-                </a:solidFill>
-                <a:latin typeface="Courier New" pitchFamily="34" charset="0"/>
-                <a:ea typeface="Courier New" pitchFamily="34" charset="-122"/>
-                <a:cs typeface="Courier New" pitchFamily="34" charset="-120"/>
-              </a:rPr>
-              <a:t># Then log in as admin at /auth/login and change the default password.</a:t>
-            </a:r>
-            <a:endParaRPr lang="en-US" sz="1050" dirty="0"/>
-          </a:p>
-        </p:txBody>
-      </p:sp>
-      <p:sp>
-        <p:nvSpPr>
-          <p:cNvPr id="5" name="Shape 3"/>
-          <p:cNvSpPr/>
-          <p:nvPr/>
-        </p:nvSpPr>
-        <p:spPr>
-          <a:xfrm>
-            <a:off x="8229600" y="1463040"/>
-            <a:ext cx="3413455" cy="1037844"/>
-          </a:xfrm>
-          <a:prstGeom prst="roundRect">
-            <a:avLst>
-              <a:gd name="adj" fmla="val 7048"/>
-            </a:avLst>
-          </a:prstGeom>
-          <a:solidFill>
-            <a:srgbClr val="EEF2F4"/>
-          </a:solidFill>
-          <a:ln w="12700">
-            <a:solidFill>
-              <a:srgbClr val="EEF2F4"/>
-            </a:solidFill>
-            <a:prstDash val="solid"/>
-          </a:ln>
-        </p:spPr>
-      </p:sp>
-      <p:sp>
-        <p:nvSpPr>
-          <p:cNvPr id="6" name="Text 4"/>
-          <p:cNvSpPr txBox="1"/>
-          <p:nvPr/>
-        </p:nvSpPr>
-        <p:spPr>
-          <a:xfrm>
-            <a:off x="8394192" y="1627632"/>
-            <a:ext cx="365760" cy="365760"/>
-          </a:xfrm>
-          <a:prstGeom prst="roundRect">
-            <a:avLst>
-              <a:gd name="adj" fmla="val 20000"/>
-            </a:avLst>
-          </a:prstGeom>
-          <a:solidFill>
-            <a:srgbClr val="C7791B"/>
-          </a:solidFill>
-          <a:ln>
-            <a:solidFill>
-              <a:srgbClr val="C7791B"/>
-            </a:solidFill>
-          </a:ln>
-        </p:spPr>
-        <p:txBody>
-          <a:bodyPr wrap="square" lIns="0" tIns="0" rIns="0" bIns="0" rtlCol="0" anchor="ctr"/>
-          <a:lstStyle/>
-          <a:p>
-            <a:pPr algn="ctr" indent="0" marL="0">
-              <a:buNone/>
-            </a:pPr>
-            <a:r>
-              <a:rPr lang="en-US" sz="1400" b="1" dirty="0">
-                <a:solidFill>
-                  <a:srgbClr val="FFFFFF"/>
+              <a:rPr lang="en-US" sz="2200" dirty="0">
+                <a:solidFill>
+                  <a:srgbClr val="CFE3EA"/>
                 </a:solidFill>
                 <a:latin typeface="Calibri" pitchFamily="34" charset="0"/>
                 <a:ea typeface="Calibri" pitchFamily="34" charset="-122"/>
                 <a:cs typeface="Calibri" pitchFamily="34" charset="-120"/>
               </a:rPr>
-              <a:t>1</a:t>
-            </a:r>
-            <a:endParaRPr lang="en-US" sz="1400" dirty="0"/>
-          </a:p>
-        </p:txBody>
-      </p:sp>
-      <p:sp>
-        <p:nvSpPr>
-          <p:cNvPr id="7" name="Text 5"/>
-          <p:cNvSpPr txBox="1"/>
-          <p:nvPr/>
-        </p:nvSpPr>
-        <p:spPr>
-          <a:xfrm>
-            <a:off x="8915400" y="1600200"/>
-            <a:ext cx="2544775" cy="763524"/>
-          </a:xfrm>
-          <a:prstGeom prst="rect">
-            <a:avLst/>
-          </a:prstGeom>
-          <a:noFill/>
-          <a:ln/>
-        </p:spPr>
-        <p:txBody>
-          <a:bodyPr wrap="square" lIns="0" tIns="0" rIns="0" bIns="0" rtlCol="0" anchor="ctr"/>
-          <a:lstStyle/>
-          <a:p>
-            <a:pPr indent="0" marL="0">
-              <a:buNone/>
-            </a:pPr>
-            <a:r>
-              <a:rPr lang="en-US" sz="1700" dirty="0">
-                <a:solidFill>
-                  <a:srgbClr val="1B2530"/>
-                </a:solidFill>
-                <a:latin typeface="Calibri" pitchFamily="34" charset="0"/>
-                <a:ea typeface="Calibri" pitchFamily="34" charset="-122"/>
-                <a:cs typeface="Calibri" pitchFamily="34" charset="-120"/>
-              </a:rPr>
-              <a:t>SECRET_KEY signs sessions: required</a:t>
-            </a:r>
-            <a:endParaRPr lang="en-US" sz="1700" dirty="0"/>
-          </a:p>
-        </p:txBody>
-      </p:sp>
-      <p:sp>
-        <p:nvSpPr>
-          <p:cNvPr id="8" name="Shape 6"/>
-          <p:cNvSpPr/>
-          <p:nvPr/>
-        </p:nvSpPr>
-        <p:spPr>
-          <a:xfrm>
-            <a:off x="8229600" y="2702052"/>
-            <a:ext cx="3413455" cy="1037844"/>
-          </a:xfrm>
-          <a:prstGeom prst="roundRect">
-            <a:avLst>
-              <a:gd name="adj" fmla="val 7048"/>
-            </a:avLst>
-          </a:prstGeom>
-          <a:solidFill>
-            <a:srgbClr val="EEF2F4"/>
-          </a:solidFill>
-          <a:ln w="12700">
-            <a:solidFill>
-              <a:srgbClr val="EEF2F4"/>
-            </a:solidFill>
-            <a:prstDash val="solid"/>
-          </a:ln>
-        </p:spPr>
-      </p:sp>
-      <p:sp>
-        <p:nvSpPr>
-          <p:cNvPr id="9" name="Text 7"/>
-          <p:cNvSpPr txBox="1"/>
-          <p:nvPr/>
-        </p:nvSpPr>
-        <p:spPr>
-          <a:xfrm>
-            <a:off x="8394192" y="2866644"/>
-            <a:ext cx="365760" cy="365760"/>
-          </a:xfrm>
-          <a:prstGeom prst="roundRect">
-            <a:avLst>
-              <a:gd name="adj" fmla="val 20000"/>
-            </a:avLst>
-          </a:prstGeom>
-          <a:solidFill>
-            <a:srgbClr val="C7791B"/>
-          </a:solidFill>
-          <a:ln>
-            <a:solidFill>
-              <a:srgbClr val="C7791B"/>
-            </a:solidFill>
-          </a:ln>
-        </p:spPr>
-        <p:txBody>
-          <a:bodyPr wrap="square" lIns="0" tIns="0" rIns="0" bIns="0" rtlCol="0" anchor="ctr"/>
-          <a:lstStyle/>
-          <a:p>
-            <a:pPr algn="ctr" indent="0" marL="0">
-              <a:buNone/>
-            </a:pPr>
-            <a:r>
-              <a:rPr lang="en-US" sz="1400" b="1" dirty="0">
-                <a:solidFill>
-                  <a:srgbClr val="FFFFFF"/>
-                </a:solidFill>
-                <a:latin typeface="Calibri" pitchFamily="34" charset="0"/>
-                <a:ea typeface="Calibri" pitchFamily="34" charset="-122"/>
-                <a:cs typeface="Calibri" pitchFamily="34" charset="-120"/>
-              </a:rPr>
-              <a:t>2</a:t>
-            </a:r>
-            <a:endParaRPr lang="en-US" sz="1400" dirty="0"/>
-          </a:p>
-        </p:txBody>
-      </p:sp>
-      <p:sp>
-        <p:nvSpPr>
-          <p:cNvPr id="10" name="Text 8"/>
-          <p:cNvSpPr txBox="1"/>
-          <p:nvPr/>
-        </p:nvSpPr>
-        <p:spPr>
-          <a:xfrm>
-            <a:off x="8915400" y="2839212"/>
-            <a:ext cx="2544775" cy="763524"/>
-          </a:xfrm>
-          <a:prstGeom prst="rect">
-            <a:avLst/>
-          </a:prstGeom>
-          <a:noFill/>
-          <a:ln/>
-        </p:spPr>
-        <p:txBody>
-          <a:bodyPr wrap="square" lIns="0" tIns="0" rIns="0" bIns="0" rtlCol="0" anchor="ctr"/>
-          <a:lstStyle/>
-          <a:p>
-            <a:pPr indent="0" marL="0">
-              <a:buNone/>
-            </a:pPr>
-            <a:r>
-              <a:rPr lang="en-US" sz="1700" dirty="0">
-                <a:solidFill>
-                  <a:srgbClr val="1B2530"/>
-                </a:solidFill>
-                <a:latin typeface="Calibri" pitchFamily="34" charset="0"/>
-                <a:ea typeface="Calibri" pitchFamily="34" charset="-122"/>
-                <a:cs typeface="Calibri" pitchFamily="34" charset="-120"/>
-              </a:rPr>
-              <a:t>Data persists in ./data</a:t>
-            </a:r>
-            <a:endParaRPr lang="en-US" sz="1700" dirty="0"/>
-          </a:p>
-        </p:txBody>
-      </p:sp>
-      <p:sp>
-        <p:nvSpPr>
-          <p:cNvPr id="11" name="Shape 9"/>
-          <p:cNvSpPr/>
-          <p:nvPr/>
-        </p:nvSpPr>
-        <p:spPr>
-          <a:xfrm>
-            <a:off x="8229600" y="3941064"/>
-            <a:ext cx="3413455" cy="1037844"/>
-          </a:xfrm>
-          <a:prstGeom prst="roundRect">
-            <a:avLst>
-              <a:gd name="adj" fmla="val 7048"/>
-            </a:avLst>
-          </a:prstGeom>
-          <a:solidFill>
-            <a:srgbClr val="EEF2F4"/>
-          </a:solidFill>
-          <a:ln w="12700">
-            <a:solidFill>
-              <a:srgbClr val="EEF2F4"/>
-            </a:solidFill>
-            <a:prstDash val="solid"/>
-          </a:ln>
-        </p:spPr>
-      </p:sp>
-      <p:sp>
-        <p:nvSpPr>
-          <p:cNvPr id="12" name="Text 10"/>
-          <p:cNvSpPr txBox="1"/>
-          <p:nvPr/>
-        </p:nvSpPr>
-        <p:spPr>
-          <a:xfrm>
-            <a:off x="8394192" y="4105656"/>
-            <a:ext cx="365760" cy="365760"/>
-          </a:xfrm>
-          <a:prstGeom prst="roundRect">
-            <a:avLst>
-              <a:gd name="adj" fmla="val 20000"/>
-            </a:avLst>
-          </a:prstGeom>
-          <a:solidFill>
-            <a:srgbClr val="C7791B"/>
-          </a:solidFill>
-          <a:ln>
-            <a:solidFill>
-              <a:srgbClr val="C7791B"/>
-            </a:solidFill>
-          </a:ln>
-        </p:spPr>
-        <p:txBody>
-          <a:bodyPr wrap="square" lIns="0" tIns="0" rIns="0" bIns="0" rtlCol="0" anchor="ctr"/>
-          <a:lstStyle/>
-          <a:p>
-            <a:pPr algn="ctr" indent="0" marL="0">
-              <a:buNone/>
-            </a:pPr>
-            <a:r>
-              <a:rPr lang="en-US" sz="1400" b="1" dirty="0">
-                <a:solidFill>
-                  <a:srgbClr val="FFFFFF"/>
-                </a:solidFill>
-                <a:latin typeface="Calibri" pitchFamily="34" charset="0"/>
-                <a:ea typeface="Calibri" pitchFamily="34" charset="-122"/>
-                <a:cs typeface="Calibri" pitchFamily="34" charset="-120"/>
-              </a:rPr>
-              <a:t>3</a:t>
-            </a:r>
-            <a:endParaRPr lang="en-US" sz="1400" dirty="0"/>
-          </a:p>
-        </p:txBody>
-      </p:sp>
-      <p:sp>
-        <p:nvSpPr>
-          <p:cNvPr id="13" name="Text 11"/>
-          <p:cNvSpPr txBox="1"/>
-          <p:nvPr/>
-        </p:nvSpPr>
-        <p:spPr>
-          <a:xfrm>
-            <a:off x="8915400" y="4078224"/>
-            <a:ext cx="2544775" cy="763524"/>
-          </a:xfrm>
-          <a:prstGeom prst="rect">
-            <a:avLst/>
-          </a:prstGeom>
-          <a:noFill/>
-          <a:ln/>
-        </p:spPr>
-        <p:txBody>
-          <a:bodyPr wrap="square" lIns="0" tIns="0" rIns="0" bIns="0" rtlCol="0" anchor="ctr"/>
-          <a:lstStyle/>
-          <a:p>
-            <a:pPr indent="0" marL="0">
-              <a:buNone/>
-            </a:pPr>
-            <a:r>
-              <a:rPr lang="en-US" sz="1700" dirty="0">
-                <a:solidFill>
-                  <a:srgbClr val="1B2530"/>
-                </a:solidFill>
-                <a:latin typeface="Calibri" pitchFamily="34" charset="0"/>
-                <a:ea typeface="Calibri" pitchFamily="34" charset="-122"/>
-                <a:cs typeface="Calibri" pitchFamily="34" charset="-120"/>
-              </a:rPr>
-              <a:t>Health check: the discovery document</a:t>
-            </a:r>
-            <a:endParaRPr lang="en-US" sz="1700" dirty="0"/>
-          </a:p>
-        </p:txBody>
-      </p:sp>
-      <p:sp>
-        <p:nvSpPr>
-          <p:cNvPr id="14" name="Shape 12"/>
-          <p:cNvSpPr/>
-          <p:nvPr/>
-        </p:nvSpPr>
-        <p:spPr>
-          <a:xfrm>
-            <a:off x="8229600" y="5180076"/>
-            <a:ext cx="3413455" cy="1037844"/>
-          </a:xfrm>
-          <a:prstGeom prst="roundRect">
-            <a:avLst>
-              <a:gd name="adj" fmla="val 7048"/>
-            </a:avLst>
-          </a:prstGeom>
-          <a:solidFill>
-            <a:srgbClr val="EEF2F4"/>
-          </a:solidFill>
-          <a:ln w="12700">
-            <a:solidFill>
-              <a:srgbClr val="EEF2F4"/>
-            </a:solidFill>
-            <a:prstDash val="solid"/>
-          </a:ln>
-        </p:spPr>
-      </p:sp>
-      <p:sp>
-        <p:nvSpPr>
-          <p:cNvPr id="15" name="Text 13"/>
-          <p:cNvSpPr txBox="1"/>
-          <p:nvPr/>
-        </p:nvSpPr>
-        <p:spPr>
-          <a:xfrm>
-            <a:off x="8394192" y="5344668"/>
-            <a:ext cx="365760" cy="365760"/>
-          </a:xfrm>
-          <a:prstGeom prst="roundRect">
-            <a:avLst>
-              <a:gd name="adj" fmla="val 20000"/>
-            </a:avLst>
-          </a:prstGeom>
-          <a:solidFill>
-            <a:srgbClr val="C7791B"/>
-          </a:solidFill>
-          <a:ln>
-            <a:solidFill>
-              <a:srgbClr val="C7791B"/>
-            </a:solidFill>
-          </a:ln>
-        </p:spPr>
-        <p:txBody>
-          <a:bodyPr wrap="square" lIns="0" tIns="0" rIns="0" bIns="0" rtlCol="0" anchor="ctr"/>
-          <a:lstStyle/>
-          <a:p>
-            <a:pPr algn="ctr" indent="0" marL="0">
-              <a:buNone/>
-            </a:pPr>
-            <a:r>
-              <a:rPr lang="en-US" sz="1400" b="1" dirty="0">
-                <a:solidFill>
-                  <a:srgbClr val="FFFFFF"/>
-                </a:solidFill>
-                <a:latin typeface="Calibri" pitchFamily="34" charset="0"/>
-                <a:ea typeface="Calibri" pitchFamily="34" charset="-122"/>
-                <a:cs typeface="Calibri" pitchFamily="34" charset="-120"/>
-              </a:rPr>
-              <a:t>4</a:t>
-            </a:r>
-            <a:endParaRPr lang="en-US" sz="1400" dirty="0"/>
-          </a:p>
-        </p:txBody>
-      </p:sp>
-      <p:sp>
-        <p:nvSpPr>
-          <p:cNvPr id="16" name="Text 14"/>
-          <p:cNvSpPr txBox="1"/>
-          <p:nvPr/>
-        </p:nvSpPr>
-        <p:spPr>
-          <a:xfrm>
-            <a:off x="8915400" y="5317236"/>
-            <a:ext cx="2544775" cy="763524"/>
-          </a:xfrm>
-          <a:prstGeom prst="rect">
-            <a:avLst/>
-          </a:prstGeom>
-          <a:noFill/>
-          <a:ln/>
-        </p:spPr>
-        <p:txBody>
-          <a:bodyPr wrap="square" lIns="0" tIns="0" rIns="0" bIns="0" rtlCol="0" anchor="ctr"/>
-          <a:lstStyle/>
-          <a:p>
-            <a:pPr indent="0" marL="0">
-              <a:buNone/>
-            </a:pPr>
-            <a:r>
-              <a:rPr lang="en-US" sz="1700" dirty="0">
-                <a:solidFill>
-                  <a:srgbClr val="1B2530"/>
-                </a:solidFill>
-                <a:latin typeface="Calibri" pitchFamily="34" charset="0"/>
-                <a:ea typeface="Calibri" pitchFamily="34" charset="-122"/>
-                <a:cs typeface="Calibri" pitchFamily="34" charset="-120"/>
-              </a:rPr>
-              <a:t>Then change the default password</a:t>
-            </a:r>
-            <a:endParaRPr lang="en-US" sz="1700" dirty="0"/>
+              <a:t>The same separation a journal observes between copy-editing a paper and changing its authors.</a:t>
+            </a:r>
+            <a:endParaRPr lang="en-US" sz="2200" dirty="0"/>
           </a:p>
         </p:txBody>
       </p:sp>
@@ -17010,7 +18228,7 @@
             <a:lvl1pPr>
               <a:defRPr sz="1000">
                 <a:solidFill>
-                  <a:srgbClr val="5B6B78"/>
+                  <a:srgbClr val="CFE3EA"/>
                 </a:solidFill>
                 <a:latin typeface="Calibri"/>
                 <a:ea typeface="Calibri"/>
@@ -18231,16 +19449,14 @@
       </p:grpSpPr>
       <p:sp>
         <p:nvSpPr>
-          <p:cNvPr id="2" name="Text 1"/>
-          <p:cNvSpPr/>
-          <p:nvPr>
-            <p:ph idx="101" type="title" hasCustomPrompt="1"/>
-          </p:nvPr>
-        </p:nvSpPr>
-        <p:spPr>
-          <a:xfrm>
-            <a:off x="548640" y="384048"/>
-            <a:ext cx="11094415" cy="868680"/>
+          <p:cNvPr id="2" name="Text 0"/>
+          <p:cNvSpPr txBox="1"/>
+          <p:nvPr/>
+        </p:nvSpPr>
+        <p:spPr>
+          <a:xfrm>
+            <a:off x="548640" y="1371600"/>
+            <a:ext cx="2743200" cy="1188720"/>
           </a:xfrm>
           <a:prstGeom prst="rect">
             <a:avLst/>
@@ -18249,24 +19465,24 @@
           <a:ln/>
         </p:spPr>
         <p:txBody>
-          <a:bodyPr wrap="square" lIns="0" tIns="0" rIns="0" bIns="0" rtlCol="0" anchor="ctr"/>
-          <a:lstStyle/>
-          <a:p>
-            <a:pPr algn="l" indent="0" marL="0">
-              <a:buNone/>
-            </a:pPr>
-            <a:r>
-              <a:rPr lang="en-US" sz="3000" b="1" dirty="0">
-                <a:solidFill>
-                  <a:srgbClr val="2E4A62"/>
+          <a:bodyPr wrap="square" lIns="0" tIns="0" rIns="0" bIns="0" rtlCol="0" anchor="t"/>
+          <a:lstStyle/>
+          <a:p>
+            <a:pPr indent="0" marL="0">
+              <a:buNone/>
+            </a:pPr>
+            <a:r>
+              <a:rPr lang="en-US" sz="8000" b="1" dirty="0">
+                <a:solidFill>
+                  <a:srgbClr val="5CC7D1"/>
                 </a:solidFill>
                 <a:latin typeface="Cambria" pitchFamily="34" charset="0"/>
                 <a:ea typeface="Cambria" pitchFamily="34" charset="-122"/>
                 <a:cs typeface="Cambria" pitchFamily="34" charset="-120"/>
               </a:rPr>
-              <a:t>Two things to do before anyone connects</a:t>
-            </a:r>
-            <a:endParaRPr lang="en-US" sz="3000" dirty="0"/>
+              <a:t>05</a:t>
+            </a:r>
+            <a:endParaRPr lang="en-US" sz="8000" dirty="0"/>
           </a:p>
         </p:txBody>
       </p:sp>
@@ -18278,444 +19494,73 @@
         </p:nvSpPr>
         <p:spPr>
           <a:xfrm>
-            <a:off x="548640" y="1481328"/>
-            <a:ext cx="457200" cy="457200"/>
-          </a:xfrm>
-          <a:prstGeom prst="roundRect">
-            <a:avLst>
-              <a:gd name="adj" fmla="val 16000"/>
-            </a:avLst>
-          </a:prstGeom>
-          <a:solidFill>
-            <a:srgbClr val="0E7C86"/>
-          </a:solidFill>
-          <a:ln>
-            <a:solidFill>
-              <a:srgbClr val="0E7C86"/>
-            </a:solidFill>
-          </a:ln>
+            <a:off x="548640" y="2834640"/>
+            <a:ext cx="11094415" cy="1371600"/>
+          </a:xfrm>
+          <a:prstGeom prst="rect">
+            <a:avLst/>
+          </a:prstGeom>
+          <a:noFill/>
+          <a:ln/>
         </p:spPr>
         <p:txBody>
           <a:bodyPr wrap="square" lIns="0" tIns="0" rIns="0" bIns="0" rtlCol="0" anchor="ctr"/>
           <a:lstStyle/>
           <a:p>
-            <a:pPr algn="ctr" indent="0" marL="0">
-              <a:buNone/>
-            </a:pPr>
-            <a:r>
-              <a:rPr lang="en-US" sz="1700" b="1" dirty="0">
+            <a:pPr indent="0" marL="0">
+              <a:buNone/>
+            </a:pPr>
+            <a:r>
+              <a:rPr lang="en-US" sz="4200" b="1" dirty="0">
                 <a:solidFill>
                   <a:srgbClr val="FFFFFF"/>
+                </a:solidFill>
+                <a:latin typeface="Cambria" pitchFamily="34" charset="0"/>
+                <a:ea typeface="Cambria" pitchFamily="34" charset="-122"/>
+                <a:cs typeface="Cambria" pitchFamily="34" charset="-120"/>
+              </a:rPr>
+              <a:t>The administrator</a:t>
+            </a:r>
+            <a:endParaRPr lang="en-US" sz="4200" dirty="0"/>
+          </a:p>
+        </p:txBody>
+      </p:sp>
+      <p:sp>
+        <p:nvSpPr>
+          <p:cNvPr id="4" name="Text 2"/>
+          <p:cNvSpPr txBox="1"/>
+          <p:nvPr/>
+        </p:nvSpPr>
+        <p:spPr>
+          <a:xfrm>
+            <a:off x="548640" y="4389120"/>
+            <a:ext cx="11094415" cy="1097280"/>
+          </a:xfrm>
+          <a:prstGeom prst="rect">
+            <a:avLst/>
+          </a:prstGeom>
+          <a:noFill/>
+          <a:ln/>
+        </p:spPr>
+        <p:txBody>
+          <a:bodyPr wrap="square" lIns="0" tIns="0" rIns="0" bIns="0" rtlCol="0" anchor="t"/>
+          <a:lstStyle/>
+          <a:p>
+            <a:pPr indent="0" marL="0">
+              <a:buNone/>
+            </a:pPr>
+            <a:r>
+              <a:rPr lang="en-US" sz="2200" dirty="0">
+                <a:solidFill>
+                  <a:srgbClr val="CFE3EA"/>
                 </a:solidFill>
                 <a:latin typeface="Calibri" pitchFamily="34" charset="0"/>
                 <a:ea typeface="Calibri" pitchFamily="34" charset="-122"/>
                 <a:cs typeface="Calibri" pitchFamily="34" charset="-120"/>
               </a:rPr>
-              <a:t>1</a:t>
-            </a:r>
-            <a:endParaRPr lang="en-US" sz="1700" dirty="0"/>
-          </a:p>
-        </p:txBody>
-      </p:sp>
-      <p:sp>
-        <p:nvSpPr>
-          <p:cNvPr id="4" name="Text 2"/>
-          <p:cNvSpPr txBox="1"/>
-          <p:nvPr/>
-        </p:nvSpPr>
-        <p:spPr>
-          <a:xfrm>
-            <a:off x="1280160" y="1463040"/>
-            <a:ext cx="6492240" cy="1065276"/>
-          </a:xfrm>
-          <a:prstGeom prst="rect">
-            <a:avLst/>
-          </a:prstGeom>
-          <a:noFill/>
-          <a:ln/>
-        </p:spPr>
-        <p:txBody>
-          <a:bodyPr wrap="square" lIns="0" tIns="0" rIns="0" bIns="0" rtlCol="0" anchor="t"/>
-          <a:lstStyle/>
-          <a:p>
-            <a:pPr indent="0" marL="0">
-              <a:buNone/>
-            </a:pPr>
-            <a:r>
-              <a:rPr lang="en-US" sz="2400" dirty="0">
-                <a:solidFill>
-                  <a:srgbClr val="1B2530"/>
-                </a:solidFill>
-                <a:latin typeface="Calibri" pitchFamily="34" charset="0"/>
-                <a:ea typeface="Calibri" pitchFamily="34" charset="-122"/>
-                <a:cs typeface="Calibri" pitchFamily="34" charset="-120"/>
-              </a:rPr>
-              <a:t>Change the default administrator password (admin / password)</a:t>
-            </a:r>
-            <a:endParaRPr lang="en-US" sz="2400" dirty="0"/>
-          </a:p>
-        </p:txBody>
-      </p:sp>
-      <p:sp>
-        <p:nvSpPr>
-          <p:cNvPr id="5" name="Text 3"/>
-          <p:cNvSpPr txBox="1"/>
-          <p:nvPr/>
-        </p:nvSpPr>
-        <p:spPr>
-          <a:xfrm>
-            <a:off x="548640" y="2711196"/>
-            <a:ext cx="457200" cy="457200"/>
-          </a:xfrm>
-          <a:prstGeom prst="roundRect">
-            <a:avLst>
-              <a:gd name="adj" fmla="val 16000"/>
-            </a:avLst>
-          </a:prstGeom>
-          <a:solidFill>
-            <a:srgbClr val="0E7C86"/>
-          </a:solidFill>
-          <a:ln>
-            <a:solidFill>
-              <a:srgbClr val="0E7C86"/>
-            </a:solidFill>
-          </a:ln>
-        </p:spPr>
-        <p:txBody>
-          <a:bodyPr wrap="square" lIns="0" tIns="0" rIns="0" bIns="0" rtlCol="0" anchor="ctr"/>
-          <a:lstStyle/>
-          <a:p>
-            <a:pPr algn="ctr" indent="0" marL="0">
-              <a:buNone/>
-            </a:pPr>
-            <a:r>
-              <a:rPr lang="en-US" sz="1700" b="1" dirty="0">
-                <a:solidFill>
-                  <a:srgbClr val="FFFFFF"/>
-                </a:solidFill>
-                <a:latin typeface="Calibri" pitchFamily="34" charset="0"/>
-                <a:ea typeface="Calibri" pitchFamily="34" charset="-122"/>
-                <a:cs typeface="Calibri" pitchFamily="34" charset="-120"/>
-              </a:rPr>
-              <a:t>2</a:t>
-            </a:r>
-            <a:endParaRPr lang="en-US" sz="1700" dirty="0"/>
-          </a:p>
-        </p:txBody>
-      </p:sp>
-      <p:sp>
-        <p:nvSpPr>
-          <p:cNvPr id="6" name="Text 4"/>
-          <p:cNvSpPr txBox="1"/>
-          <p:nvPr/>
-        </p:nvSpPr>
-        <p:spPr>
-          <a:xfrm>
-            <a:off x="1280160" y="2692908"/>
-            <a:ext cx="6492240" cy="1065276"/>
-          </a:xfrm>
-          <a:prstGeom prst="rect">
-            <a:avLst/>
-          </a:prstGeom>
-          <a:noFill/>
-          <a:ln/>
-        </p:spPr>
-        <p:txBody>
-          <a:bodyPr wrap="square" lIns="0" tIns="0" rIns="0" bIns="0" rtlCol="0" anchor="t"/>
-          <a:lstStyle/>
-          <a:p>
-            <a:pPr indent="0" marL="0">
-              <a:buNone/>
-            </a:pPr>
-            <a:r>
-              <a:rPr lang="en-US" sz="2400" dirty="0">
-                <a:solidFill>
-                  <a:srgbClr val="1B2530"/>
-                </a:solidFill>
-                <a:latin typeface="Calibri" pitchFamily="34" charset="0"/>
-                <a:ea typeface="Calibri" pitchFamily="34" charset="-122"/>
-                <a:cs typeface="Calibri" pitchFamily="34" charset="-120"/>
-              </a:rPr>
-              <a:t>Set a long random SECRET_KEY and keep it with the deployment's secrets</a:t>
-            </a:r>
-            <a:endParaRPr lang="en-US" sz="2400" dirty="0"/>
-          </a:p>
-        </p:txBody>
-      </p:sp>
-      <p:sp>
-        <p:nvSpPr>
-          <p:cNvPr id="7" name="Text 5"/>
-          <p:cNvSpPr txBox="1"/>
-          <p:nvPr/>
-        </p:nvSpPr>
-        <p:spPr>
-          <a:xfrm>
-            <a:off x="548640" y="3941064"/>
-            <a:ext cx="457200" cy="457200"/>
-          </a:xfrm>
-          <a:prstGeom prst="roundRect">
-            <a:avLst>
-              <a:gd name="adj" fmla="val 16000"/>
-            </a:avLst>
-          </a:prstGeom>
-          <a:solidFill>
-            <a:srgbClr val="0E7C86"/>
-          </a:solidFill>
-          <a:ln>
-            <a:solidFill>
-              <a:srgbClr val="0E7C86"/>
-            </a:solidFill>
-          </a:ln>
-        </p:spPr>
-        <p:txBody>
-          <a:bodyPr wrap="square" lIns="0" tIns="0" rIns="0" bIns="0" rtlCol="0" anchor="ctr"/>
-          <a:lstStyle/>
-          <a:p>
-            <a:pPr algn="ctr" indent="0" marL="0">
-              <a:buNone/>
-            </a:pPr>
-            <a:r>
-              <a:rPr lang="en-US" sz="1700" b="1" dirty="0">
-                <a:solidFill>
-                  <a:srgbClr val="FFFFFF"/>
-                </a:solidFill>
-                <a:latin typeface="Calibri" pitchFamily="34" charset="0"/>
-                <a:ea typeface="Calibri" pitchFamily="34" charset="-122"/>
-                <a:cs typeface="Calibri" pitchFamily="34" charset="-120"/>
-              </a:rPr>
-              <a:t>3</a:t>
-            </a:r>
-            <a:endParaRPr lang="en-US" sz="1700" dirty="0"/>
-          </a:p>
-        </p:txBody>
-      </p:sp>
-      <p:sp>
-        <p:nvSpPr>
-          <p:cNvPr id="8" name="Text 6"/>
-          <p:cNvSpPr txBox="1"/>
-          <p:nvPr/>
-        </p:nvSpPr>
-        <p:spPr>
-          <a:xfrm>
-            <a:off x="1280160" y="3922776"/>
-            <a:ext cx="6492240" cy="1065276"/>
-          </a:xfrm>
-          <a:prstGeom prst="rect">
-            <a:avLst/>
-          </a:prstGeom>
-          <a:noFill/>
-          <a:ln/>
-        </p:spPr>
-        <p:txBody>
-          <a:bodyPr wrap="square" lIns="0" tIns="0" rIns="0" bIns="0" rtlCol="0" anchor="t"/>
-          <a:lstStyle/>
-          <a:p>
-            <a:pPr indent="0" marL="0">
-              <a:buNone/>
-            </a:pPr>
-            <a:r>
-              <a:rPr lang="en-US" sz="2400" dirty="0">
-                <a:solidFill>
-                  <a:srgbClr val="1B2530"/>
-                </a:solidFill>
-                <a:latin typeface="Calibri" pitchFamily="34" charset="0"/>
-                <a:ea typeface="Calibri" pitchFamily="34" charset="-122"/>
-                <a:cs typeface="Calibri" pitchFamily="34" charset="-120"/>
-              </a:rPr>
-              <a:t>Then: SMTP for registration links, or they are only logged</a:t>
-            </a:r>
-            <a:endParaRPr lang="en-US" sz="2400" dirty="0"/>
-          </a:p>
-        </p:txBody>
-      </p:sp>
-      <p:sp>
-        <p:nvSpPr>
-          <p:cNvPr id="9" name="Text 7"/>
-          <p:cNvSpPr txBox="1"/>
-          <p:nvPr/>
-        </p:nvSpPr>
-        <p:spPr>
-          <a:xfrm>
-            <a:off x="548640" y="5170932"/>
-            <a:ext cx="457200" cy="457200"/>
-          </a:xfrm>
-          <a:prstGeom prst="roundRect">
-            <a:avLst>
-              <a:gd name="adj" fmla="val 16000"/>
-            </a:avLst>
-          </a:prstGeom>
-          <a:solidFill>
-            <a:srgbClr val="0E7C86"/>
-          </a:solidFill>
-          <a:ln>
-            <a:solidFill>
-              <a:srgbClr val="0E7C86"/>
-            </a:solidFill>
-          </a:ln>
-        </p:spPr>
-        <p:txBody>
-          <a:bodyPr wrap="square" lIns="0" tIns="0" rIns="0" bIns="0" rtlCol="0" anchor="ctr"/>
-          <a:lstStyle/>
-          <a:p>
-            <a:pPr algn="ctr" indent="0" marL="0">
-              <a:buNone/>
-            </a:pPr>
-            <a:r>
-              <a:rPr lang="en-US" sz="1700" b="1" dirty="0">
-                <a:solidFill>
-                  <a:srgbClr val="FFFFFF"/>
-                </a:solidFill>
-                <a:latin typeface="Calibri" pitchFamily="34" charset="0"/>
-                <a:ea typeface="Calibri" pitchFamily="34" charset="-122"/>
-                <a:cs typeface="Calibri" pitchFamily="34" charset="-120"/>
-              </a:rPr>
-              <a:t>4</a:t>
-            </a:r>
-            <a:endParaRPr lang="en-US" sz="1700" dirty="0"/>
-          </a:p>
-        </p:txBody>
-      </p:sp>
-      <p:sp>
-        <p:nvSpPr>
-          <p:cNvPr id="10" name="Text 8"/>
-          <p:cNvSpPr txBox="1"/>
-          <p:nvPr/>
-        </p:nvSpPr>
-        <p:spPr>
-          <a:xfrm>
-            <a:off x="1280160" y="5152644"/>
-            <a:ext cx="6492240" cy="1065276"/>
-          </a:xfrm>
-          <a:prstGeom prst="rect">
-            <a:avLst/>
-          </a:prstGeom>
-          <a:noFill/>
-          <a:ln/>
-        </p:spPr>
-        <p:txBody>
-          <a:bodyPr wrap="square" lIns="0" tIns="0" rIns="0" bIns="0" rtlCol="0" anchor="t"/>
-          <a:lstStyle/>
-          <a:p>
-            <a:pPr indent="0" marL="0">
-              <a:buNone/>
-            </a:pPr>
-            <a:r>
-              <a:rPr lang="en-US" sz="2400" dirty="0">
-                <a:solidFill>
-                  <a:srgbClr val="1B2530"/>
-                </a:solidFill>
-                <a:latin typeface="Calibri" pitchFamily="34" charset="0"/>
-                <a:ea typeface="Calibri" pitchFamily="34" charset="-122"/>
-                <a:cs typeface="Calibri" pitchFamily="34" charset="-120"/>
-              </a:rPr>
-              <a:t>Then: add your editors to the editors group</a:t>
-            </a:r>
-            <a:endParaRPr lang="en-US" sz="2400" dirty="0"/>
-          </a:p>
-        </p:txBody>
-      </p:sp>
-      <p:sp>
-        <p:nvSpPr>
-          <p:cNvPr id="11" name="Shape 9"/>
-          <p:cNvSpPr/>
-          <p:nvPr/>
-        </p:nvSpPr>
-        <p:spPr>
-          <a:xfrm>
-            <a:off x="8229600" y="1463040"/>
-            <a:ext cx="3413455" cy="4754880"/>
-          </a:xfrm>
-          <a:prstGeom prst="roundRect">
-            <a:avLst>
-              <a:gd name="adj" fmla="val 2143"/>
-            </a:avLst>
-          </a:prstGeom>
-          <a:solidFill>
-            <a:srgbClr val="1B2530"/>
-          </a:solidFill>
-          <a:ln w="12700">
-            <a:solidFill>
-              <a:srgbClr val="1B2530"/>
-            </a:solidFill>
-            <a:prstDash val="solid"/>
-          </a:ln>
-        </p:spPr>
-      </p:sp>
-      <p:sp>
-        <p:nvSpPr>
-          <p:cNvPr id="12" name="Text 10"/>
-          <p:cNvSpPr txBox="1"/>
-          <p:nvPr/>
-        </p:nvSpPr>
-        <p:spPr>
-          <a:xfrm>
-            <a:off x="8412480" y="2286000"/>
-            <a:ext cx="3044952" cy="1828800"/>
-          </a:xfrm>
-          <a:prstGeom prst="rect">
-            <a:avLst/>
-          </a:prstGeom>
-          <a:noFill/>
-          <a:ln/>
-        </p:spPr>
-        <p:txBody>
-          <a:bodyPr wrap="square" lIns="0" tIns="0" rIns="0" bIns="0" rtlCol="0" anchor="ctr"/>
-          <a:lstStyle/>
-          <a:p>
-            <a:pPr algn="ctr" indent="0" marL="0">
-              <a:buNone/>
-            </a:pPr>
-            <a:r>
-              <a:rPr lang="en-US" sz="5400" b="1" dirty="0">
-                <a:solidFill>
-                  <a:srgbClr val="FFFFFF"/>
-                </a:solidFill>
-                <a:latin typeface="Cambria" pitchFamily="34" charset="0"/>
-                <a:ea typeface="Cambria" pitchFamily="34" charset="-122"/>
-                <a:cs typeface="Cambria" pitchFamily="34" charset="-120"/>
-              </a:rPr>
-              <a:t>admin / password</a:t>
-            </a:r>
-            <a:endParaRPr lang="en-US" sz="5400" dirty="0"/>
-          </a:p>
-        </p:txBody>
-      </p:sp>
-      <p:sp>
-        <p:nvSpPr>
-          <p:cNvPr id="13" name="Text 11"/>
-          <p:cNvSpPr txBox="1"/>
-          <p:nvPr/>
-        </p:nvSpPr>
-        <p:spPr>
-          <a:xfrm>
-            <a:off x="8503920" y="4297680"/>
-            <a:ext cx="2862072" cy="1371600"/>
-          </a:xfrm>
-          <a:prstGeom prst="rect">
-            <a:avLst/>
-          </a:prstGeom>
-          <a:noFill/>
-          <a:ln/>
-        </p:spPr>
-        <p:txBody>
-          <a:bodyPr wrap="square" lIns="0" tIns="0" rIns="0" bIns="0" rtlCol="0" anchor="t"/>
-          <a:lstStyle/>
-          <a:p>
-            <a:pPr algn="ctr" indent="0" marL="0">
-              <a:buNone/>
-            </a:pPr>
-            <a:r>
-              <a:rPr lang="en-US" sz="1800" dirty="0">
-                <a:solidFill>
-                  <a:srgbClr val="CFE3EA"/>
-                </a:solidFill>
-                <a:latin typeface="Calibri" pitchFamily="34" charset="0"/>
-                <a:ea typeface="Calibri" pitchFamily="34" charset="-122"/>
-                <a:cs typeface="Calibri" pitchFamily="34" charset="-120"/>
-              </a:rPr>
-              <a:t>change it first</a:t>
-            </a:r>
-            <a:endParaRPr lang="en-US" sz="1800" dirty="0"/>
+              <a:t>Running a Store</a:t>
+            </a:r>
+            <a:endParaRPr lang="en-US" sz="2200" dirty="0"/>
           </a:p>
         </p:txBody>
       </p:sp>
@@ -18749,7 +19594,7 @@
             <a:lvl1pPr>
               <a:defRPr sz="1000">
                 <a:solidFill>
-                  <a:srgbClr val="5B6B78"/>
+                  <a:srgbClr val="CFE3EA"/>
                 </a:solidFill>
                 <a:latin typeface="Calibri"/>
                 <a:ea typeface="Calibri"/>
@@ -18827,6 +19672,1334 @@
                 <a:ea typeface="Cambria" pitchFamily="34" charset="-122"/>
                 <a:cs typeface="Cambria" pitchFamily="34" charset="-120"/>
               </a:rPr>
+              <a:t>First deployment</a:t>
+            </a:r>
+            <a:endParaRPr lang="en-US" sz="3000" dirty="0"/>
+          </a:p>
+        </p:txBody>
+      </p:sp>
+      <p:sp>
+        <p:nvSpPr>
+          <p:cNvPr id="3" name="Shape 1"/>
+          <p:cNvSpPr/>
+          <p:nvPr/>
+        </p:nvSpPr>
+        <p:spPr>
+          <a:xfrm>
+            <a:off x="548640" y="1463040"/>
+            <a:ext cx="7406640" cy="4754880"/>
+          </a:xfrm>
+          <a:prstGeom prst="roundRect">
+            <a:avLst>
+              <a:gd name="adj" fmla="val 1538"/>
+            </a:avLst>
+          </a:prstGeom>
+          <a:solidFill>
+            <a:srgbClr val="12202B"/>
+          </a:solidFill>
+          <a:ln w="12700">
+            <a:solidFill>
+              <a:srgbClr val="12202B"/>
+            </a:solidFill>
+            <a:prstDash val="solid"/>
+          </a:ln>
+        </p:spPr>
+      </p:sp>
+      <p:sp>
+        <p:nvSpPr>
+          <p:cNvPr id="4" name="Text 2"/>
+          <p:cNvSpPr txBox="1"/>
+          <p:nvPr/>
+        </p:nvSpPr>
+        <p:spPr>
+          <a:xfrm>
+            <a:off x="777240" y="1645920"/>
+            <a:ext cx="6949440" cy="4389120"/>
+          </a:xfrm>
+          <a:prstGeom prst="rect">
+            <a:avLst/>
+          </a:prstGeom>
+          <a:noFill/>
+          <a:ln/>
+        </p:spPr>
+        <p:txBody>
+          <a:bodyPr wrap="square" lIns="0" tIns="0" rIns="0" bIns="0" rtlCol="0" anchor="t"/>
+          <a:lstStyle/>
+          <a:p>
+            <a:pPr indent="0" marL="0">
+              <a:buNone/>
+            </a:pPr>
+            <a:r>
+              <a:rPr lang="en-US" sz="1000" dirty="0">
+                <a:solidFill>
+                  <a:srgbClr val="8FB3A0"/>
+                </a:solidFill>
+                <a:latin typeface="Courier New" pitchFamily="34" charset="0"/>
+                <a:ea typeface="Courier New" pitchFamily="34" charset="-122"/>
+                <a:cs typeface="Courier New" pitchFamily="34" charset="-120"/>
+              </a:rPr>
+              <a:t>#!/usr/bin/env bash</a:t>
+            </a:r>
+            <a:endParaRPr lang="en-US" sz="1000" dirty="0"/>
+          </a:p>
+          <a:p>
+            <a:pPr indent="0" marL="0">
+              <a:buNone/>
+            </a:pPr>
+            <a:r>
+              <a:rPr lang="en-US" sz="1000" dirty="0">
+                <a:solidFill>
+                  <a:srgbClr val="8FB3A0"/>
+                </a:solidFill>
+                <a:latin typeface="Courier New" pitchFamily="34" charset="0"/>
+                <a:ea typeface="Courier New" pitchFamily="34" charset="-122"/>
+                <a:cs typeface="Courier New" pitchFamily="34" charset="-120"/>
+              </a:rPr>
+              <a:t># Administrators: first deployment of a classroom Store.</a:t>
+            </a:r>
+            <a:endParaRPr lang="en-US" sz="1000" dirty="0"/>
+          </a:p>
+          <a:p>
+            <a:pPr indent="0" marL="0">
+              <a:buNone/>
+            </a:pPr>
+            <a:r>
+              <a:rPr lang="en-US" sz="1000" dirty="0">
+                <a:solidFill>
+                  <a:srgbClr val="E6EDF2"/>
+                </a:solidFill>
+                <a:latin typeface="Courier New" pitchFamily="34" charset="0"/>
+                <a:ea typeface="Courier New" pitchFamily="34" charset="-122"/>
+                <a:cs typeface="Courier New" pitchFamily="34" charset="-120"/>
+              </a:rPr>
+              <a:t>git clone https://github.com/riscv-prg32/CartridgeStore.git</a:t>
+            </a:r>
+            <a:endParaRPr lang="en-US" sz="1000" dirty="0"/>
+          </a:p>
+          <a:p>
+            <a:pPr indent="0" marL="0">
+              <a:buNone/>
+            </a:pPr>
+            <a:r>
+              <a:rPr lang="en-US" sz="1000" dirty="0">
+                <a:solidFill>
+                  <a:srgbClr val="E6EDF2"/>
+                </a:solidFill>
+                <a:latin typeface="Courier New" pitchFamily="34" charset="0"/>
+                <a:ea typeface="Courier New" pitchFamily="34" charset="-122"/>
+                <a:cs typeface="Courier New" pitchFamily="34" charset="-120"/>
+              </a:rPr>
+              <a:t>cd CartridgeStore</a:t>
+            </a:r>
+            <a:endParaRPr lang="en-US" sz="1000" dirty="0"/>
+          </a:p>
+          <a:p>
+            <a:pPr indent="0" marL="0">
+              <a:buNone/>
+            </a:pPr>
+            <a:r>
+              <a:rPr lang="en-US" sz="1000" dirty="0">
+                <a:solidFill>
+                  <a:srgbClr val="E6EDF2"/>
+                </a:solidFill>
+                <a:latin typeface="Courier New" pitchFamily="34" charset="0"/>
+                <a:ea typeface="Courier New" pitchFamily="34" charset="-122"/>
+                <a:cs typeface="Courier New" pitchFamily="34" charset="-120"/>
+              </a:rPr>
+              <a:t>export SECRET_KEY="$(python3 -c 'import secrets; print(secrets.token_urlsafe(32))')"</a:t>
+            </a:r>
+            <a:endParaRPr lang="en-US" sz="1000" dirty="0"/>
+          </a:p>
+          <a:p>
+            <a:pPr indent="0" marL="0">
+              <a:buNone/>
+            </a:pPr>
+            <a:r>
+              <a:rPr lang="en-US" sz="1000" dirty="0">
+                <a:solidFill>
+                  <a:srgbClr val="E6EDF2"/>
+                </a:solidFill>
+                <a:latin typeface="Courier New" pitchFamily="34" charset="0"/>
+                <a:ea typeface="Courier New" pitchFamily="34" charset="-122"/>
+                <a:cs typeface="Courier New" pitchFamily="34" charset="-120"/>
+              </a:rPr>
+              <a:t>docker compose up --build -d</a:t>
+            </a:r>
+            <a:endParaRPr lang="en-US" sz="1000" dirty="0"/>
+          </a:p>
+          <a:p>
+            <a:pPr indent="0" marL="0">
+              <a:buNone/>
+            </a:pPr>
+            <a:r>
+              <a:rPr lang="en-US" sz="1000" dirty="0">
+                <a:solidFill>
+                  <a:srgbClr val="E6EDF2"/>
+                </a:solidFill>
+                <a:latin typeface="Courier New" pitchFamily="34" charset="0"/>
+                <a:ea typeface="Courier New" pitchFamily="34" charset="-122"/>
+                <a:cs typeface="Courier New" pitchFamily="34" charset="-120"/>
+              </a:rPr>
+              <a:t>curl http://127.0.0.1:5080/.well-known/prg32-store.json  </a:t>
+            </a:r>
+            <a:pPr indent="0" marL="0">
+              <a:buNone/>
+            </a:pPr>
+            <a:r>
+              <a:rPr lang="en-US" sz="1000" dirty="0">
+                <a:solidFill>
+                  <a:srgbClr val="8FB3A0"/>
+                </a:solidFill>
+                <a:latin typeface="Courier New" pitchFamily="34" charset="0"/>
+                <a:ea typeface="Courier New" pitchFamily="34" charset="-122"/>
+                <a:cs typeface="Courier New" pitchFamily="34" charset="-120"/>
+              </a:rPr>
+              <a:t> # health check</a:t>
+            </a:r>
+            <a:endParaRPr lang="en-US" sz="1000" dirty="0"/>
+          </a:p>
+          <a:p>
+            <a:pPr indent="0" marL="0">
+              <a:buNone/>
+            </a:pPr>
+            <a:r>
+              <a:rPr lang="en-US" sz="1000" dirty="0">
+                <a:solidFill>
+                  <a:srgbClr val="8FB3A0"/>
+                </a:solidFill>
+                <a:latin typeface="Courier New" pitchFamily="34" charset="0"/>
+                <a:ea typeface="Courier New" pitchFamily="34" charset="-122"/>
+                <a:cs typeface="Courier New" pitchFamily="34" charset="-120"/>
+              </a:rPr>
+              <a:t># Then log in as admin at /auth/login and change the default password.</a:t>
+            </a:r>
+            <a:endParaRPr lang="en-US" sz="1000" dirty="0"/>
+          </a:p>
+        </p:txBody>
+      </p:sp>
+      <p:sp>
+        <p:nvSpPr>
+          <p:cNvPr id="5" name="Shape 3"/>
+          <p:cNvSpPr/>
+          <p:nvPr/>
+        </p:nvSpPr>
+        <p:spPr>
+          <a:xfrm>
+            <a:off x="8229600" y="1463040"/>
+            <a:ext cx="3413455" cy="1037844"/>
+          </a:xfrm>
+          <a:prstGeom prst="roundRect">
+            <a:avLst>
+              <a:gd name="adj" fmla="val 7048"/>
+            </a:avLst>
+          </a:prstGeom>
+          <a:solidFill>
+            <a:srgbClr val="EEF2F4"/>
+          </a:solidFill>
+          <a:ln w="12700">
+            <a:solidFill>
+              <a:srgbClr val="EEF2F4"/>
+            </a:solidFill>
+            <a:prstDash val="solid"/>
+          </a:ln>
+        </p:spPr>
+      </p:sp>
+      <p:sp>
+        <p:nvSpPr>
+          <p:cNvPr id="6" name="Text 4"/>
+          <p:cNvSpPr txBox="1"/>
+          <p:nvPr/>
+        </p:nvSpPr>
+        <p:spPr>
+          <a:xfrm>
+            <a:off x="8394192" y="1627632"/>
+            <a:ext cx="365760" cy="365760"/>
+          </a:xfrm>
+          <a:prstGeom prst="roundRect">
+            <a:avLst>
+              <a:gd name="adj" fmla="val 20000"/>
+            </a:avLst>
+          </a:prstGeom>
+          <a:solidFill>
+            <a:srgbClr val="C7791B"/>
+          </a:solidFill>
+          <a:ln>
+            <a:solidFill>
+              <a:srgbClr val="C7791B"/>
+            </a:solidFill>
+          </a:ln>
+        </p:spPr>
+        <p:txBody>
+          <a:bodyPr wrap="square" lIns="0" tIns="0" rIns="0" bIns="0" rtlCol="0" anchor="ctr"/>
+          <a:lstStyle/>
+          <a:p>
+            <a:pPr algn="ctr" indent="0" marL="0">
+              <a:buNone/>
+            </a:pPr>
+            <a:r>
+              <a:rPr lang="en-US" sz="1400" b="1" dirty="0">
+                <a:solidFill>
+                  <a:srgbClr val="FFFFFF"/>
+                </a:solidFill>
+                <a:latin typeface="Calibri" pitchFamily="34" charset="0"/>
+                <a:ea typeface="Calibri" pitchFamily="34" charset="-122"/>
+                <a:cs typeface="Calibri" pitchFamily="34" charset="-120"/>
+              </a:rPr>
+              <a:t>1</a:t>
+            </a:r>
+            <a:endParaRPr lang="en-US" sz="1400" dirty="0"/>
+          </a:p>
+        </p:txBody>
+      </p:sp>
+      <p:sp>
+        <p:nvSpPr>
+          <p:cNvPr id="7" name="Text 5"/>
+          <p:cNvSpPr txBox="1"/>
+          <p:nvPr/>
+        </p:nvSpPr>
+        <p:spPr>
+          <a:xfrm>
+            <a:off x="8915400" y="1600200"/>
+            <a:ext cx="2544775" cy="763524"/>
+          </a:xfrm>
+          <a:prstGeom prst="rect">
+            <a:avLst/>
+          </a:prstGeom>
+          <a:noFill/>
+          <a:ln/>
+        </p:spPr>
+        <p:txBody>
+          <a:bodyPr wrap="square" lIns="0" tIns="0" rIns="0" bIns="0" rtlCol="0" anchor="ctr"/>
+          <a:lstStyle/>
+          <a:p>
+            <a:pPr indent="0" marL="0">
+              <a:buNone/>
+            </a:pPr>
+            <a:r>
+              <a:rPr lang="en-US" sz="1700" dirty="0">
+                <a:solidFill>
+                  <a:srgbClr val="1B2530"/>
+                </a:solidFill>
+                <a:latin typeface="Calibri" pitchFamily="34" charset="0"/>
+                <a:ea typeface="Calibri" pitchFamily="34" charset="-122"/>
+                <a:cs typeface="Calibri" pitchFamily="34" charset="-120"/>
+              </a:rPr>
+              <a:t>SECRET_KEY signs sessions: required</a:t>
+            </a:r>
+            <a:endParaRPr lang="en-US" sz="1700" dirty="0"/>
+          </a:p>
+        </p:txBody>
+      </p:sp>
+      <p:sp>
+        <p:nvSpPr>
+          <p:cNvPr id="8" name="Shape 6"/>
+          <p:cNvSpPr/>
+          <p:nvPr/>
+        </p:nvSpPr>
+        <p:spPr>
+          <a:xfrm>
+            <a:off x="8229600" y="2702052"/>
+            <a:ext cx="3413455" cy="1037844"/>
+          </a:xfrm>
+          <a:prstGeom prst="roundRect">
+            <a:avLst>
+              <a:gd name="adj" fmla="val 7048"/>
+            </a:avLst>
+          </a:prstGeom>
+          <a:solidFill>
+            <a:srgbClr val="EEF2F4"/>
+          </a:solidFill>
+          <a:ln w="12700">
+            <a:solidFill>
+              <a:srgbClr val="EEF2F4"/>
+            </a:solidFill>
+            <a:prstDash val="solid"/>
+          </a:ln>
+        </p:spPr>
+      </p:sp>
+      <p:sp>
+        <p:nvSpPr>
+          <p:cNvPr id="9" name="Text 7"/>
+          <p:cNvSpPr txBox="1"/>
+          <p:nvPr/>
+        </p:nvSpPr>
+        <p:spPr>
+          <a:xfrm>
+            <a:off x="8394192" y="2866644"/>
+            <a:ext cx="365760" cy="365760"/>
+          </a:xfrm>
+          <a:prstGeom prst="roundRect">
+            <a:avLst>
+              <a:gd name="adj" fmla="val 20000"/>
+            </a:avLst>
+          </a:prstGeom>
+          <a:solidFill>
+            <a:srgbClr val="C7791B"/>
+          </a:solidFill>
+          <a:ln>
+            <a:solidFill>
+              <a:srgbClr val="C7791B"/>
+            </a:solidFill>
+          </a:ln>
+        </p:spPr>
+        <p:txBody>
+          <a:bodyPr wrap="square" lIns="0" tIns="0" rIns="0" bIns="0" rtlCol="0" anchor="ctr"/>
+          <a:lstStyle/>
+          <a:p>
+            <a:pPr algn="ctr" indent="0" marL="0">
+              <a:buNone/>
+            </a:pPr>
+            <a:r>
+              <a:rPr lang="en-US" sz="1400" b="1" dirty="0">
+                <a:solidFill>
+                  <a:srgbClr val="FFFFFF"/>
+                </a:solidFill>
+                <a:latin typeface="Calibri" pitchFamily="34" charset="0"/>
+                <a:ea typeface="Calibri" pitchFamily="34" charset="-122"/>
+                <a:cs typeface="Calibri" pitchFamily="34" charset="-120"/>
+              </a:rPr>
+              <a:t>2</a:t>
+            </a:r>
+            <a:endParaRPr lang="en-US" sz="1400" dirty="0"/>
+          </a:p>
+        </p:txBody>
+      </p:sp>
+      <p:sp>
+        <p:nvSpPr>
+          <p:cNvPr id="10" name="Text 8"/>
+          <p:cNvSpPr txBox="1"/>
+          <p:nvPr/>
+        </p:nvSpPr>
+        <p:spPr>
+          <a:xfrm>
+            <a:off x="8915400" y="2839212"/>
+            <a:ext cx="2544775" cy="763524"/>
+          </a:xfrm>
+          <a:prstGeom prst="rect">
+            <a:avLst/>
+          </a:prstGeom>
+          <a:noFill/>
+          <a:ln/>
+        </p:spPr>
+        <p:txBody>
+          <a:bodyPr wrap="square" lIns="0" tIns="0" rIns="0" bIns="0" rtlCol="0" anchor="ctr"/>
+          <a:lstStyle/>
+          <a:p>
+            <a:pPr indent="0" marL="0">
+              <a:buNone/>
+            </a:pPr>
+            <a:r>
+              <a:rPr lang="en-US" sz="1700" dirty="0">
+                <a:solidFill>
+                  <a:srgbClr val="1B2530"/>
+                </a:solidFill>
+                <a:latin typeface="Calibri" pitchFamily="34" charset="0"/>
+                <a:ea typeface="Calibri" pitchFamily="34" charset="-122"/>
+                <a:cs typeface="Calibri" pitchFamily="34" charset="-120"/>
+              </a:rPr>
+              <a:t>Data persists in ./data</a:t>
+            </a:r>
+            <a:endParaRPr lang="en-US" sz="1700" dirty="0"/>
+          </a:p>
+        </p:txBody>
+      </p:sp>
+      <p:sp>
+        <p:nvSpPr>
+          <p:cNvPr id="11" name="Shape 9"/>
+          <p:cNvSpPr/>
+          <p:nvPr/>
+        </p:nvSpPr>
+        <p:spPr>
+          <a:xfrm>
+            <a:off x="8229600" y="3941064"/>
+            <a:ext cx="3413455" cy="1037844"/>
+          </a:xfrm>
+          <a:prstGeom prst="roundRect">
+            <a:avLst>
+              <a:gd name="adj" fmla="val 7048"/>
+            </a:avLst>
+          </a:prstGeom>
+          <a:solidFill>
+            <a:srgbClr val="EEF2F4"/>
+          </a:solidFill>
+          <a:ln w="12700">
+            <a:solidFill>
+              <a:srgbClr val="EEF2F4"/>
+            </a:solidFill>
+            <a:prstDash val="solid"/>
+          </a:ln>
+        </p:spPr>
+      </p:sp>
+      <p:sp>
+        <p:nvSpPr>
+          <p:cNvPr id="12" name="Text 10"/>
+          <p:cNvSpPr txBox="1"/>
+          <p:nvPr/>
+        </p:nvSpPr>
+        <p:spPr>
+          <a:xfrm>
+            <a:off x="8394192" y="4105656"/>
+            <a:ext cx="365760" cy="365760"/>
+          </a:xfrm>
+          <a:prstGeom prst="roundRect">
+            <a:avLst>
+              <a:gd name="adj" fmla="val 20000"/>
+            </a:avLst>
+          </a:prstGeom>
+          <a:solidFill>
+            <a:srgbClr val="C7791B"/>
+          </a:solidFill>
+          <a:ln>
+            <a:solidFill>
+              <a:srgbClr val="C7791B"/>
+            </a:solidFill>
+          </a:ln>
+        </p:spPr>
+        <p:txBody>
+          <a:bodyPr wrap="square" lIns="0" tIns="0" rIns="0" bIns="0" rtlCol="0" anchor="ctr"/>
+          <a:lstStyle/>
+          <a:p>
+            <a:pPr algn="ctr" indent="0" marL="0">
+              <a:buNone/>
+            </a:pPr>
+            <a:r>
+              <a:rPr lang="en-US" sz="1400" b="1" dirty="0">
+                <a:solidFill>
+                  <a:srgbClr val="FFFFFF"/>
+                </a:solidFill>
+                <a:latin typeface="Calibri" pitchFamily="34" charset="0"/>
+                <a:ea typeface="Calibri" pitchFamily="34" charset="-122"/>
+                <a:cs typeface="Calibri" pitchFamily="34" charset="-120"/>
+              </a:rPr>
+              <a:t>3</a:t>
+            </a:r>
+            <a:endParaRPr lang="en-US" sz="1400" dirty="0"/>
+          </a:p>
+        </p:txBody>
+      </p:sp>
+      <p:sp>
+        <p:nvSpPr>
+          <p:cNvPr id="13" name="Text 11"/>
+          <p:cNvSpPr txBox="1"/>
+          <p:nvPr/>
+        </p:nvSpPr>
+        <p:spPr>
+          <a:xfrm>
+            <a:off x="8915400" y="4078224"/>
+            <a:ext cx="2544775" cy="763524"/>
+          </a:xfrm>
+          <a:prstGeom prst="rect">
+            <a:avLst/>
+          </a:prstGeom>
+          <a:noFill/>
+          <a:ln/>
+        </p:spPr>
+        <p:txBody>
+          <a:bodyPr wrap="square" lIns="0" tIns="0" rIns="0" bIns="0" rtlCol="0" anchor="ctr"/>
+          <a:lstStyle/>
+          <a:p>
+            <a:pPr indent="0" marL="0">
+              <a:buNone/>
+            </a:pPr>
+            <a:r>
+              <a:rPr lang="en-US" sz="1700" dirty="0">
+                <a:solidFill>
+                  <a:srgbClr val="1B2530"/>
+                </a:solidFill>
+                <a:latin typeface="Calibri" pitchFamily="34" charset="0"/>
+                <a:ea typeface="Calibri" pitchFamily="34" charset="-122"/>
+                <a:cs typeface="Calibri" pitchFamily="34" charset="-120"/>
+              </a:rPr>
+              <a:t>Health check: the discovery document</a:t>
+            </a:r>
+            <a:endParaRPr lang="en-US" sz="1700" dirty="0"/>
+          </a:p>
+        </p:txBody>
+      </p:sp>
+      <p:sp>
+        <p:nvSpPr>
+          <p:cNvPr id="14" name="Shape 12"/>
+          <p:cNvSpPr/>
+          <p:nvPr/>
+        </p:nvSpPr>
+        <p:spPr>
+          <a:xfrm>
+            <a:off x="8229600" y="5180076"/>
+            <a:ext cx="3413455" cy="1037844"/>
+          </a:xfrm>
+          <a:prstGeom prst="roundRect">
+            <a:avLst>
+              <a:gd name="adj" fmla="val 7048"/>
+            </a:avLst>
+          </a:prstGeom>
+          <a:solidFill>
+            <a:srgbClr val="EEF2F4"/>
+          </a:solidFill>
+          <a:ln w="12700">
+            <a:solidFill>
+              <a:srgbClr val="EEF2F4"/>
+            </a:solidFill>
+            <a:prstDash val="solid"/>
+          </a:ln>
+        </p:spPr>
+      </p:sp>
+      <p:sp>
+        <p:nvSpPr>
+          <p:cNvPr id="15" name="Text 13"/>
+          <p:cNvSpPr txBox="1"/>
+          <p:nvPr/>
+        </p:nvSpPr>
+        <p:spPr>
+          <a:xfrm>
+            <a:off x="8394192" y="5344668"/>
+            <a:ext cx="365760" cy="365760"/>
+          </a:xfrm>
+          <a:prstGeom prst="roundRect">
+            <a:avLst>
+              <a:gd name="adj" fmla="val 20000"/>
+            </a:avLst>
+          </a:prstGeom>
+          <a:solidFill>
+            <a:srgbClr val="C7791B"/>
+          </a:solidFill>
+          <a:ln>
+            <a:solidFill>
+              <a:srgbClr val="C7791B"/>
+            </a:solidFill>
+          </a:ln>
+        </p:spPr>
+        <p:txBody>
+          <a:bodyPr wrap="square" lIns="0" tIns="0" rIns="0" bIns="0" rtlCol="0" anchor="ctr"/>
+          <a:lstStyle/>
+          <a:p>
+            <a:pPr algn="ctr" indent="0" marL="0">
+              <a:buNone/>
+            </a:pPr>
+            <a:r>
+              <a:rPr lang="en-US" sz="1400" b="1" dirty="0">
+                <a:solidFill>
+                  <a:srgbClr val="FFFFFF"/>
+                </a:solidFill>
+                <a:latin typeface="Calibri" pitchFamily="34" charset="0"/>
+                <a:ea typeface="Calibri" pitchFamily="34" charset="-122"/>
+                <a:cs typeface="Calibri" pitchFamily="34" charset="-120"/>
+              </a:rPr>
+              <a:t>4</a:t>
+            </a:r>
+            <a:endParaRPr lang="en-US" sz="1400" dirty="0"/>
+          </a:p>
+        </p:txBody>
+      </p:sp>
+      <p:sp>
+        <p:nvSpPr>
+          <p:cNvPr id="16" name="Text 14"/>
+          <p:cNvSpPr txBox="1"/>
+          <p:nvPr/>
+        </p:nvSpPr>
+        <p:spPr>
+          <a:xfrm>
+            <a:off x="8915400" y="5317236"/>
+            <a:ext cx="2544775" cy="763524"/>
+          </a:xfrm>
+          <a:prstGeom prst="rect">
+            <a:avLst/>
+          </a:prstGeom>
+          <a:noFill/>
+          <a:ln/>
+        </p:spPr>
+        <p:txBody>
+          <a:bodyPr wrap="square" lIns="0" tIns="0" rIns="0" bIns="0" rtlCol="0" anchor="ctr"/>
+          <a:lstStyle/>
+          <a:p>
+            <a:pPr indent="0" marL="0">
+              <a:buNone/>
+            </a:pPr>
+            <a:r>
+              <a:rPr lang="en-US" sz="1700" dirty="0">
+                <a:solidFill>
+                  <a:srgbClr val="1B2530"/>
+                </a:solidFill>
+                <a:latin typeface="Calibri" pitchFamily="34" charset="0"/>
+                <a:ea typeface="Calibri" pitchFamily="34" charset="-122"/>
+                <a:cs typeface="Calibri" pitchFamily="34" charset="-120"/>
+              </a:rPr>
+              <a:t>Then change the default password</a:t>
+            </a:r>
+            <a:endParaRPr lang="en-US" sz="1700" dirty="0"/>
+          </a:p>
+        </p:txBody>
+      </p:sp>
+      <p:sp>
+        <p:nvSpPr>
+          <p:cNvPr id="25" name="Slide Number Placeholder 0"/>
+          <p:cNvSpPr>
+            <a:spLocks noGrp="1"/>
+          </p:cNvSpPr>
+          <p:nvPr>
+            <p:ph type="sldNum" sz="quarter" idx="4294967295"/>
+          </p:nvPr>
+        </p:nvSpPr>
+        <p:spPr>
+          <a:xfrm>
+            <a:off x="11002975" y="6419088"/>
+            <a:ext cx="640080" cy="274320"/>
+          </a:xfrm>
+          <a:prstGeom prst="rect">
+            <a:avLst/>
+          </a:prstGeom>
+          <a:extLst>
+            <a:ext uri="{C572A759-6A51-4108-AA02-DFA0A04FC94B}">
+              <ma14:wrappingTextBoxFlag xmlns:ma14="http://schemas.microsoft.com/office/mac/drawingml/2011/main" val="0"/>
+            </a:ext>
+          </a:extLst>
+        </p:spPr>
+        <p:txBody>
+          <a:bodyPr/>
+          <a:lstStyle>
+            <a:lvl1pPr>
+              <a:defRPr sz="1000">
+                <a:solidFill>
+                  <a:srgbClr val="5B6B78"/>
+                </a:solidFill>
+                <a:latin typeface="Calibri"/>
+                <a:ea typeface="Calibri"/>
+                <a:cs typeface="Calibri"/>
+              </a:defRPr>
+            </a:lvl1pPr>
+          </a:lstStyle>
+          <a:p>
+            <a:pPr algn="r"/>
+            <a:fld id="{F7021451-1387-4CA6-816F-3879F97B5CBC}" type="slidenum">
+              <a:rPr b="0" lang="en-US"/>
+              <a:t>31</a:t>
+            </a:fld>
+            <a:endParaRPr lang="en-US"/>
+          </a:p>
+        </p:txBody>
+      </p:sp>
+    </p:spTree>
+  </p:cSld>
+  <p:clrMapOvr>
+    <a:masterClrMapping/>
+  </p:clrMapOvr>
+</p:sld>
+</file>
+
+<file path=ppt/slides/slide32.xml><?xml version="1.0" encoding="utf-8"?>
+<p:sld xmlns:a="http://schemas.openxmlformats.org/drawingml/2006/main" xmlns:r="http://schemas.openxmlformats.org/officeDocument/2006/relationships" xmlns:p="http://schemas.openxmlformats.org/presentationml/2006/main">
+  <p:cSld name="Slide 32">
+    <p:spTree>
+      <p:nvGrpSpPr>
+        <p:cNvPr id="1" name=""/>
+        <p:cNvGrpSpPr/>
+        <p:nvPr/>
+      </p:nvGrpSpPr>
+      <p:grpSpPr>
+        <a:xfrm>
+          <a:off x="0" y="0"/>
+          <a:ext cx="0" cy="0"/>
+          <a:chOff x="0" y="0"/>
+          <a:chExt cx="0" cy="0"/>
+        </a:xfrm>
+      </p:grpSpPr>
+      <p:sp>
+        <p:nvSpPr>
+          <p:cNvPr id="2" name="Text 1"/>
+          <p:cNvSpPr/>
+          <p:nvPr>
+            <p:ph idx="101" type="title" hasCustomPrompt="1"/>
+          </p:nvPr>
+        </p:nvSpPr>
+        <p:spPr>
+          <a:xfrm>
+            <a:off x="548640" y="384048"/>
+            <a:ext cx="11094415" cy="868680"/>
+          </a:xfrm>
+          <a:prstGeom prst="rect">
+            <a:avLst/>
+          </a:prstGeom>
+          <a:noFill/>
+          <a:ln/>
+        </p:spPr>
+        <p:txBody>
+          <a:bodyPr wrap="square" lIns="0" tIns="0" rIns="0" bIns="0" rtlCol="0" anchor="ctr"/>
+          <a:lstStyle/>
+          <a:p>
+            <a:pPr algn="l" indent="0" marL="0">
+              <a:buNone/>
+            </a:pPr>
+            <a:r>
+              <a:rPr lang="en-US" sz="3000" b="1" dirty="0">
+                <a:solidFill>
+                  <a:srgbClr val="2E4A62"/>
+                </a:solidFill>
+                <a:latin typeface="Cambria" pitchFamily="34" charset="0"/>
+                <a:ea typeface="Cambria" pitchFamily="34" charset="-122"/>
+                <a:cs typeface="Cambria" pitchFamily="34" charset="-120"/>
+              </a:rPr>
+              <a:t>Two things to do before anyone connects</a:t>
+            </a:r>
+            <a:endParaRPr lang="en-US" sz="3000" dirty="0"/>
+          </a:p>
+        </p:txBody>
+      </p:sp>
+      <p:sp>
+        <p:nvSpPr>
+          <p:cNvPr id="3" name="Text 1"/>
+          <p:cNvSpPr txBox="1"/>
+          <p:nvPr/>
+        </p:nvSpPr>
+        <p:spPr>
+          <a:xfrm>
+            <a:off x="548640" y="1481328"/>
+            <a:ext cx="457200" cy="457200"/>
+          </a:xfrm>
+          <a:prstGeom prst="roundRect">
+            <a:avLst>
+              <a:gd name="adj" fmla="val 16000"/>
+            </a:avLst>
+          </a:prstGeom>
+          <a:solidFill>
+            <a:srgbClr val="0E7C86"/>
+          </a:solidFill>
+          <a:ln>
+            <a:solidFill>
+              <a:srgbClr val="0E7C86"/>
+            </a:solidFill>
+          </a:ln>
+        </p:spPr>
+        <p:txBody>
+          <a:bodyPr wrap="square" lIns="0" tIns="0" rIns="0" bIns="0" rtlCol="0" anchor="ctr"/>
+          <a:lstStyle/>
+          <a:p>
+            <a:pPr algn="ctr" indent="0" marL="0">
+              <a:buNone/>
+            </a:pPr>
+            <a:r>
+              <a:rPr lang="en-US" sz="1700" b="1" dirty="0">
+                <a:solidFill>
+                  <a:srgbClr val="FFFFFF"/>
+                </a:solidFill>
+                <a:latin typeface="Calibri" pitchFamily="34" charset="0"/>
+                <a:ea typeface="Calibri" pitchFamily="34" charset="-122"/>
+                <a:cs typeface="Calibri" pitchFamily="34" charset="-120"/>
+              </a:rPr>
+              <a:t>1</a:t>
+            </a:r>
+            <a:endParaRPr lang="en-US" sz="1700" dirty="0"/>
+          </a:p>
+        </p:txBody>
+      </p:sp>
+      <p:sp>
+        <p:nvSpPr>
+          <p:cNvPr id="4" name="Text 2"/>
+          <p:cNvSpPr txBox="1"/>
+          <p:nvPr/>
+        </p:nvSpPr>
+        <p:spPr>
+          <a:xfrm>
+            <a:off x="1280160" y="1463040"/>
+            <a:ext cx="6492240" cy="1065276"/>
+          </a:xfrm>
+          <a:prstGeom prst="rect">
+            <a:avLst/>
+          </a:prstGeom>
+          <a:noFill/>
+          <a:ln/>
+        </p:spPr>
+        <p:txBody>
+          <a:bodyPr wrap="square" lIns="0" tIns="0" rIns="0" bIns="0" rtlCol="0" anchor="t"/>
+          <a:lstStyle/>
+          <a:p>
+            <a:pPr indent="0" marL="0">
+              <a:buNone/>
+            </a:pPr>
+            <a:r>
+              <a:rPr lang="en-US" sz="2400" dirty="0">
+                <a:solidFill>
+                  <a:srgbClr val="1B2530"/>
+                </a:solidFill>
+                <a:latin typeface="Calibri" pitchFamily="34" charset="0"/>
+                <a:ea typeface="Calibri" pitchFamily="34" charset="-122"/>
+                <a:cs typeface="Calibri" pitchFamily="34" charset="-120"/>
+              </a:rPr>
+              <a:t>Change the default administrator password (admin / password)</a:t>
+            </a:r>
+            <a:endParaRPr lang="en-US" sz="2400" dirty="0"/>
+          </a:p>
+        </p:txBody>
+      </p:sp>
+      <p:sp>
+        <p:nvSpPr>
+          <p:cNvPr id="5" name="Text 3"/>
+          <p:cNvSpPr txBox="1"/>
+          <p:nvPr/>
+        </p:nvSpPr>
+        <p:spPr>
+          <a:xfrm>
+            <a:off x="548640" y="2711196"/>
+            <a:ext cx="457200" cy="457200"/>
+          </a:xfrm>
+          <a:prstGeom prst="roundRect">
+            <a:avLst>
+              <a:gd name="adj" fmla="val 16000"/>
+            </a:avLst>
+          </a:prstGeom>
+          <a:solidFill>
+            <a:srgbClr val="0E7C86"/>
+          </a:solidFill>
+          <a:ln>
+            <a:solidFill>
+              <a:srgbClr val="0E7C86"/>
+            </a:solidFill>
+          </a:ln>
+        </p:spPr>
+        <p:txBody>
+          <a:bodyPr wrap="square" lIns="0" tIns="0" rIns="0" bIns="0" rtlCol="0" anchor="ctr"/>
+          <a:lstStyle/>
+          <a:p>
+            <a:pPr algn="ctr" indent="0" marL="0">
+              <a:buNone/>
+            </a:pPr>
+            <a:r>
+              <a:rPr lang="en-US" sz="1700" b="1" dirty="0">
+                <a:solidFill>
+                  <a:srgbClr val="FFFFFF"/>
+                </a:solidFill>
+                <a:latin typeface="Calibri" pitchFamily="34" charset="0"/>
+                <a:ea typeface="Calibri" pitchFamily="34" charset="-122"/>
+                <a:cs typeface="Calibri" pitchFamily="34" charset="-120"/>
+              </a:rPr>
+              <a:t>2</a:t>
+            </a:r>
+            <a:endParaRPr lang="en-US" sz="1700" dirty="0"/>
+          </a:p>
+        </p:txBody>
+      </p:sp>
+      <p:sp>
+        <p:nvSpPr>
+          <p:cNvPr id="6" name="Text 4"/>
+          <p:cNvSpPr txBox="1"/>
+          <p:nvPr/>
+        </p:nvSpPr>
+        <p:spPr>
+          <a:xfrm>
+            <a:off x="1280160" y="2692908"/>
+            <a:ext cx="6492240" cy="1065276"/>
+          </a:xfrm>
+          <a:prstGeom prst="rect">
+            <a:avLst/>
+          </a:prstGeom>
+          <a:noFill/>
+          <a:ln/>
+        </p:spPr>
+        <p:txBody>
+          <a:bodyPr wrap="square" lIns="0" tIns="0" rIns="0" bIns="0" rtlCol="0" anchor="t"/>
+          <a:lstStyle/>
+          <a:p>
+            <a:pPr indent="0" marL="0">
+              <a:buNone/>
+            </a:pPr>
+            <a:r>
+              <a:rPr lang="en-US" sz="2400" dirty="0">
+                <a:solidFill>
+                  <a:srgbClr val="1B2530"/>
+                </a:solidFill>
+                <a:latin typeface="Calibri" pitchFamily="34" charset="0"/>
+                <a:ea typeface="Calibri" pitchFamily="34" charset="-122"/>
+                <a:cs typeface="Calibri" pitchFamily="34" charset="-120"/>
+              </a:rPr>
+              <a:t>Set a long random SECRET_KEY and keep it with the deployment's secrets</a:t>
+            </a:r>
+            <a:endParaRPr lang="en-US" sz="2400" dirty="0"/>
+          </a:p>
+        </p:txBody>
+      </p:sp>
+      <p:sp>
+        <p:nvSpPr>
+          <p:cNvPr id="7" name="Text 5"/>
+          <p:cNvSpPr txBox="1"/>
+          <p:nvPr/>
+        </p:nvSpPr>
+        <p:spPr>
+          <a:xfrm>
+            <a:off x="548640" y="3941064"/>
+            <a:ext cx="457200" cy="457200"/>
+          </a:xfrm>
+          <a:prstGeom prst="roundRect">
+            <a:avLst>
+              <a:gd name="adj" fmla="val 16000"/>
+            </a:avLst>
+          </a:prstGeom>
+          <a:solidFill>
+            <a:srgbClr val="0E7C86"/>
+          </a:solidFill>
+          <a:ln>
+            <a:solidFill>
+              <a:srgbClr val="0E7C86"/>
+            </a:solidFill>
+          </a:ln>
+        </p:spPr>
+        <p:txBody>
+          <a:bodyPr wrap="square" lIns="0" tIns="0" rIns="0" bIns="0" rtlCol="0" anchor="ctr"/>
+          <a:lstStyle/>
+          <a:p>
+            <a:pPr algn="ctr" indent="0" marL="0">
+              <a:buNone/>
+            </a:pPr>
+            <a:r>
+              <a:rPr lang="en-US" sz="1700" b="1" dirty="0">
+                <a:solidFill>
+                  <a:srgbClr val="FFFFFF"/>
+                </a:solidFill>
+                <a:latin typeface="Calibri" pitchFamily="34" charset="0"/>
+                <a:ea typeface="Calibri" pitchFamily="34" charset="-122"/>
+                <a:cs typeface="Calibri" pitchFamily="34" charset="-120"/>
+              </a:rPr>
+              <a:t>3</a:t>
+            </a:r>
+            <a:endParaRPr lang="en-US" sz="1700" dirty="0"/>
+          </a:p>
+        </p:txBody>
+      </p:sp>
+      <p:sp>
+        <p:nvSpPr>
+          <p:cNvPr id="8" name="Text 6"/>
+          <p:cNvSpPr txBox="1"/>
+          <p:nvPr/>
+        </p:nvSpPr>
+        <p:spPr>
+          <a:xfrm>
+            <a:off x="1280160" y="3922776"/>
+            <a:ext cx="6492240" cy="1065276"/>
+          </a:xfrm>
+          <a:prstGeom prst="rect">
+            <a:avLst/>
+          </a:prstGeom>
+          <a:noFill/>
+          <a:ln/>
+        </p:spPr>
+        <p:txBody>
+          <a:bodyPr wrap="square" lIns="0" tIns="0" rIns="0" bIns="0" rtlCol="0" anchor="t"/>
+          <a:lstStyle/>
+          <a:p>
+            <a:pPr indent="0" marL="0">
+              <a:buNone/>
+            </a:pPr>
+            <a:r>
+              <a:rPr lang="en-US" sz="2400" dirty="0">
+                <a:solidFill>
+                  <a:srgbClr val="1B2530"/>
+                </a:solidFill>
+                <a:latin typeface="Calibri" pitchFamily="34" charset="0"/>
+                <a:ea typeface="Calibri" pitchFamily="34" charset="-122"/>
+                <a:cs typeface="Calibri" pitchFamily="34" charset="-120"/>
+              </a:rPr>
+              <a:t>Then: SMTP for registration links, or they are only logged</a:t>
+            </a:r>
+            <a:endParaRPr lang="en-US" sz="2400" dirty="0"/>
+          </a:p>
+        </p:txBody>
+      </p:sp>
+      <p:sp>
+        <p:nvSpPr>
+          <p:cNvPr id="9" name="Text 7"/>
+          <p:cNvSpPr txBox="1"/>
+          <p:nvPr/>
+        </p:nvSpPr>
+        <p:spPr>
+          <a:xfrm>
+            <a:off x="548640" y="5170932"/>
+            <a:ext cx="457200" cy="457200"/>
+          </a:xfrm>
+          <a:prstGeom prst="roundRect">
+            <a:avLst>
+              <a:gd name="adj" fmla="val 16000"/>
+            </a:avLst>
+          </a:prstGeom>
+          <a:solidFill>
+            <a:srgbClr val="0E7C86"/>
+          </a:solidFill>
+          <a:ln>
+            <a:solidFill>
+              <a:srgbClr val="0E7C86"/>
+            </a:solidFill>
+          </a:ln>
+        </p:spPr>
+        <p:txBody>
+          <a:bodyPr wrap="square" lIns="0" tIns="0" rIns="0" bIns="0" rtlCol="0" anchor="ctr"/>
+          <a:lstStyle/>
+          <a:p>
+            <a:pPr algn="ctr" indent="0" marL="0">
+              <a:buNone/>
+            </a:pPr>
+            <a:r>
+              <a:rPr lang="en-US" sz="1700" b="1" dirty="0">
+                <a:solidFill>
+                  <a:srgbClr val="FFFFFF"/>
+                </a:solidFill>
+                <a:latin typeface="Calibri" pitchFamily="34" charset="0"/>
+                <a:ea typeface="Calibri" pitchFamily="34" charset="-122"/>
+                <a:cs typeface="Calibri" pitchFamily="34" charset="-120"/>
+              </a:rPr>
+              <a:t>4</a:t>
+            </a:r>
+            <a:endParaRPr lang="en-US" sz="1700" dirty="0"/>
+          </a:p>
+        </p:txBody>
+      </p:sp>
+      <p:sp>
+        <p:nvSpPr>
+          <p:cNvPr id="10" name="Text 8"/>
+          <p:cNvSpPr txBox="1"/>
+          <p:nvPr/>
+        </p:nvSpPr>
+        <p:spPr>
+          <a:xfrm>
+            <a:off x="1280160" y="5152644"/>
+            <a:ext cx="6492240" cy="1065276"/>
+          </a:xfrm>
+          <a:prstGeom prst="rect">
+            <a:avLst/>
+          </a:prstGeom>
+          <a:noFill/>
+          <a:ln/>
+        </p:spPr>
+        <p:txBody>
+          <a:bodyPr wrap="square" lIns="0" tIns="0" rIns="0" bIns="0" rtlCol="0" anchor="t"/>
+          <a:lstStyle/>
+          <a:p>
+            <a:pPr indent="0" marL="0">
+              <a:buNone/>
+            </a:pPr>
+            <a:r>
+              <a:rPr lang="en-US" sz="2400" dirty="0">
+                <a:solidFill>
+                  <a:srgbClr val="1B2530"/>
+                </a:solidFill>
+                <a:latin typeface="Calibri" pitchFamily="34" charset="0"/>
+                <a:ea typeface="Calibri" pitchFamily="34" charset="-122"/>
+                <a:cs typeface="Calibri" pitchFamily="34" charset="-120"/>
+              </a:rPr>
+              <a:t>Then: add your editors to the editors group</a:t>
+            </a:r>
+            <a:endParaRPr lang="en-US" sz="2400" dirty="0"/>
+          </a:p>
+        </p:txBody>
+      </p:sp>
+      <p:sp>
+        <p:nvSpPr>
+          <p:cNvPr id="11" name="Shape 9"/>
+          <p:cNvSpPr/>
+          <p:nvPr/>
+        </p:nvSpPr>
+        <p:spPr>
+          <a:xfrm>
+            <a:off x="8229600" y="1463040"/>
+            <a:ext cx="3413455" cy="4754880"/>
+          </a:xfrm>
+          <a:prstGeom prst="roundRect">
+            <a:avLst>
+              <a:gd name="adj" fmla="val 2143"/>
+            </a:avLst>
+          </a:prstGeom>
+          <a:solidFill>
+            <a:srgbClr val="1B2530"/>
+          </a:solidFill>
+          <a:ln w="12700">
+            <a:solidFill>
+              <a:srgbClr val="1B2530"/>
+            </a:solidFill>
+            <a:prstDash val="solid"/>
+          </a:ln>
+        </p:spPr>
+      </p:sp>
+      <p:sp>
+        <p:nvSpPr>
+          <p:cNvPr id="12" name="Text 10"/>
+          <p:cNvSpPr txBox="1"/>
+          <p:nvPr/>
+        </p:nvSpPr>
+        <p:spPr>
+          <a:xfrm>
+            <a:off x="8412480" y="2286000"/>
+            <a:ext cx="3044952" cy="1828800"/>
+          </a:xfrm>
+          <a:prstGeom prst="rect">
+            <a:avLst/>
+          </a:prstGeom>
+          <a:noFill/>
+          <a:ln/>
+        </p:spPr>
+        <p:txBody>
+          <a:bodyPr wrap="square" lIns="0" tIns="0" rIns="0" bIns="0" rtlCol="0" anchor="ctr"/>
+          <a:lstStyle/>
+          <a:p>
+            <a:pPr algn="ctr" indent="0" marL="0">
+              <a:buNone/>
+            </a:pPr>
+            <a:r>
+              <a:rPr lang="en-US" sz="5400" b="1" dirty="0">
+                <a:solidFill>
+                  <a:srgbClr val="FFFFFF"/>
+                </a:solidFill>
+                <a:latin typeface="Cambria" pitchFamily="34" charset="0"/>
+                <a:ea typeface="Cambria" pitchFamily="34" charset="-122"/>
+                <a:cs typeface="Cambria" pitchFamily="34" charset="-120"/>
+              </a:rPr>
+              <a:t>admin / password</a:t>
+            </a:r>
+            <a:endParaRPr lang="en-US" sz="5400" dirty="0"/>
+          </a:p>
+        </p:txBody>
+      </p:sp>
+      <p:sp>
+        <p:nvSpPr>
+          <p:cNvPr id="13" name="Text 11"/>
+          <p:cNvSpPr txBox="1"/>
+          <p:nvPr/>
+        </p:nvSpPr>
+        <p:spPr>
+          <a:xfrm>
+            <a:off x="8503920" y="4297680"/>
+            <a:ext cx="2862072" cy="1371600"/>
+          </a:xfrm>
+          <a:prstGeom prst="rect">
+            <a:avLst/>
+          </a:prstGeom>
+          <a:noFill/>
+          <a:ln/>
+        </p:spPr>
+        <p:txBody>
+          <a:bodyPr wrap="square" lIns="0" tIns="0" rIns="0" bIns="0" rtlCol="0" anchor="t"/>
+          <a:lstStyle/>
+          <a:p>
+            <a:pPr algn="ctr" indent="0" marL="0">
+              <a:buNone/>
+            </a:pPr>
+            <a:r>
+              <a:rPr lang="en-US" sz="1800" dirty="0">
+                <a:solidFill>
+                  <a:srgbClr val="CFE3EA"/>
+                </a:solidFill>
+                <a:latin typeface="Calibri" pitchFamily="34" charset="0"/>
+                <a:ea typeface="Calibri" pitchFamily="34" charset="-122"/>
+                <a:cs typeface="Calibri" pitchFamily="34" charset="-120"/>
+              </a:rPr>
+              <a:t>change it first</a:t>
+            </a:r>
+            <a:endParaRPr lang="en-US" sz="1800" dirty="0"/>
+          </a:p>
+        </p:txBody>
+      </p:sp>
+      <p:sp>
+        <p:nvSpPr>
+          <p:cNvPr id="25" name="Slide Number Placeholder 0"/>
+          <p:cNvSpPr>
+            <a:spLocks noGrp="1"/>
+          </p:cNvSpPr>
+          <p:nvPr>
+            <p:ph type="sldNum" sz="quarter" idx="4294967295"/>
+          </p:nvPr>
+        </p:nvSpPr>
+        <p:spPr>
+          <a:xfrm>
+            <a:off x="11002975" y="6419088"/>
+            <a:ext cx="640080" cy="274320"/>
+          </a:xfrm>
+          <a:prstGeom prst="rect">
+            <a:avLst/>
+          </a:prstGeom>
+          <a:extLst>
+            <a:ext uri="{C572A759-6A51-4108-AA02-DFA0A04FC94B}">
+              <ma14:wrappingTextBoxFlag xmlns:ma14="http://schemas.microsoft.com/office/mac/drawingml/2011/main" val="0"/>
+            </a:ext>
+          </a:extLst>
+        </p:spPr>
+        <p:txBody>
+          <a:bodyPr/>
+          <a:lstStyle>
+            <a:lvl1pPr>
+              <a:defRPr sz="1000">
+                <a:solidFill>
+                  <a:srgbClr val="5B6B78"/>
+                </a:solidFill>
+                <a:latin typeface="Calibri"/>
+                <a:ea typeface="Calibri"/>
+                <a:cs typeface="Calibri"/>
+              </a:defRPr>
+            </a:lvl1pPr>
+          </a:lstStyle>
+          <a:p>
+            <a:pPr algn="r"/>
+            <a:fld id="{F7021451-1387-4CA6-816F-3879F97B5CBC}" type="slidenum">
+              <a:rPr b="0" lang="en-US"/>
+              <a:t>32</a:t>
+            </a:fld>
+            <a:endParaRPr lang="en-US"/>
+          </a:p>
+        </p:txBody>
+      </p:sp>
+    </p:spTree>
+  </p:cSld>
+  <p:clrMapOvr>
+    <a:masterClrMapping/>
+  </p:clrMapOvr>
+</p:sld>
+</file>
+
+<file path=ppt/slides/slide33.xml><?xml version="1.0" encoding="utf-8"?>
+<p:sld xmlns:a="http://schemas.openxmlformats.org/drawingml/2006/main" xmlns:r="http://schemas.openxmlformats.org/officeDocument/2006/relationships" xmlns:p="http://schemas.openxmlformats.org/presentationml/2006/main">
+  <p:cSld name="Slide 33">
+    <p:spTree>
+      <p:nvGrpSpPr>
+        <p:cNvPr id="1" name=""/>
+        <p:cNvGrpSpPr/>
+        <p:nvPr/>
+      </p:nvGrpSpPr>
+      <p:grpSpPr>
+        <a:xfrm>
+          <a:off x="0" y="0"/>
+          <a:ext cx="0" cy="0"/>
+          <a:chOff x="0" y="0"/>
+          <a:chExt cx="0" cy="0"/>
+        </a:xfrm>
+      </p:grpSpPr>
+      <p:sp>
+        <p:nvSpPr>
+          <p:cNvPr id="2" name="Text 1"/>
+          <p:cNvSpPr/>
+          <p:nvPr>
+            <p:ph idx="101" type="title" hasCustomPrompt="1"/>
+          </p:nvPr>
+        </p:nvSpPr>
+        <p:spPr>
+          <a:xfrm>
+            <a:off x="548640" y="384048"/>
+            <a:ext cx="11094415" cy="868680"/>
+          </a:xfrm>
+          <a:prstGeom prst="rect">
+            <a:avLst/>
+          </a:prstGeom>
+          <a:noFill/>
+          <a:ln/>
+        </p:spPr>
+        <p:txBody>
+          <a:bodyPr wrap="square" lIns="0" tIns="0" rIns="0" bIns="0" rtlCol="0" anchor="ctr"/>
+          <a:lstStyle/>
+          <a:p>
+            <a:pPr algn="l" indent="0" marL="0">
+              <a:buNone/>
+            </a:pPr>
+            <a:r>
+              <a:rPr lang="en-US" sz="3000" b="1" dirty="0">
+                <a:solidFill>
+                  <a:srgbClr val="2E4A62"/>
+                </a:solidFill>
+                <a:latin typeface="Cambria" pitchFamily="34" charset="0"/>
+                <a:ea typeface="Cambria" pitchFamily="34" charset="-122"/>
+                <a:cs typeface="Cambria" pitchFamily="34" charset="-120"/>
+              </a:rPr>
               <a:t>Administration pages</a:t>
             </a:r>
             <a:endParaRPr lang="en-US" sz="3000" dirty="0"/>
@@ -18835,7 +21008,7 @@
       </p:sp>
       <p:graphicFrame>
         <p:nvGraphicFramePr>
-          <p:cNvPr id="32" name="Table 0"/>
+          <p:cNvPr id="34" name="Table 0"/>
           <p:cNvGraphicFramePr>
             <a:graphicFrameLocks noGrp="1"/>
           </p:cNvGraphicFramePr>
@@ -19733,7 +21906,7 @@
             <a:pPr algn="r"/>
             <a:fld id="{F7021451-1387-4CA6-816F-3879F97B5CBC}" type="slidenum">
               <a:rPr b="0" lang="en-US"/>
-              <a:t>31</a:t>
+              <a:t>33</a:t>
             </a:fld>
             <a:endParaRPr lang="en-US"/>
           </a:p>
@@ -19747,9 +21920,9 @@
 </p:sld>
 </file>
 
-<file path=ppt/slides/slide32.xml><?xml version="1.0" encoding="utf-8"?>
+<file path=ppt/slides/slide34.xml><?xml version="1.0" encoding="utf-8"?>
 <p:sld xmlns:a="http://schemas.openxmlformats.org/drawingml/2006/main" xmlns:r="http://schemas.openxmlformats.org/officeDocument/2006/relationships" xmlns:p="http://schemas.openxmlformats.org/presentationml/2006/main">
-  <p:cSld name="Slide 32">
+  <p:cSld name="Slide 34">
     <p:spTree>
       <p:nvGrpSpPr>
         <p:cNvPr id="1" name=""/>
@@ -19807,7 +21980,7 @@
       </p:sp>
       <p:graphicFrame>
         <p:nvGraphicFramePr>
-          <p:cNvPr id="33" name="Table 0"/>
+          <p:cNvPr id="35" name="Table 0"/>
           <p:cNvGraphicFramePr>
             <a:graphicFrameLocks noGrp="1"/>
           </p:cNvGraphicFramePr>
@@ -20843,7 +23016,7 @@
             <a:pPr algn="r"/>
             <a:fld id="{F7021451-1387-4CA6-816F-3879F97B5CBC}" type="slidenum">
               <a:rPr b="0" lang="en-US"/>
-              <a:t>32</a:t>
+              <a:t>34</a:t>
             </a:fld>
             <a:endParaRPr lang="en-US"/>
           </a:p>
@@ -20857,9 +23030,9 @@
 </p:sld>
 </file>
 
-<file path=ppt/slides/slide33.xml><?xml version="1.0" encoding="utf-8"?>
+<file path=ppt/slides/slide35.xml><?xml version="1.0" encoding="utf-8"?>
 <p:sld xmlns:a="http://schemas.openxmlformats.org/drawingml/2006/main" xmlns:r="http://schemas.openxmlformats.org/officeDocument/2006/relationships" xmlns:p="http://schemas.openxmlformats.org/presentationml/2006/main">
-  <p:cSld name="Slide 33">
+  <p:cSld name="Slide 35">
     <p:spTree>
       <p:nvGrpSpPr>
         <p:cNvPr id="1" name=""/>
@@ -21387,7 +23560,7 @@
             <a:pPr algn="r"/>
             <a:fld id="{F7021451-1387-4CA6-816F-3879F97B5CBC}" type="slidenum">
               <a:rPr b="0" lang="en-US"/>
-              <a:t>33</a:t>
+              <a:t>35</a:t>
             </a:fld>
             <a:endParaRPr lang="en-US"/>
           </a:p>
@@ -21401,9 +23574,9 @@
 </p:sld>
 </file>
 
-<file path=ppt/slides/slide34.xml><?xml version="1.0" encoding="utf-8"?>
+<file path=ppt/slides/slide36.xml><?xml version="1.0" encoding="utf-8"?>
 <p:sld xmlns:a="http://schemas.openxmlformats.org/drawingml/2006/main" xmlns:r="http://schemas.openxmlformats.org/officeDocument/2006/relationships" xmlns:p="http://schemas.openxmlformats.org/presentationml/2006/main">
-  <p:cSld name="Slide 34">
+  <p:cSld name="Slide 36">
     <p:spTree>
       <p:nvGrpSpPr>
         <p:cNvPr id="1" name=""/>
@@ -21840,7 +24013,7 @@
             <a:pPr algn="r"/>
             <a:fld id="{F7021451-1387-4CA6-816F-3879F97B5CBC}" type="slidenum">
               <a:rPr b="0" lang="en-US"/>
-              <a:t>34</a:t>
+              <a:t>36</a:t>
             </a:fld>
             <a:endParaRPr lang="en-US"/>
           </a:p>

--- a/presentations/17-cartridge-store/17-cartridge-store-lecture.pptx
+++ b/presentations/17-cartridge-store/17-cartridge-store-lecture.pptx
@@ -142,7 +142,7 @@
   <p:extLst>
     <p:ext uri="{521415D9-36F7-43E2-AB2F-B90AF26B5E84}">
       <p14:sectionLst xmlns:p14="http://schemas.microsoft.com/office/powerpoint/2010/main">
-        <p14:section name="Opening" id="{d97ac382-26c2-f78e-982f-51d9aa0fa146}">
+        <p14:section name="Opening" id="{2c6b29d5-a2ba-1b02-8e8d-8a1050047759}">
           <p14:sldIdLst>
             <p14:sldId id="256"/>
             <p14:sldId id="257"/>
@@ -153,7 +153,7 @@
             <p14:sldId id="262"/>
           </p14:sldIdLst>
         </p14:section>
-        <p14:section name="What exactly gets published" id="{d3daf64d-aee9-f010-08d0-708e1d628c4b}">
+        <p14:section name="What exactly gets published" id="{0292c45f-0143-c6bb-4afe-e77d3b7d3a7f}">
           <p14:sldIdLst>
             <p14:sldId id="263"/>
             <p14:sldId id="264"/>
@@ -163,7 +163,7 @@
             <p14:sldId id="268"/>
           </p14:sldIdLst>
         </p14:section>
-        <p14:section name="The visitor" id="{40625194-ace4-d507-620b-9a8d40a204bb}">
+        <p14:section name="The visitor" id="{4fc8ddc6-7289-3ee1-44dc-229c4ec5b1c5}">
           <p14:sldIdLst>
             <p14:sldId id="269"/>
             <p14:sldId id="270"/>
@@ -171,7 +171,7 @@
             <p14:sldId id="272"/>
           </p14:sldIdLst>
         </p14:section>
-        <p14:section name="The registered user" id="{7c4f051e-4944-75c4-a397-80f40ae65e52}">
+        <p14:section name="The registered user" id="{6165e964-dc84-d1d4-de59-0487d5210a67}">
           <p14:sldIdLst>
             <p14:sldId id="273"/>
             <p14:sldId id="274"/>
@@ -183,7 +183,7 @@
             <p14:sldId id="280"/>
           </p14:sldIdLst>
         </p14:section>
-        <p14:section name="The editor" id="{b1d8e619-5d38-d011-c08e-5679531c58b5}">
+        <p14:section name="The editor" id="{babf0517-1cc7-3db4-3753-8c132a979711}">
           <p14:sldIdLst>
             <p14:sldId id="281"/>
             <p14:sldId id="282"/>
@@ -191,7 +191,7 @@
             <p14:sldId id="284"/>
           </p14:sldIdLst>
         </p14:section>
-        <p14:section name="The administrator" id="{9e010d3f-380c-af6f-c948-2d8adac9a7d6}">
+        <p14:section name="The administrator" id="{c75c1d71-d674-a9dc-37c6-dca5abfe1e48}">
           <p14:sldIdLst>
             <p14:sldId id="285"/>
             <p14:sldId id="286"/>
@@ -201,7 +201,7 @@
             <p14:sldId id="290"/>
           </p14:sldIdLst>
         </p14:section>
-        <p14:section name="Closing" id="{b25f887f-11bc-dadd-86fe-b928d531d5f4}">
+        <p14:section name="Closing" id="{2efe564a-248f-a0a3-93ec-662bde01371d}">
           <p14:sldIdLst>
             <p14:sldId id="291"/>
           </p14:sldIdLst>
@@ -4834,7 +4834,7 @@
               <a:buNone/>
             </a:pPr>
             <a:r>
-              <a:rPr lang="en-US" sz="1000" dirty="0">
+              <a:rPr lang="en-US" sz="1050" dirty="0">
                 <a:solidFill>
                   <a:srgbClr val="E6EDF2"/>
                 </a:solidFill>
@@ -4844,14 +4844,14 @@
               </a:rPr>
               <a:t>{</a:t>
             </a:r>
-            <a:endParaRPr lang="en-US" sz="1000" dirty="0"/>
+            <a:endParaRPr lang="en-US" sz="1050" dirty="0"/>
           </a:p>
           <a:p>
             <a:pPr indent="0" marL="0">
               <a:buNone/>
             </a:pPr>
             <a:r>
-              <a:rPr lang="en-US" sz="1000" dirty="0">
+              <a:rPr lang="en-US" sz="1050" dirty="0">
                 <a:solidFill>
                   <a:srgbClr val="E6EDF2"/>
                 </a:solidFill>
@@ -4861,14 +4861,14 @@
               </a:rPr>
               <a:t>  "abi": "prg32-metadata-1.0",</a:t>
             </a:r>
-            <a:endParaRPr lang="en-US" sz="1000" dirty="0"/>
+            <a:endParaRPr lang="en-US" sz="1050" dirty="0"/>
           </a:p>
           <a:p>
             <a:pPr indent="0" marL="0">
               <a:buNone/>
             </a:pPr>
             <a:r>
-              <a:rPr lang="en-US" sz="1000" dirty="0">
+              <a:rPr lang="en-US" sz="1050" dirty="0">
                 <a:solidFill>
                   <a:srgbClr val="E6EDF2"/>
                 </a:solidFill>
@@ -4878,14 +4878,14 @@
               </a:rPr>
               <a:t>  "id": "org.example.lemon-catcher",</a:t>
             </a:r>
-            <a:endParaRPr lang="en-US" sz="1000" dirty="0"/>
+            <a:endParaRPr lang="en-US" sz="1050" dirty="0"/>
           </a:p>
           <a:p>
             <a:pPr indent="0" marL="0">
               <a:buNone/>
             </a:pPr>
             <a:r>
-              <a:rPr lang="en-US" sz="1000" dirty="0">
+              <a:rPr lang="en-US" sz="1050" dirty="0">
                 <a:solidFill>
                   <a:srgbClr val="E6EDF2"/>
                 </a:solidFill>
@@ -4895,14 +4895,14 @@
               </a:rPr>
               <a:t>  "title": "Lemon Catcher",</a:t>
             </a:r>
-            <a:endParaRPr lang="en-US" sz="1000" dirty="0"/>
+            <a:endParaRPr lang="en-US" sz="1050" dirty="0"/>
           </a:p>
           <a:p>
             <a:pPr indent="0" marL="0">
               <a:buNone/>
             </a:pPr>
             <a:r>
-              <a:rPr lang="en-US" sz="1000" dirty="0">
+              <a:rPr lang="en-US" sz="1050" dirty="0">
                 <a:solidFill>
                   <a:srgbClr val="E6EDF2"/>
                 </a:solidFill>
@@ -4912,14 +4912,14 @@
               </a:rPr>
               <a:t>  "version": "1.0.0",</a:t>
             </a:r>
-            <a:endParaRPr lang="en-US" sz="1000" dirty="0"/>
+            <a:endParaRPr lang="en-US" sz="1050" dirty="0"/>
           </a:p>
           <a:p>
             <a:pPr indent="0" marL="0">
               <a:buNone/>
             </a:pPr>
             <a:r>
-              <a:rPr lang="en-US" sz="1000" dirty="0">
+              <a:rPr lang="en-US" sz="1050" dirty="0">
                 <a:solidFill>
                   <a:srgbClr val="E6EDF2"/>
                 </a:solidFill>
@@ -4929,14 +4929,14 @@
               </a:rPr>
               <a:t>  "summary": "Catch the falling lemons with your basket.",</a:t>
             </a:r>
-            <a:endParaRPr lang="en-US" sz="1000" dirty="0"/>
+            <a:endParaRPr lang="en-US" sz="1050" dirty="0"/>
           </a:p>
           <a:p>
             <a:pPr indent="0" marL="0">
               <a:buNone/>
             </a:pPr>
             <a:r>
-              <a:rPr lang="en-US" sz="1000" dirty="0">
+              <a:rPr lang="en-US" sz="1050" dirty="0">
                 <a:solidFill>
                   <a:srgbClr val="E6EDF2"/>
                 </a:solidFill>
@@ -4944,16 +4944,16 @@
                 <a:ea typeface="Courier New" pitchFamily="34" charset="-122"/>
                 <a:cs typeface="Courier New" pitchFamily="34" charset="-120"/>
               </a:rPr>
-              <a:t>  "description": "A first cartridge from the Playing with RISC-V textbook. Move the</a:t>
-            </a:r>
-            <a:endParaRPr lang="en-US" sz="1000" dirty="0"/>
+              <a:t>  "description": "A first cartridge from the Playing with RISC-V</a:t>
+            </a:r>
+            <a:endParaRPr lang="en-US" sz="1050" dirty="0"/>
           </a:p>
           <a:p>
             <a:pPr indent="0" marL="0">
               <a:buNone/>
             </a:pPr>
             <a:r>
-              <a:rPr lang="en-US" sz="1000" dirty="0">
+              <a:rPr lang="en-US" sz="1050" dirty="0">
                 <a:solidFill>
                   <a:srgbClr val="E6EDF2"/>
                 </a:solidFill>
@@ -4961,16 +4961,16 @@
                 <a:ea typeface="Courier New" pitchFamily="34" charset="-122"/>
                 <a:cs typeface="Courier New" pitchFamily="34" charset="-120"/>
               </a:rPr>
-              <a:t>      basket with LEFT and RIGHT; five misses end the round.",</a:t>
-            </a:r>
-            <a:endParaRPr lang="en-US" sz="1000" dirty="0"/>
+              <a:t>      textbook. Move the basket with LEFT and RIGHT; five misses end the round.",</a:t>
+            </a:r>
+            <a:endParaRPr lang="en-US" sz="1050" dirty="0"/>
           </a:p>
           <a:p>
             <a:pPr indent="0" marL="0">
               <a:buNone/>
             </a:pPr>
             <a:r>
-              <a:rPr lang="en-US" sz="1000" dirty="0">
+              <a:rPr lang="en-US" sz="1050" dirty="0">
                 <a:solidFill>
                   <a:srgbClr val="E6EDF2"/>
                 </a:solidFill>
@@ -4980,14 +4980,14 @@
               </a:rPr>
               <a:t>  "authors": [{"name": "Your Name"}],</a:t>
             </a:r>
-            <a:endParaRPr lang="en-US" sz="1000" dirty="0"/>
+            <a:endParaRPr lang="en-US" sz="1050" dirty="0"/>
           </a:p>
           <a:p>
             <a:pPr indent="0" marL="0">
               <a:buNone/>
             </a:pPr>
             <a:r>
-              <a:rPr lang="en-US" sz="1000" dirty="0">
+              <a:rPr lang="en-US" sz="1050" dirty="0">
                 <a:solidFill>
                   <a:srgbClr val="E6EDF2"/>
                 </a:solidFill>
@@ -4997,14 +4997,14 @@
               </a:rPr>
               <a:t>  "license": "MIT",</a:t>
             </a:r>
-            <a:endParaRPr lang="en-US" sz="1000" dirty="0"/>
+            <a:endParaRPr lang="en-US" sz="1050" dirty="0"/>
           </a:p>
           <a:p>
             <a:pPr indent="0" marL="0">
               <a:buNone/>
             </a:pPr>
             <a:r>
-              <a:rPr lang="en-US" sz="1000" dirty="0">
+              <a:rPr lang="en-US" sz="1050" dirty="0">
                 <a:solidFill>
                   <a:srgbClr val="E6EDF2"/>
                 </a:solidFill>
@@ -5014,14 +5014,14 @@
               </a:rPr>
               <a:t>  "tags": ["arcade", "education", "textbook"],</a:t>
             </a:r>
-            <a:endParaRPr lang="en-US" sz="1000" dirty="0"/>
+            <a:endParaRPr lang="en-US" sz="1050" dirty="0"/>
           </a:p>
           <a:p>
             <a:pPr indent="0" marL="0">
               <a:buNone/>
             </a:pPr>
             <a:r>
-              <a:rPr lang="en-US" sz="1000" dirty="0">
+              <a:rPr lang="en-US" sz="1050" dirty="0">
                 <a:solidFill>
                   <a:srgbClr val="E6EDF2"/>
                 </a:solidFill>
@@ -5031,14 +5031,14 @@
               </a:rPr>
               <a:t>  "assets": {"icon": "icon.png"},</a:t>
             </a:r>
-            <a:endParaRPr lang="en-US" sz="1000" dirty="0"/>
+            <a:endParaRPr lang="en-US" sz="1050" dirty="0"/>
           </a:p>
           <a:p>
             <a:pPr indent="0" marL="0">
               <a:buNone/>
             </a:pPr>
             <a:r>
-              <a:rPr lang="en-US" sz="1000" dirty="0">
+              <a:rPr lang="en-US" sz="1050" dirty="0">
                 <a:solidFill>
                   <a:srgbClr val="E6EDF2"/>
                 </a:solidFill>
@@ -5048,14 +5048,14 @@
               </a:rPr>
               <a:t>  "architectures": [</a:t>
             </a:r>
-            <a:endParaRPr lang="en-US" sz="1000" dirty="0"/>
+            <a:endParaRPr lang="en-US" sz="1050" dirty="0"/>
           </a:p>
           <a:p>
             <a:pPr indent="0" marL="0">
               <a:buNone/>
             </a:pPr>
             <a:r>
-              <a:rPr lang="en-US" sz="1000" dirty="0">
+              <a:rPr lang="en-US" sz="1050" dirty="0">
                 <a:solidFill>
                   <a:srgbClr val="E6EDF2"/>
                 </a:solidFill>
@@ -5065,14 +5065,14 @@
               </a:rPr>
               <a:t>    {"id": "esp32c6", "file": "lemon-catcher-esp32c6.prg32"},</a:t>
             </a:r>
-            <a:endParaRPr lang="en-US" sz="1000" dirty="0"/>
+            <a:endParaRPr lang="en-US" sz="1050" dirty="0"/>
           </a:p>
           <a:p>
             <a:pPr indent="0" marL="0">
               <a:buNone/>
             </a:pPr>
             <a:r>
-              <a:rPr lang="en-US" sz="1000" dirty="0">
+              <a:rPr lang="en-US" sz="1050" dirty="0">
                 <a:solidFill>
                   <a:srgbClr val="E6EDF2"/>
                 </a:solidFill>
@@ -5082,14 +5082,14 @@
               </a:rPr>
               <a:t>    {"id": "qemu", "file": "lemon-catcher-qemu.prg32"}</a:t>
             </a:r>
-            <a:endParaRPr lang="en-US" sz="1000" dirty="0"/>
+            <a:endParaRPr lang="en-US" sz="1050" dirty="0"/>
           </a:p>
           <a:p>
             <a:pPr indent="0" marL="0">
               <a:buNone/>
             </a:pPr>
             <a:r>
-              <a:rPr lang="en-US" sz="1000" dirty="0">
+              <a:rPr lang="en-US" sz="1050" dirty="0">
                 <a:solidFill>
                   <a:srgbClr val="E6EDF2"/>
                 </a:solidFill>
@@ -5099,14 +5099,14 @@
               </a:rPr>
               <a:t>  ]</a:t>
             </a:r>
-            <a:endParaRPr lang="en-US" sz="1000" dirty="0"/>
+            <a:endParaRPr lang="en-US" sz="1050" dirty="0"/>
           </a:p>
           <a:p>
             <a:pPr indent="0" marL="0">
               <a:buNone/>
             </a:pPr>
             <a:r>
-              <a:rPr lang="en-US" sz="1000" dirty="0">
+              <a:rPr lang="en-US" sz="1050" dirty="0">
                 <a:solidFill>
                   <a:srgbClr val="E6EDF2"/>
                 </a:solidFill>
@@ -5116,7 +5116,7 @@
               </a:rPr>
               <a:t>}</a:t>
             </a:r>
-            <a:endParaRPr lang="en-US" sz="1000" dirty="0"/>
+            <a:endParaRPr lang="en-US" sz="1050" dirty="0"/>
           </a:p>
         </p:txBody>
       </p:sp>
@@ -11407,7 +11407,7 @@
               <a:buNone/>
             </a:pPr>
             <a:r>
-              <a:rPr lang="en-US" sz="1050" dirty="0">
+              <a:rPr lang="en-US" sz="1300" dirty="0">
                 <a:solidFill>
                   <a:srgbClr val="8FB3A0"/>
                 </a:solidFill>
@@ -11417,14 +11417,14 @@
               </a:rPr>
               <a:t>#!/usr/bin/env bash</a:t>
             </a:r>
-            <a:endParaRPr lang="en-US" sz="1050" dirty="0"/>
+            <a:endParaRPr lang="en-US" sz="1300" dirty="0"/>
           </a:p>
           <a:p>
             <a:pPr indent="0" marL="0">
               <a:buNone/>
             </a:pPr>
             <a:r>
-              <a:rPr lang="en-US" sz="1050" dirty="0">
+              <a:rPr lang="en-US" sz="1300" dirty="0">
                 <a:solidFill>
                   <a:srgbClr val="8FB3A0"/>
                 </a:solidFill>
@@ -11434,14 +11434,14 @@
               </a:rPr>
               <a:t># Run from the PRG32 repository root after sourcing ESP-IDF.</a:t>
             </a:r>
-            <a:endParaRPr lang="en-US" sz="1050" dirty="0"/>
+            <a:endParaRPr lang="en-US" sz="1300" dirty="0"/>
           </a:p>
           <a:p>
             <a:pPr indent="0" marL="0">
               <a:buNone/>
             </a:pPr>
             <a:r>
-              <a:rPr lang="en-US" sz="1050" dirty="0">
+              <a:rPr lang="en-US" sz="1300" dirty="0">
                 <a:solidFill>
                   <a:srgbClr val="8FB3A0"/>
                 </a:solidFill>
@@ -11451,14 +11451,14 @@
               </a:rPr>
               <a:t># Builds one portable cartridge per Store architecture.</a:t>
             </a:r>
-            <a:endParaRPr lang="en-US" sz="1050" dirty="0"/>
+            <a:endParaRPr lang="en-US" sz="1300" dirty="0"/>
           </a:p>
           <a:p>
             <a:pPr indent="0" marL="0">
               <a:buNone/>
             </a:pPr>
             <a:r>
-              <a:rPr lang="en-US" sz="1050" dirty="0">
+              <a:rPr lang="en-US" sz="1300" dirty="0">
                 <a:solidFill>
                   <a:srgbClr val="E6EDF2"/>
                 </a:solidFill>
@@ -11468,14 +11468,14 @@
               </a:rPr>
               <a:t>mkdir -p build/store-lemon</a:t>
             </a:r>
-            <a:endParaRPr lang="en-US" sz="1050" dirty="0"/>
+            <a:endParaRPr lang="en-US" sz="1300" dirty="0"/>
           </a:p>
           <a:p>
             <a:pPr indent="0" marL="0">
               <a:buNone/>
             </a:pPr>
             <a:r>
-              <a:rPr lang="en-US" sz="1050" dirty="0">
+              <a:rPr lang="en-US" sz="1300" dirty="0">
                 <a:solidFill>
                   <a:srgbClr val="E6EDF2"/>
                 </a:solidFill>
@@ -11485,14 +11485,14 @@
               </a:rPr>
               <a:t>for ARCH in esp32c6 qemu; do</a:t>
             </a:r>
-            <a:endParaRPr lang="en-US" sz="1050" dirty="0"/>
+            <a:endParaRPr lang="en-US" sz="1300" dirty="0"/>
           </a:p>
           <a:p>
             <a:pPr indent="0" marL="0">
               <a:buNone/>
             </a:pPr>
             <a:r>
-              <a:rPr lang="en-US" sz="1050" dirty="0">
+              <a:rPr lang="en-US" sz="1300" dirty="0">
                 <a:solidFill>
                   <a:srgbClr val="E6EDF2"/>
                 </a:solidFill>
@@ -11502,14 +11502,14 @@
               </a:rPr>
               <a:t>  python3 -m prg32 cartridge build work/lemon_catcher_c_game.c \</a:t>
             </a:r>
-            <a:endParaRPr lang="en-US" sz="1050" dirty="0"/>
+            <a:endParaRPr lang="en-US" sz="1300" dirty="0"/>
           </a:p>
           <a:p>
             <a:pPr indent="0" marL="0">
               <a:buNone/>
             </a:pPr>
             <a:r>
-              <a:rPr lang="en-US" sz="1050" dirty="0">
+              <a:rPr lang="en-US" sz="1300" dirty="0">
                 <a:solidFill>
                   <a:srgbClr val="E6EDF2"/>
                 </a:solidFill>
@@ -11519,14 +11519,14 @@
               </a:rPr>
               <a:t>    --portable --architecture "$ARCH" \</a:t>
             </a:r>
-            <a:endParaRPr lang="en-US" sz="1050" dirty="0"/>
+            <a:endParaRPr lang="en-US" sz="1300" dirty="0"/>
           </a:p>
           <a:p>
             <a:pPr indent="0" marL="0">
               <a:buNone/>
             </a:pPr>
             <a:r>
-              <a:rPr lang="en-US" sz="1050" dirty="0">
+              <a:rPr lang="en-US" sz="1300" dirty="0">
                 <a:solidFill>
                   <a:srgbClr val="E6EDF2"/>
                 </a:solidFill>
@@ -11536,14 +11536,14 @@
               </a:rPr>
               <a:t>    --entry-prefix lemon_catcher_c --name lemon-catcher \</a:t>
             </a:r>
-            <a:endParaRPr lang="en-US" sz="1050" dirty="0"/>
+            <a:endParaRPr lang="en-US" sz="1300" dirty="0"/>
           </a:p>
           <a:p>
             <a:pPr indent="0" marL="0">
               <a:buNone/>
             </a:pPr>
             <a:r>
-              <a:rPr lang="en-US" sz="1050" dirty="0">
+              <a:rPr lang="en-US" sz="1300" dirty="0">
                 <a:solidFill>
                   <a:srgbClr val="E6EDF2"/>
                 </a:solidFill>
@@ -11553,14 +11553,14 @@
               </a:rPr>
               <a:t>    --out "build/store-lemon/lemon-catcher-$ARCH.prg32"</a:t>
             </a:r>
-            <a:endParaRPr lang="en-US" sz="1050" dirty="0"/>
+            <a:endParaRPr lang="en-US" sz="1300" dirty="0"/>
           </a:p>
           <a:p>
             <a:pPr indent="0" marL="0">
               <a:buNone/>
             </a:pPr>
             <a:r>
-              <a:rPr lang="en-US" sz="1050" dirty="0">
+              <a:rPr lang="en-US" sz="1300" dirty="0">
                 <a:solidFill>
                   <a:srgbClr val="E6EDF2"/>
                 </a:solidFill>
@@ -11570,14 +11570,14 @@
               </a:rPr>
               <a:t>done</a:t>
             </a:r>
-            <a:endParaRPr lang="en-US" sz="1050" dirty="0"/>
+            <a:endParaRPr lang="en-US" sz="1300" dirty="0"/>
           </a:p>
           <a:p>
             <a:pPr indent="0" marL="0">
               <a:buNone/>
             </a:pPr>
             <a:r>
-              <a:rPr lang="en-US" sz="1050" dirty="0">
+              <a:rPr lang="en-US" sz="1300" dirty="0">
                 <a:solidFill>
                   <a:srgbClr val="E6EDF2"/>
                 </a:solidFill>
@@ -11585,9 +11585,26 @@
                 <a:ea typeface="Courier New" pitchFamily="34" charset="-122"/>
                 <a:cs typeface="Courier New" pitchFamily="34" charset="-120"/>
               </a:rPr>
-              <a:t>python3 -m prg32 cartridge summary build/store-lemon/lemon-catcher-esp32c6.prg32</a:t>
-            </a:r>
-            <a:endParaRPr lang="en-US" sz="1050" dirty="0"/>
+              <a:t>python3 -m prg32 cartridge summary</a:t>
+            </a:r>
+            <a:endParaRPr lang="en-US" sz="1300" dirty="0"/>
+          </a:p>
+          <a:p>
+            <a:pPr indent="0" marL="0">
+              <a:buNone/>
+            </a:pPr>
+            <a:r>
+              <a:rPr lang="en-US" sz="1300" dirty="0">
+                <a:solidFill>
+                  <a:srgbClr val="E6EDF2"/>
+                </a:solidFill>
+                <a:latin typeface="Courier New" pitchFamily="34" charset="0"/>
+                <a:ea typeface="Courier New" pitchFamily="34" charset="-122"/>
+                <a:cs typeface="Courier New" pitchFamily="34" charset="-120"/>
+              </a:rPr>
+              <a:t>    build/store-lemon/lemon-catcher-esp32c6.prg32</a:t>
+            </a:r>
+            <a:endParaRPr lang="en-US" sz="1300" dirty="0"/>
           </a:p>
         </p:txBody>
       </p:sp>
@@ -12096,7 +12113,7 @@
               <a:buNone/>
             </a:pPr>
             <a:r>
-              <a:rPr lang="en-US" sz="1200" dirty="0">
+              <a:rPr lang="en-US" sz="1250" dirty="0">
                 <a:solidFill>
                   <a:srgbClr val="8FB3A0"/>
                 </a:solidFill>
@@ -12106,14 +12123,14 @@
               </a:rPr>
               <a:t>#!/usr/bin/env bash</a:t>
             </a:r>
-            <a:endParaRPr lang="en-US" sz="1200" dirty="0"/>
+            <a:endParaRPr lang="en-US" sz="1250" dirty="0"/>
           </a:p>
           <a:p>
             <a:pPr indent="0" marL="0">
               <a:buNone/>
             </a:pPr>
             <a:r>
-              <a:rPr lang="en-US" sz="1200" dirty="0">
+              <a:rPr lang="en-US" sz="1250" dirty="0">
                 <a:solidFill>
                   <a:srgbClr val="8FB3A0"/>
                 </a:solidFill>
@@ -12123,14 +12140,14 @@
               </a:rPr>
               <a:t># manifest.json and icon.png sit beside the two .prg32 files.</a:t>
             </a:r>
-            <a:endParaRPr lang="en-US" sz="1200" dirty="0"/>
+            <a:endParaRPr lang="en-US" sz="1250" dirty="0"/>
           </a:p>
           <a:p>
             <a:pPr indent="0" marL="0">
               <a:buNone/>
             </a:pPr>
             <a:r>
-              <a:rPr lang="en-US" sz="1200" dirty="0">
+              <a:rPr lang="en-US" sz="1250" dirty="0">
                 <a:solidFill>
                   <a:srgbClr val="E6EDF2"/>
                 </a:solidFill>
@@ -12140,14 +12157,14 @@
               </a:rPr>
               <a:t>python3 -m prg32 store pack-bundle \</a:t>
             </a:r>
-            <a:endParaRPr lang="en-US" sz="1200" dirty="0"/>
+            <a:endParaRPr lang="en-US" sz="1250" dirty="0"/>
           </a:p>
           <a:p>
             <a:pPr indent="0" marL="0">
               <a:buNone/>
             </a:pPr>
             <a:r>
-              <a:rPr lang="en-US" sz="1200" dirty="0">
+              <a:rPr lang="en-US" sz="1250" dirty="0">
                 <a:solidFill>
                   <a:srgbClr val="E6EDF2"/>
                 </a:solidFill>
@@ -12157,14 +12174,14 @@
               </a:rPr>
               <a:t>  --manifest build/store-lemon/manifest.json \</a:t>
             </a:r>
-            <a:endParaRPr lang="en-US" sz="1200" dirty="0"/>
+            <a:endParaRPr lang="en-US" sz="1250" dirty="0"/>
           </a:p>
           <a:p>
             <a:pPr indent="0" marL="0">
               <a:buNone/>
             </a:pPr>
             <a:r>
-              <a:rPr lang="en-US" sz="1200" dirty="0">
+              <a:rPr lang="en-US" sz="1250" dirty="0">
                 <a:solidFill>
                   <a:srgbClr val="E6EDF2"/>
                 </a:solidFill>
@@ -12174,14 +12191,14 @@
               </a:rPr>
               <a:t>  --out build/lemon-catcher-1.0.0.zip</a:t>
             </a:r>
-            <a:endParaRPr lang="en-US" sz="1200" dirty="0"/>
+            <a:endParaRPr lang="en-US" sz="1250" dirty="0"/>
           </a:p>
           <a:p>
             <a:pPr indent="0" marL="0">
               <a:buNone/>
             </a:pPr>
             <a:r>
-              <a:rPr lang="en-US" sz="1200" dirty="0">
+              <a:rPr lang="en-US" sz="1250" dirty="0">
                 <a:solidFill>
                   <a:srgbClr val="8FB3A0"/>
                 </a:solidFill>
@@ -12191,14 +12208,14 @@
               </a:rPr>
               <a:t># The token comes from the Store's Tokens page; keep it out of Git.</a:t>
             </a:r>
-            <a:endParaRPr lang="en-US" sz="1200" dirty="0"/>
+            <a:endParaRPr lang="en-US" sz="1250" dirty="0"/>
           </a:p>
           <a:p>
             <a:pPr indent="0" marL="0">
               <a:buNone/>
             </a:pPr>
             <a:r>
-              <a:rPr lang="en-US" sz="1200" dirty="0">
+              <a:rPr lang="en-US" sz="1250" dirty="0">
                 <a:solidFill>
                   <a:srgbClr val="E6EDF2"/>
                 </a:solidFill>
@@ -12206,16 +12223,16 @@
                 <a:ea typeface="Courier New" pitchFamily="34" charset="-122"/>
                 <a:cs typeface="Courier New" pitchFamily="34" charset="-120"/>
               </a:rPr>
-              <a:t>python3 -m prg32 store publish-bundle build/lemon-catcher-1.0.0.zip \</a:t>
-            </a:r>
-            <a:endParaRPr lang="en-US" sz="1200" dirty="0"/>
+              <a:t>python3 -m prg32 store publish-bundle build/lemon-catcher-1.0.0.zip</a:t>
+            </a:r>
+            <a:endParaRPr lang="en-US" sz="1250" dirty="0"/>
           </a:p>
           <a:p>
             <a:pPr indent="0" marL="0">
               <a:buNone/>
             </a:pPr>
             <a:r>
-              <a:rPr lang="en-US" sz="1200" dirty="0">
+              <a:rPr lang="en-US" sz="1250" dirty="0">
                 <a:solidFill>
                   <a:srgbClr val="E6EDF2"/>
                 </a:solidFill>
@@ -12223,9 +12240,26 @@
                 <a:ea typeface="Courier New" pitchFamily="34" charset="-122"/>
                 <a:cs typeface="Courier New" pitchFamily="34" charset="-120"/>
               </a:rPr>
+              <a:t>    \</a:t>
+            </a:r>
+            <a:endParaRPr lang="en-US" sz="1250" dirty="0"/>
+          </a:p>
+          <a:p>
+            <a:pPr indent="0" marL="0">
+              <a:buNone/>
+            </a:pPr>
+            <a:r>
+              <a:rPr lang="en-US" sz="1250" dirty="0">
+                <a:solidFill>
+                  <a:srgbClr val="E6EDF2"/>
+                </a:solidFill>
+                <a:latin typeface="Courier New" pitchFamily="34" charset="0"/>
+                <a:ea typeface="Courier New" pitchFamily="34" charset="-122"/>
+                <a:cs typeface="Courier New" pitchFamily="34" charset="-120"/>
+              </a:rPr>
               <a:t>  --store-url "$PRG32_STORE_URL" --token "$PRG32_STORE_TOKEN"</a:t>
             </a:r>
-            <a:endParaRPr lang="en-US" sz="1200" dirty="0"/>
+            <a:endParaRPr lang="en-US" sz="1250" dirty="0"/>
           </a:p>
         </p:txBody>
       </p:sp>
@@ -12734,7 +12768,7 @@
               <a:buNone/>
             </a:pPr>
             <a:r>
-              <a:rPr lang="en-US" sz="1150" dirty="0">
+              <a:rPr lang="en-US" sz="1250" dirty="0">
                 <a:solidFill>
                   <a:srgbClr val="E6EDF2"/>
                 </a:solidFill>
@@ -12742,16 +12776,16 @@
                 <a:ea typeface="Courier New" pitchFamily="34" charset="-122"/>
                 <a:cs typeface="Courier New" pitchFamily="34" charset="-120"/>
               </a:rPr>
-              <a:t>$ python3 -m prg32 store publish-bundle build/lemon-catcher-1.0.0.zip ...</a:t>
-            </a:r>
-            <a:endParaRPr lang="en-US" sz="1150" dirty="0"/>
+              <a:t>$ python3 -m prg32 store publish-bundle</a:t>
+            </a:r>
+            <a:endParaRPr lang="en-US" sz="1250" dirty="0"/>
           </a:p>
           <a:p>
             <a:pPr indent="0" marL="0">
               <a:buNone/>
             </a:pPr>
             <a:r>
-              <a:rPr lang="en-US" sz="1150" dirty="0">
+              <a:rPr lang="en-US" sz="1250" dirty="0">
                 <a:solidFill>
                   <a:srgbClr val="E6EDF2"/>
                 </a:solidFill>
@@ -12759,16 +12793,16 @@
                 <a:ea typeface="Courier New" pitchFamily="34" charset="-122"/>
                 <a:cs typeface="Courier New" pitchFamily="34" charset="-120"/>
               </a:rPr>
-              <a:t>[ { "architecture": "esp32c6", "file": "lemon-catcher-esp32c6.prg32" },</a:t>
-            </a:r>
-            <a:endParaRPr lang="en-US" sz="1150" dirty="0"/>
+              <a:t>    build/lemon-catcher-1.0.0.zip ...</a:t>
+            </a:r>
+            <a:endParaRPr lang="en-US" sz="1250" dirty="0"/>
           </a:p>
           <a:p>
             <a:pPr indent="0" marL="0">
               <a:buNone/>
             </a:pPr>
             <a:r>
-              <a:rPr lang="en-US" sz="1150" dirty="0">
+              <a:rPr lang="en-US" sz="1250" dirty="0">
                 <a:solidFill>
                   <a:srgbClr val="E6EDF2"/>
                 </a:solidFill>
@@ -12776,16 +12810,16 @@
                 <a:ea typeface="Courier New" pitchFamily="34" charset="-122"/>
                 <a:cs typeface="Courier New" pitchFamily="34" charset="-120"/>
               </a:rPr>
-              <a:t>  { "architecture": "qemu",    "file": "lemon-catcher-qemu.prg32" } ]</a:t>
-            </a:r>
-            <a:endParaRPr lang="en-US" sz="1150" dirty="0"/>
+              <a:t>[ { "architecture": "esp32c6", "file": "lemon-catcher-esp32c6.prg32"</a:t>
+            </a:r>
+            <a:endParaRPr lang="en-US" sz="1250" dirty="0"/>
           </a:p>
           <a:p>
             <a:pPr indent="0" marL="0">
               <a:buNone/>
             </a:pPr>
             <a:r>
-              <a:rPr lang="en-US" sz="1150" dirty="0">
+              <a:rPr lang="en-US" sz="1250" dirty="0">
                 <a:solidFill>
                   <a:srgbClr val="E6EDF2"/>
                 </a:solidFill>
@@ -12793,16 +12827,16 @@
                 <a:ea typeface="Courier New" pitchFamily="34" charset="-122"/>
                 <a:cs typeface="Courier New" pitchFamily="34" charset="-120"/>
               </a:rPr>
-              <a:t>Submitted for review</a:t>
-            </a:r>
-            <a:endParaRPr lang="en-US" sz="1150" dirty="0"/>
+              <a:t>    },</a:t>
+            </a:r>
+            <a:endParaRPr lang="en-US" sz="1250" dirty="0"/>
           </a:p>
           <a:p>
             <a:pPr indent="0" marL="0">
               <a:buNone/>
             </a:pPr>
             <a:r>
-              <a:rPr lang="en-US" sz="1150" dirty="0">
+              <a:rPr lang="en-US" sz="1250" dirty="0">
                 <a:solidFill>
                   <a:srgbClr val="E6EDF2"/>
                 </a:solidFill>
@@ -12810,16 +12844,16 @@
                 <a:ea typeface="Courier New" pitchFamily="34" charset="-122"/>
                 <a:cs typeface="Courier New" pitchFamily="34" charset="-120"/>
               </a:rPr>
-              <a:t> </a:t>
-            </a:r>
-            <a:endParaRPr lang="en-US" sz="1150" dirty="0"/>
+              <a:t>  { "architecture": "qemu",    "file": "lemon-catcher-qemu.prg32" }</a:t>
+            </a:r>
+            <a:endParaRPr lang="en-US" sz="1250" dirty="0"/>
           </a:p>
           <a:p>
             <a:pPr indent="0" marL="0">
               <a:buNone/>
             </a:pPr>
             <a:r>
-              <a:rPr lang="en-US" sz="1150" dirty="0">
+              <a:rPr lang="en-US" sz="1250" dirty="0">
                 <a:solidFill>
                   <a:srgbClr val="E6EDF2"/>
                 </a:solidFill>
@@ -12827,16 +12861,16 @@
                 <a:ea typeface="Courier New" pitchFamily="34" charset="-122"/>
                 <a:cs typeface="Courier New" pitchFamily="34" charset="-120"/>
               </a:rPr>
-              <a:t>$ curl -X POST .../api/submissions/1/verify -d '{"metadata":{"id":"x.y"}}'</a:t>
-            </a:r>
-            <a:endParaRPr lang="en-US" sz="1150" dirty="0"/>
+              <a:t>      ]</a:t>
+            </a:r>
+            <a:endParaRPr lang="en-US" sz="1250" dirty="0"/>
           </a:p>
           <a:p>
             <a:pPr indent="0" marL="0">
               <a:buNone/>
             </a:pPr>
             <a:r>
-              <a:rPr lang="en-US" sz="1150" dirty="0">
+              <a:rPr lang="en-US" sz="1250" dirty="0">
                 <a:solidFill>
                   <a:srgbClr val="E6EDF2"/>
                 </a:solidFill>
@@ -12844,16 +12878,16 @@
                 <a:ea typeface="Courier New" pitchFamily="34" charset="-122"/>
                 <a:cs typeface="Courier New" pitchFamily="34" charset="-120"/>
               </a:rPr>
-              <a:t>{ "error": "metadata.id cannot be changed during review", "ok": false }</a:t>
-            </a:r>
-            <a:endParaRPr lang="en-US" sz="1150" dirty="0"/>
+              <a:t>Submitted for review</a:t>
+            </a:r>
+            <a:endParaRPr lang="en-US" sz="1250" dirty="0"/>
           </a:p>
           <a:p>
             <a:pPr indent="0" marL="0">
               <a:buNone/>
             </a:pPr>
             <a:r>
-              <a:rPr lang="en-US" sz="1150" dirty="0">
+              <a:rPr lang="en-US" sz="1250" dirty="0">
                 <a:solidFill>
                   <a:srgbClr val="E6EDF2"/>
                 </a:solidFill>
@@ -12863,14 +12897,14 @@
               </a:rPr>
               <a:t> </a:t>
             </a:r>
-            <a:endParaRPr lang="en-US" sz="1150" dirty="0"/>
+            <a:endParaRPr lang="en-US" sz="1250" dirty="0"/>
           </a:p>
           <a:p>
             <a:pPr indent="0" marL="0">
               <a:buNone/>
             </a:pPr>
             <a:r>
-              <a:rPr lang="en-US" sz="1150" dirty="0">
+              <a:rPr lang="en-US" sz="1250" dirty="0">
                 <a:solidFill>
                   <a:srgbClr val="E6EDF2"/>
                 </a:solidFill>
@@ -12878,16 +12912,16 @@
                 <a:ea typeface="Courier New" pitchFamily="34" charset="-122"/>
                 <a:cs typeface="Courier New" pitchFamily="34" charset="-120"/>
               </a:rPr>
-              <a:t>$ python3 -m prg32 store list --store-url ...</a:t>
-            </a:r>
-            <a:endParaRPr lang="en-US" sz="1150" dirty="0"/>
+              <a:t>$ curl -X POST .../api/submissions/1/verify -d</a:t>
+            </a:r>
+            <a:endParaRPr lang="en-US" sz="1250" dirty="0"/>
           </a:p>
           <a:p>
             <a:pPr indent="0" marL="0">
               <a:buNone/>
             </a:pPr>
             <a:r>
-              <a:rPr lang="en-US" sz="1150" dirty="0">
+              <a:rPr lang="en-US" sz="1250" dirty="0">
                 <a:solidFill>
                   <a:srgbClr val="E6EDF2"/>
                 </a:solidFill>
@@ -12895,16 +12929,16 @@
                 <a:ea typeface="Courier New" pitchFamily="34" charset="-122"/>
                 <a:cs typeface="Courier New" pitchFamily="34" charset="-120"/>
               </a:rPr>
-              <a:t>ID                          Title          Version  Architectures</a:t>
-            </a:r>
-            <a:endParaRPr lang="en-US" sz="1150" dirty="0"/>
+              <a:t>    '{"metadata":{"id":"x.y"}}'</a:t>
+            </a:r>
+            <a:endParaRPr lang="en-US" sz="1250" dirty="0"/>
           </a:p>
           <a:p>
             <a:pPr indent="0" marL="0">
               <a:buNone/>
             </a:pPr>
             <a:r>
-              <a:rPr lang="en-US" sz="1150" dirty="0">
+              <a:rPr lang="en-US" sz="1250" dirty="0">
                 <a:solidFill>
                   <a:srgbClr val="E6EDF2"/>
                 </a:solidFill>
@@ -12912,9 +12946,94 @@
                 <a:ea typeface="Courier New" pitchFamily="34" charset="-122"/>
                 <a:cs typeface="Courier New" pitchFamily="34" charset="-120"/>
               </a:rPr>
+              <a:t>{ "error": "metadata.id cannot be changed during review", "ok":</a:t>
+            </a:r>
+            <a:endParaRPr lang="en-US" sz="1250" dirty="0"/>
+          </a:p>
+          <a:p>
+            <a:pPr indent="0" marL="0">
+              <a:buNone/>
+            </a:pPr>
+            <a:r>
+              <a:rPr lang="en-US" sz="1250" dirty="0">
+                <a:solidFill>
+                  <a:srgbClr val="E6EDF2"/>
+                </a:solidFill>
+                <a:latin typeface="Courier New" pitchFamily="34" charset="0"/>
+                <a:ea typeface="Courier New" pitchFamily="34" charset="-122"/>
+                <a:cs typeface="Courier New" pitchFamily="34" charset="-120"/>
+              </a:rPr>
+              <a:t>    false }</a:t>
+            </a:r>
+            <a:endParaRPr lang="en-US" sz="1250" dirty="0"/>
+          </a:p>
+          <a:p>
+            <a:pPr indent="0" marL="0">
+              <a:buNone/>
+            </a:pPr>
+            <a:r>
+              <a:rPr lang="en-US" sz="1250" dirty="0">
+                <a:solidFill>
+                  <a:srgbClr val="E6EDF2"/>
+                </a:solidFill>
+                <a:latin typeface="Courier New" pitchFamily="34" charset="0"/>
+                <a:ea typeface="Courier New" pitchFamily="34" charset="-122"/>
+                <a:cs typeface="Courier New" pitchFamily="34" charset="-120"/>
+              </a:rPr>
+              <a:t> </a:t>
+            </a:r>
+            <a:endParaRPr lang="en-US" sz="1250" dirty="0"/>
+          </a:p>
+          <a:p>
+            <a:pPr indent="0" marL="0">
+              <a:buNone/>
+            </a:pPr>
+            <a:r>
+              <a:rPr lang="en-US" sz="1250" dirty="0">
+                <a:solidFill>
+                  <a:srgbClr val="E6EDF2"/>
+                </a:solidFill>
+                <a:latin typeface="Courier New" pitchFamily="34" charset="0"/>
+                <a:ea typeface="Courier New" pitchFamily="34" charset="-122"/>
+                <a:cs typeface="Courier New" pitchFamily="34" charset="-120"/>
+              </a:rPr>
+              <a:t>$ python3 -m prg32 store list --store-url ...</a:t>
+            </a:r>
+            <a:endParaRPr lang="en-US" sz="1250" dirty="0"/>
+          </a:p>
+          <a:p>
+            <a:pPr indent="0" marL="0">
+              <a:buNone/>
+            </a:pPr>
+            <a:r>
+              <a:rPr lang="en-US" sz="1250" dirty="0">
+                <a:solidFill>
+                  <a:srgbClr val="E6EDF2"/>
+                </a:solidFill>
+                <a:latin typeface="Courier New" pitchFamily="34" charset="0"/>
+                <a:ea typeface="Courier New" pitchFamily="34" charset="-122"/>
+                <a:cs typeface="Courier New" pitchFamily="34" charset="-120"/>
+              </a:rPr>
+              <a:t>ID                          Title          Version  Architectures</a:t>
+            </a:r>
+            <a:endParaRPr lang="en-US" sz="1250" dirty="0"/>
+          </a:p>
+          <a:p>
+            <a:pPr indent="0" marL="0">
+              <a:buNone/>
+            </a:pPr>
+            <a:r>
+              <a:rPr lang="en-US" sz="1250" dirty="0">
+                <a:solidFill>
+                  <a:srgbClr val="E6EDF2"/>
+                </a:solidFill>
+                <a:latin typeface="Courier New" pitchFamily="34" charset="0"/>
+                <a:ea typeface="Courier New" pitchFamily="34" charset="-122"/>
+                <a:cs typeface="Courier New" pitchFamily="34" charset="-120"/>
+              </a:rPr>
               <a:t>org.example.lemon-catcher   Lemon Catcher           esp32c6, qemu</a:t>
             </a:r>
-            <a:endParaRPr lang="en-US" sz="1150" dirty="0"/>
+            <a:endParaRPr lang="en-US" sz="1250" dirty="0"/>
           </a:p>
         </p:txBody>
       </p:sp>
@@ -13396,7 +13515,7 @@
               <a:buNone/>
             </a:pPr>
             <a:r>
-              <a:rPr lang="en-US" sz="1223" dirty="0">
+              <a:rPr lang="en-US" sz="1400" dirty="0">
                 <a:solidFill>
                   <a:srgbClr val="5B6B78"/>
                 </a:solidFill>
@@ -13406,7 +13525,7 @@
               </a:rPr>
               <a:t>+0</a:t>
             </a:r>
-            <a:endParaRPr lang="en-US" sz="1223" dirty="0"/>
+            <a:endParaRPr lang="en-US" sz="1400" dirty="0"/>
           </a:p>
         </p:txBody>
       </p:sp>
@@ -13441,7 +13560,7 @@
               <a:buNone/>
             </a:pPr>
             <a:r>
-              <a:rPr lang="en-US" sz="1423" b="1" dirty="0">
+              <a:rPr lang="en-US" sz="1600" b="1" dirty="0">
                 <a:solidFill>
                   <a:srgbClr val="FFFFFF"/>
                 </a:solidFill>
@@ -13451,7 +13570,7 @@
               </a:rPr>
               <a:t>"PRG32META"</a:t>
             </a:r>
-            <a:endParaRPr lang="en-US" sz="1423" dirty="0"/>
+            <a:endParaRPr lang="en-US" sz="1600" dirty="0"/>
           </a:p>
         </p:txBody>
       </p:sp>
@@ -13480,7 +13599,7 @@
               <a:buNone/>
             </a:pPr>
             <a:r>
-              <a:rPr lang="en-US" sz="1223" dirty="0">
+              <a:rPr lang="en-US" sz="1400" dirty="0">
                 <a:solidFill>
                   <a:srgbClr val="5B6B78"/>
                 </a:solidFill>
@@ -13490,7 +13609,7 @@
               </a:rPr>
               <a:t>9 bytes</a:t>
             </a:r>
-            <a:endParaRPr lang="en-US" sz="1223" dirty="0"/>
+            <a:endParaRPr lang="en-US" sz="1400" dirty="0"/>
           </a:p>
         </p:txBody>
       </p:sp>
@@ -13519,7 +13638,7 @@
               <a:buNone/>
             </a:pPr>
             <a:r>
-              <a:rPr lang="en-US" sz="1423" dirty="0">
+              <a:rPr lang="en-US" sz="1600" dirty="0">
                 <a:solidFill>
                   <a:srgbClr val="1B2530"/>
                 </a:solidFill>
@@ -13529,7 +13648,7 @@
               </a:rPr>
               <a:t>magic</a:t>
             </a:r>
-            <a:endParaRPr lang="en-US" sz="1423" dirty="0"/>
+            <a:endParaRPr lang="en-US" sz="1600" dirty="0"/>
           </a:p>
         </p:txBody>
       </p:sp>
@@ -13558,7 +13677,7 @@
               <a:buNone/>
             </a:pPr>
             <a:r>
-              <a:rPr lang="en-US" sz="1223" dirty="0">
+              <a:rPr lang="en-US" sz="1400" dirty="0">
                 <a:solidFill>
                   <a:srgbClr val="5B6B78"/>
                 </a:solidFill>
@@ -13568,7 +13687,7 @@
               </a:rPr>
               <a:t>+9</a:t>
             </a:r>
-            <a:endParaRPr lang="en-US" sz="1223" dirty="0"/>
+            <a:endParaRPr lang="en-US" sz="1400" dirty="0"/>
           </a:p>
         </p:txBody>
       </p:sp>
@@ -13603,7 +13722,7 @@
               <a:buNone/>
             </a:pPr>
             <a:r>
-              <a:rPr lang="en-US" sz="1423" b="1" dirty="0">
+              <a:rPr lang="en-US" sz="1600" b="1" dirty="0">
                 <a:solidFill>
                   <a:srgbClr val="FFFFFF"/>
                 </a:solidFill>
@@ -13613,7 +13732,7 @@
               </a:rPr>
               <a:t>version</a:t>
             </a:r>
-            <a:endParaRPr lang="en-US" sz="1423" dirty="0"/>
+            <a:endParaRPr lang="en-US" sz="1600" dirty="0"/>
           </a:p>
         </p:txBody>
       </p:sp>
@@ -13642,7 +13761,7 @@
               <a:buNone/>
             </a:pPr>
             <a:r>
-              <a:rPr lang="en-US" sz="1223" dirty="0">
+              <a:rPr lang="en-US" sz="1400" dirty="0">
                 <a:solidFill>
                   <a:srgbClr val="5B6B78"/>
                 </a:solidFill>
@@ -13652,7 +13771,7 @@
               </a:rPr>
               <a:t>1 bytes</a:t>
             </a:r>
-            <a:endParaRPr lang="en-US" sz="1223" dirty="0"/>
+            <a:endParaRPr lang="en-US" sz="1400" dirty="0"/>
           </a:p>
         </p:txBody>
       </p:sp>
@@ -13681,7 +13800,7 @@
               <a:buNone/>
             </a:pPr>
             <a:r>
-              <a:rPr lang="en-US" sz="1423" dirty="0">
+              <a:rPr lang="en-US" sz="1600" dirty="0">
                 <a:solidFill>
                   <a:srgbClr val="1B2530"/>
                 </a:solidFill>
@@ -13691,7 +13810,7 @@
               </a:rPr>
               <a:t>currently 1</a:t>
             </a:r>
-            <a:endParaRPr lang="en-US" sz="1423" dirty="0"/>
+            <a:endParaRPr lang="en-US" sz="1600" dirty="0"/>
           </a:p>
         </p:txBody>
       </p:sp>
@@ -13720,7 +13839,7 @@
               <a:buNone/>
             </a:pPr>
             <a:r>
-              <a:rPr lang="en-US" sz="1223" dirty="0">
+              <a:rPr lang="en-US" sz="1400" dirty="0">
                 <a:solidFill>
                   <a:srgbClr val="5B6B78"/>
                 </a:solidFill>
@@ -13730,7 +13849,7 @@
               </a:rPr>
               <a:t>+10</a:t>
             </a:r>
-            <a:endParaRPr lang="en-US" sz="1223" dirty="0"/>
+            <a:endParaRPr lang="en-US" sz="1400" dirty="0"/>
           </a:p>
         </p:txBody>
       </p:sp>
@@ -13765,7 +13884,7 @@
               <a:buNone/>
             </a:pPr>
             <a:r>
-              <a:rPr lang="en-US" sz="1423" b="1" dirty="0">
+              <a:rPr lang="en-US" sz="1600" b="1" dirty="0">
                 <a:solidFill>
                   <a:srgbClr val="FFFFFF"/>
                 </a:solidFill>
@@ -13775,7 +13894,7 @@
               </a:rPr>
               <a:t>entry_count</a:t>
             </a:r>
-            <a:endParaRPr lang="en-US" sz="1423" dirty="0"/>
+            <a:endParaRPr lang="en-US" sz="1600" dirty="0"/>
           </a:p>
         </p:txBody>
       </p:sp>
@@ -13804,7 +13923,7 @@
               <a:buNone/>
             </a:pPr>
             <a:r>
-              <a:rPr lang="en-US" sz="1223" dirty="0">
+              <a:rPr lang="en-US" sz="1400" dirty="0">
                 <a:solidFill>
                   <a:srgbClr val="5B6B78"/>
                 </a:solidFill>
@@ -13814,7 +13933,7 @@
               </a:rPr>
               <a:t>2 bytes</a:t>
             </a:r>
-            <a:endParaRPr lang="en-US" sz="1223" dirty="0"/>
+            <a:endParaRPr lang="en-US" sz="1400" dirty="0"/>
           </a:p>
         </p:txBody>
       </p:sp>
@@ -13843,7 +13962,7 @@
               <a:buNone/>
             </a:pPr>
             <a:r>
-              <a:rPr lang="en-US" sz="1423" dirty="0">
+              <a:rPr lang="en-US" sz="1600" dirty="0">
                 <a:solidFill>
                   <a:srgbClr val="1B2530"/>
                 </a:solidFill>
@@ -13853,7 +13972,7 @@
               </a:rPr>
               <a:t>number of blocks</a:t>
             </a:r>
-            <a:endParaRPr lang="en-US" sz="1423" dirty="0"/>
+            <a:endParaRPr lang="en-US" sz="1600" dirty="0"/>
           </a:p>
         </p:txBody>
       </p:sp>
@@ -13882,7 +14001,7 @@
               <a:buNone/>
             </a:pPr>
             <a:r>
-              <a:rPr lang="en-US" sz="1223" dirty="0">
+              <a:rPr lang="en-US" sz="1400" dirty="0">
                 <a:solidFill>
                   <a:srgbClr val="5B6B78"/>
                 </a:solidFill>
@@ -13892,7 +14011,7 @@
               </a:rPr>
               <a:t>+12</a:t>
             </a:r>
-            <a:endParaRPr lang="en-US" sz="1223" dirty="0"/>
+            <a:endParaRPr lang="en-US" sz="1400" dirty="0"/>
           </a:p>
         </p:txBody>
       </p:sp>
@@ -13927,7 +14046,7 @@
               <a:buNone/>
             </a:pPr>
             <a:r>
-              <a:rPr lang="en-US" sz="1423" b="1" dirty="0">
+              <a:rPr lang="en-US" sz="1600" b="1" dirty="0">
                 <a:solidFill>
                   <a:srgbClr val="FFFFFF"/>
                 </a:solidFill>
@@ -13937,7 +14056,7 @@
               </a:rPr>
               <a:t>trailer_size</a:t>
             </a:r>
-            <a:endParaRPr lang="en-US" sz="1423" dirty="0"/>
+            <a:endParaRPr lang="en-US" sz="1600" dirty="0"/>
           </a:p>
         </p:txBody>
       </p:sp>
@@ -13966,7 +14085,7 @@
               <a:buNone/>
             </a:pPr>
             <a:r>
-              <a:rPr lang="en-US" sz="1223" dirty="0">
+              <a:rPr lang="en-US" sz="1400" dirty="0">
                 <a:solidFill>
                   <a:srgbClr val="5B6B78"/>
                 </a:solidFill>
@@ -13976,7 +14095,7 @@
               </a:rPr>
               <a:t>4 bytes</a:t>
             </a:r>
-            <a:endParaRPr lang="en-US" sz="1223" dirty="0"/>
+            <a:endParaRPr lang="en-US" sz="1400" dirty="0"/>
           </a:p>
         </p:txBody>
       </p:sp>
@@ -14005,7 +14124,7 @@
               <a:buNone/>
             </a:pPr>
             <a:r>
-              <a:rPr lang="en-US" sz="1423" dirty="0">
+              <a:rPr lang="en-US" sz="1600" dirty="0">
                 <a:solidFill>
                   <a:srgbClr val="1B2530"/>
                 </a:solidFill>
@@ -14015,7 +14134,7 @@
               </a:rPr>
               <a:t>whole trailer, in bytes</a:t>
             </a:r>
-            <a:endParaRPr lang="en-US" sz="1423" dirty="0"/>
+            <a:endParaRPr lang="en-US" sz="1600" dirty="0"/>
           </a:p>
         </p:txBody>
       </p:sp>
@@ -14044,7 +14163,7 @@
               <a:buNone/>
             </a:pPr>
             <a:r>
-              <a:rPr lang="en-US" sz="1223" dirty="0">
+              <a:rPr lang="en-US" sz="1400" dirty="0">
                 <a:solidFill>
                   <a:srgbClr val="5B6B78"/>
                 </a:solidFill>
@@ -14054,7 +14173,7 @@
               </a:rPr>
               <a:t>+16</a:t>
             </a:r>
-            <a:endParaRPr lang="en-US" sz="1223" dirty="0"/>
+            <a:endParaRPr lang="en-US" sz="1400" dirty="0"/>
           </a:p>
         </p:txBody>
       </p:sp>
@@ -14089,7 +14208,7 @@
               <a:buNone/>
             </a:pPr>
             <a:r>
-              <a:rPr lang="en-US" sz="1423" b="1" dirty="0">
+              <a:rPr lang="en-US" sz="1600" b="1" dirty="0">
                 <a:solidFill>
                   <a:srgbClr val="FFFFFF"/>
                 </a:solidFill>
@@ -14099,7 +14218,7 @@
               </a:rPr>
               <a:t>type</a:t>
             </a:r>
-            <a:endParaRPr lang="en-US" sz="1423" dirty="0"/>
+            <a:endParaRPr lang="en-US" sz="1600" dirty="0"/>
           </a:p>
         </p:txBody>
       </p:sp>
@@ -14128,7 +14247,7 @@
               <a:buNone/>
             </a:pPr>
             <a:r>
-              <a:rPr lang="en-US" sz="1223" dirty="0">
+              <a:rPr lang="en-US" sz="1400" dirty="0">
                 <a:solidFill>
                   <a:srgbClr val="5B6B78"/>
                 </a:solidFill>
@@ -14138,7 +14257,7 @@
               </a:rPr>
               <a:t>4 bytes</a:t>
             </a:r>
-            <a:endParaRPr lang="en-US" sz="1223" dirty="0"/>
+            <a:endParaRPr lang="en-US" sz="1400" dirty="0"/>
           </a:p>
         </p:txBody>
       </p:sp>
@@ -14167,7 +14286,7 @@
               <a:buNone/>
             </a:pPr>
             <a:r>
-              <a:rPr lang="en-US" sz="1423" dirty="0">
+              <a:rPr lang="en-US" sz="1600" dirty="0">
                 <a:solidFill>
                   <a:srgbClr val="1B2530"/>
                 </a:solidFill>
@@ -14177,7 +14296,7 @@
               </a:rPr>
               <a:t>META, ICON, SCRN, SIGN or COLO</a:t>
             </a:r>
-            <a:endParaRPr lang="en-US" sz="1423" dirty="0"/>
+            <a:endParaRPr lang="en-US" sz="1600" dirty="0"/>
           </a:p>
         </p:txBody>
       </p:sp>
@@ -14206,7 +14325,7 @@
               <a:buNone/>
             </a:pPr>
             <a:r>
-              <a:rPr lang="en-US" sz="1223" dirty="0">
+              <a:rPr lang="en-US" sz="1400" dirty="0">
                 <a:solidFill>
                   <a:srgbClr val="5B6B78"/>
                 </a:solidFill>
@@ -14216,7 +14335,7 @@
               </a:rPr>
               <a:t>+20</a:t>
             </a:r>
-            <a:endParaRPr lang="en-US" sz="1223" dirty="0"/>
+            <a:endParaRPr lang="en-US" sz="1400" dirty="0"/>
           </a:p>
         </p:txBody>
       </p:sp>
@@ -14251,7 +14370,7 @@
               <a:buNone/>
             </a:pPr>
             <a:r>
-              <a:rPr lang="en-US" sz="1423" b="1" dirty="0">
+              <a:rPr lang="en-US" sz="1600" b="1" dirty="0">
                 <a:solidFill>
                   <a:srgbClr val="FFFFFF"/>
                 </a:solidFill>
@@ -14261,7 +14380,7 @@
               </a:rPr>
               <a:t>length</a:t>
             </a:r>
-            <a:endParaRPr lang="en-US" sz="1423" dirty="0"/>
+            <a:endParaRPr lang="en-US" sz="1600" dirty="0"/>
           </a:p>
         </p:txBody>
       </p:sp>
@@ -14290,7 +14409,7 @@
               <a:buNone/>
             </a:pPr>
             <a:r>
-              <a:rPr lang="en-US" sz="1223" dirty="0">
+              <a:rPr lang="en-US" sz="1400" dirty="0">
                 <a:solidFill>
                   <a:srgbClr val="5B6B78"/>
                 </a:solidFill>
@@ -14300,7 +14419,7 @@
               </a:rPr>
               <a:t>4 bytes</a:t>
             </a:r>
-            <a:endParaRPr lang="en-US" sz="1223" dirty="0"/>
+            <a:endParaRPr lang="en-US" sz="1400" dirty="0"/>
           </a:p>
         </p:txBody>
       </p:sp>
@@ -14329,7 +14448,7 @@
               <a:buNone/>
             </a:pPr>
             <a:r>
-              <a:rPr lang="en-US" sz="1423" dirty="0">
+              <a:rPr lang="en-US" sz="1600" dirty="0">
                 <a:solidFill>
                   <a:srgbClr val="1B2530"/>
                 </a:solidFill>
@@ -14339,7 +14458,7 @@
               </a:rPr>
               <a:t>bytes that follow</a:t>
             </a:r>
-            <a:endParaRPr lang="en-US" sz="1423" dirty="0"/>
+            <a:endParaRPr lang="en-US" sz="1600" dirty="0"/>
           </a:p>
         </p:txBody>
       </p:sp>
@@ -14367,7 +14486,7 @@
             <a:pPr algn="r" indent="0" marL="0">
               <a:buNone/>
             </a:pPr>
-            <a:endParaRPr lang="en-US" sz="1223" dirty="0"/>
+            <a:endParaRPr lang="en-US" sz="1400" dirty="0"/>
           </a:p>
         </p:txBody>
       </p:sp>
@@ -14402,7 +14521,7 @@
               <a:buNone/>
             </a:pPr>
             <a:r>
-              <a:rPr lang="en-US" sz="1423" b="1" dirty="0">
+              <a:rPr lang="en-US" sz="1600" b="1" dirty="0">
                 <a:solidFill>
                   <a:srgbClr val="FFFFFF"/>
                 </a:solidFill>
@@ -14412,7 +14531,7 @@
               </a:rPr>
               <a:t>value</a:t>
             </a:r>
-            <a:endParaRPr lang="en-US" sz="1423" dirty="0"/>
+            <a:endParaRPr lang="en-US" sz="1600" dirty="0"/>
           </a:p>
         </p:txBody>
       </p:sp>
@@ -14441,7 +14560,7 @@
               <a:buNone/>
             </a:pPr>
             <a:r>
-              <a:rPr lang="en-US" sz="1223" dirty="0">
+              <a:rPr lang="en-US" sz="1400" dirty="0">
                 <a:solidFill>
                   <a:srgbClr val="5B6B78"/>
                 </a:solidFill>
@@ -14451,7 +14570,7 @@
               </a:rPr>
               <a:t>length</a:t>
             </a:r>
-            <a:endParaRPr lang="en-US" sz="1223" dirty="0"/>
+            <a:endParaRPr lang="en-US" sz="1400" dirty="0"/>
           </a:p>
         </p:txBody>
       </p:sp>
@@ -14480,7 +14599,7 @@
               <a:buNone/>
             </a:pPr>
             <a:r>
-              <a:rPr lang="en-US" sz="1423" dirty="0">
+              <a:rPr lang="en-US" sz="1600" dirty="0">
                 <a:solidFill>
                   <a:srgbClr val="1B2530"/>
                 </a:solidFill>
@@ -14490,7 +14609,7 @@
               </a:rPr>
               <a:t>JSON or image bytes; repeated per entry</a:t>
             </a:r>
-            <a:endParaRPr lang="en-US" sz="1423" dirty="0"/>
+            <a:endParaRPr lang="en-US" sz="1600" dirty="0"/>
           </a:p>
         </p:txBody>
       </p:sp>
@@ -19730,7 +19849,7 @@
               <a:buNone/>
             </a:pPr>
             <a:r>
-              <a:rPr lang="en-US" sz="1000" dirty="0">
+              <a:rPr lang="en-US" sz="1250" dirty="0">
                 <a:solidFill>
                   <a:srgbClr val="8FB3A0"/>
                 </a:solidFill>
@@ -19740,14 +19859,14 @@
               </a:rPr>
               <a:t>#!/usr/bin/env bash</a:t>
             </a:r>
-            <a:endParaRPr lang="en-US" sz="1000" dirty="0"/>
+            <a:endParaRPr lang="en-US" sz="1250" dirty="0"/>
           </a:p>
           <a:p>
             <a:pPr indent="0" marL="0">
               <a:buNone/>
             </a:pPr>
             <a:r>
-              <a:rPr lang="en-US" sz="1000" dirty="0">
+              <a:rPr lang="en-US" sz="1250" dirty="0">
                 <a:solidFill>
                   <a:srgbClr val="8FB3A0"/>
                 </a:solidFill>
@@ -19757,14 +19876,14 @@
               </a:rPr>
               <a:t># Administrators: first deployment of a classroom Store.</a:t>
             </a:r>
-            <a:endParaRPr lang="en-US" sz="1000" dirty="0"/>
+            <a:endParaRPr lang="en-US" sz="1250" dirty="0"/>
           </a:p>
           <a:p>
             <a:pPr indent="0" marL="0">
               <a:buNone/>
             </a:pPr>
             <a:r>
-              <a:rPr lang="en-US" sz="1000" dirty="0">
+              <a:rPr lang="en-US" sz="1250" dirty="0">
                 <a:solidFill>
                   <a:srgbClr val="E6EDF2"/>
                 </a:solidFill>
@@ -19774,14 +19893,14 @@
               </a:rPr>
               <a:t>git clone https://github.com/riscv-prg32/CartridgeStore.git</a:t>
             </a:r>
-            <a:endParaRPr lang="en-US" sz="1000" dirty="0"/>
+            <a:endParaRPr lang="en-US" sz="1250" dirty="0"/>
           </a:p>
           <a:p>
             <a:pPr indent="0" marL="0">
               <a:buNone/>
             </a:pPr>
             <a:r>
-              <a:rPr lang="en-US" sz="1000" dirty="0">
+              <a:rPr lang="en-US" sz="1250" dirty="0">
                 <a:solidFill>
                   <a:srgbClr val="E6EDF2"/>
                 </a:solidFill>
@@ -19791,14 +19910,14 @@
               </a:rPr>
               <a:t>cd CartridgeStore</a:t>
             </a:r>
-            <a:endParaRPr lang="en-US" sz="1000" dirty="0"/>
+            <a:endParaRPr lang="en-US" sz="1250" dirty="0"/>
           </a:p>
           <a:p>
             <a:pPr indent="0" marL="0">
               <a:buNone/>
             </a:pPr>
             <a:r>
-              <a:rPr lang="en-US" sz="1000" dirty="0">
+              <a:rPr lang="en-US" sz="1250" dirty="0">
                 <a:solidFill>
                   <a:srgbClr val="E6EDF2"/>
                 </a:solidFill>
@@ -19806,16 +19925,16 @@
                 <a:ea typeface="Courier New" pitchFamily="34" charset="-122"/>
                 <a:cs typeface="Courier New" pitchFamily="34" charset="-120"/>
               </a:rPr>
-              <a:t>export SECRET_KEY="$(python3 -c 'import secrets; print(secrets.token_urlsafe(32))')"</a:t>
-            </a:r>
-            <a:endParaRPr lang="en-US" sz="1000" dirty="0"/>
+              <a:t>export SECRET_KEY="$(python3 -c 'import secrets;</a:t>
+            </a:r>
+            <a:endParaRPr lang="en-US" sz="1250" dirty="0"/>
           </a:p>
           <a:p>
             <a:pPr indent="0" marL="0">
               <a:buNone/>
             </a:pPr>
             <a:r>
-              <a:rPr lang="en-US" sz="1000" dirty="0">
+              <a:rPr lang="en-US" sz="1250" dirty="0">
                 <a:solidFill>
                   <a:srgbClr val="E6EDF2"/>
                 </a:solidFill>
@@ -19823,16 +19942,16 @@
                 <a:ea typeface="Courier New" pitchFamily="34" charset="-122"/>
                 <a:cs typeface="Courier New" pitchFamily="34" charset="-120"/>
               </a:rPr>
-              <a:t>docker compose up --build -d</a:t>
-            </a:r>
-            <a:endParaRPr lang="en-US" sz="1000" dirty="0"/>
+              <a:t>    print(secrets.token_urlsafe(32))')"</a:t>
+            </a:r>
+            <a:endParaRPr lang="en-US" sz="1250" dirty="0"/>
           </a:p>
           <a:p>
             <a:pPr indent="0" marL="0">
               <a:buNone/>
             </a:pPr>
             <a:r>
-              <a:rPr lang="en-US" sz="1000" dirty="0">
+              <a:rPr lang="en-US" sz="1250" dirty="0">
                 <a:solidFill>
                   <a:srgbClr val="E6EDF2"/>
                 </a:solidFill>
@@ -19840,30 +19959,30 @@
                 <a:ea typeface="Courier New" pitchFamily="34" charset="-122"/>
                 <a:cs typeface="Courier New" pitchFamily="34" charset="-120"/>
               </a:rPr>
-              <a:t>curl http://127.0.0.1:5080/.well-known/prg32-store.json  </a:t>
-            </a:r>
+              <a:t>docker compose up --build -d</a:t>
+            </a:r>
+            <a:endParaRPr lang="en-US" sz="1250" dirty="0"/>
+          </a:p>
+          <a:p>
             <a:pPr indent="0" marL="0">
               <a:buNone/>
             </a:pPr>
             <a:r>
-              <a:rPr lang="en-US" sz="1000" dirty="0">
-                <a:solidFill>
-                  <a:srgbClr val="8FB3A0"/>
+              <a:rPr lang="en-US" sz="1250" dirty="0">
+                <a:solidFill>
+                  <a:srgbClr val="E6EDF2"/>
                 </a:solidFill>
                 <a:latin typeface="Courier New" pitchFamily="34" charset="0"/>
                 <a:ea typeface="Courier New" pitchFamily="34" charset="-122"/>
                 <a:cs typeface="Courier New" pitchFamily="34" charset="-120"/>
               </a:rPr>
-              <a:t> # health check</a:t>
-            </a:r>
-            <a:endParaRPr lang="en-US" sz="1000" dirty="0"/>
-          </a:p>
-          <a:p>
+              <a:t>curl http://127.0.0.1:5080/.well-known/prg32-store.json  </a:t>
+            </a:r>
             <a:pPr indent="0" marL="0">
               <a:buNone/>
             </a:pPr>
             <a:r>
-              <a:rPr lang="en-US" sz="1000" dirty="0">
+              <a:rPr lang="en-US" sz="1250" dirty="0">
                 <a:solidFill>
                   <a:srgbClr val="8FB3A0"/>
                 </a:solidFill>
@@ -19871,9 +19990,60 @@
                 <a:ea typeface="Courier New" pitchFamily="34" charset="-122"/>
                 <a:cs typeface="Courier New" pitchFamily="34" charset="-120"/>
               </a:rPr>
-              <a:t># Then log in as admin at /auth/login and change the default password.</a:t>
-            </a:r>
-            <a:endParaRPr lang="en-US" sz="1000" dirty="0"/>
+              <a:t> # health</a:t>
+            </a:r>
+            <a:endParaRPr lang="en-US" sz="1250" dirty="0"/>
+          </a:p>
+          <a:p>
+            <a:pPr indent="0" marL="0">
+              <a:buNone/>
+            </a:pPr>
+            <a:r>
+              <a:rPr lang="en-US" sz="1250" dirty="0">
+                <a:solidFill>
+                  <a:srgbClr val="E6EDF2"/>
+                </a:solidFill>
+                <a:latin typeface="Courier New" pitchFamily="34" charset="0"/>
+                <a:ea typeface="Courier New" pitchFamily="34" charset="-122"/>
+                <a:cs typeface="Courier New" pitchFamily="34" charset="-120"/>
+              </a:rPr>
+              <a:t>    check</a:t>
+            </a:r>
+            <a:endParaRPr lang="en-US" sz="1250" dirty="0"/>
+          </a:p>
+          <a:p>
+            <a:pPr indent="0" marL="0">
+              <a:buNone/>
+            </a:pPr>
+            <a:r>
+              <a:rPr lang="en-US" sz="1250" dirty="0">
+                <a:solidFill>
+                  <a:srgbClr val="8FB3A0"/>
+                </a:solidFill>
+                <a:latin typeface="Courier New" pitchFamily="34" charset="0"/>
+                <a:ea typeface="Courier New" pitchFamily="34" charset="-122"/>
+                <a:cs typeface="Courier New" pitchFamily="34" charset="-120"/>
+              </a:rPr>
+              <a:t># Then log in as admin at /auth/login and change the default</a:t>
+            </a:r>
+            <a:endParaRPr lang="en-US" sz="1250" dirty="0"/>
+          </a:p>
+          <a:p>
+            <a:pPr indent="0" marL="0">
+              <a:buNone/>
+            </a:pPr>
+            <a:r>
+              <a:rPr lang="en-US" sz="1250" dirty="0">
+                <a:solidFill>
+                  <a:srgbClr val="E6EDF2"/>
+                </a:solidFill>
+                <a:latin typeface="Courier New" pitchFamily="34" charset="0"/>
+                <a:ea typeface="Courier New" pitchFamily="34" charset="-122"/>
+                <a:cs typeface="Courier New" pitchFamily="34" charset="-120"/>
+              </a:rPr>
+              <a:t>    password.</a:t>
+            </a:r>
+            <a:endParaRPr lang="en-US" sz="1250" dirty="0"/>
           </a:p>
         </p:txBody>
       </p:sp>
